--- a/docs/DOGZILLA_專案簡報.pptx
+++ b/docs/DOGZILLA_專案簡報.pptx
@@ -10,6 +10,7 @@
     <p:sldId id="258" r:id="rId10"/>
     <p:sldId id="259" r:id="rId11"/>
     <p:sldId id="260" r:id="rId12"/>
+    <p:sldId id="268" r:id="rId20"/>
     <p:sldId id="261" r:id="rId13"/>
     <p:sldId id="262" r:id="rId14"/>
     <p:sldId id="263" r:id="rId15"/>
@@ -598,7 +599,12 @@
           </a:p>
           <a:p>
             <a:r>
-              <a:t>最重要的是第一項：上實機。模擬裡的速度、晃動、重量都需要用實機重新量，例如官方模型的總重只有 0.6 公斤，可能沒算進電池。</a:t>
+              <a:t>最重要的是上實機。模擬裡的總重已經改成實機秤重，但重量在機身各處怎麼分布是推估的，速度和晃動也要用實機重新量。</a:t>
+            </a:r>
+          </a:p>
+          <a:p>
+            <a:r>
+              <a:t>第二是速度：現在為了不翻倒，速度指令上限設在每秒 15 公分，實際只有約 8 公分。轉彎時自動降速的設定是舊重量時加的，新重量下可以放寬，放寬後重新訓練應該能走快。</a:t>
             </a:r>
           </a:p>
           <a:p>
@@ -808,6 +814,101 @@
 </p:notes>
 </file>
 
+<file path=ppt/notesSlides/notesSlide13.xml><?xml version="1.0" encoding="utf-8"?>
+<p:notes xmlns:a="http://schemas.openxmlformats.org/drawingml/2006/main" xmlns:p="http://schemas.openxmlformats.org/presentationml/2006/main" xmlns:r="http://schemas.openxmlformats.org/officeDocument/2006/relationships">
+  <p:cSld>
+    <p:spTree>
+      <p:nvGrpSpPr>
+        <p:cNvPr id="1" name=""/>
+        <p:cNvGrpSpPr/>
+        <p:nvPr/>
+      </p:nvGrpSpPr>
+      <p:grpSpPr>
+        <a:xfrm>
+          <a:off x="0" y="0"/>
+          <a:ext cx="0" cy="0"/>
+          <a:chOff x="0" y="0"/>
+          <a:chExt cx="0" cy="0"/>
+        </a:xfrm>
+      </p:grpSpPr>
+      <p:sp>
+        <p:nvSpPr>
+          <p:cNvPr id="2" name="Slide Image Placeholder 1"/>
+          <p:cNvSpPr>
+            <a:spLocks noGrp="1"/>
+          </p:cNvSpPr>
+          <p:nvPr>
+            <p:ph type="sldImg" idx="2"/>
+          </p:nvPr>
+        </p:nvSpPr>
+        <p:spPr/>
+      </p:sp>
+      <p:sp>
+        <p:nvSpPr>
+          <p:cNvPr id="3" name="Notes Placeholder 2"/>
+          <p:cNvSpPr>
+            <a:spLocks noGrp="1"/>
+          </p:cNvSpPr>
+          <p:nvPr>
+            <p:ph type="body" idx="3" sz="quarter"/>
+          </p:nvPr>
+        </p:nvSpPr>
+        <p:spPr/>
+        <p:txBody>
+          <a:bodyPr/>
+          <a:lstStyle/>
+          <a:p>
+            <a:r>
+              <a:t>加裝的 LiDAR 有 45 公克，裝在機身上方，位置會影響走路穩不穩。</a:t>
+            </a:r>
+          </a:p>
+          <a:p>
+            <a:r>
+              <a:t>我們在模擬裡把 LiDAR 放在 8 個前後位置，每個位置都實際走一遍：前進、原地轉、邊走邊轉，量機身晃動。</a:t>
+            </a:r>
+          </a:p>
+          <a:p>
+            <a:r>
+              <a:t>結果很清楚：放在官方位置或更前面，走路會大幅晃動甚至翻倒；往後 4 到 8.6 公分都穩。我們取中間的 6 公分，裝的時候差一兩公分也不影響。</a:t>
+            </a:r>
+          </a:p>
+          <a:p>
+            <a:r>
+              <a:t>要誠實說：為什麼往後比較穩，我們還沒查明。靜態質心在各位置只差約 6 公釐，解釋不了。這是實測的結果。</a:t>
+            </a:r>
+          </a:p>
+          <a:p>
+            <a:r>
+              <a:t>實機安裝時，這個位置在機身後段較低的平台上方，需要一個大約 3.2 公分高的支架，讓 LiDAR 的掃描平面高過相機。</a:t>
+            </a:r>
+          </a:p>
+          <a:p>
+            <a:r>
+              <a:t>另外，加重之後原本的關節控制參數撐不住，重新調整後才穩。</a:t>
+            </a:r>
+          </a:p>
+        </p:txBody>
+      </p:sp>
+      <p:sp>
+        <p:nvSpPr>
+          <p:cNvPr id="4" name="Slide Number Placeholder 3"/>
+          <p:cNvSpPr>
+            <a:spLocks noGrp="1"/>
+          </p:cNvSpPr>
+          <p:nvPr>
+            <p:ph type="sldNum" idx="5" sz="quarter"/>
+          </p:nvPr>
+        </p:nvSpPr>
+        <p:spPr/>
+      </p:sp>
+    </p:spTree>
+  </p:cSld>
+  <p:clrMapOvr>
+    <a:masterClrMapping/>
+  </p:clrMapOvr>
+</p:notes>
+</file>
+
 <file path=ppt/notesSlides/notesSlide2.xml><?xml version="1.0" encoding="utf-8"?>
 <p:notes xmlns:a="http://schemas.openxmlformats.org/drawingml/2006/main" xmlns:p="http://schemas.openxmlformats.org/presentationml/2006/main" xmlns:r="http://schemas.openxmlformats.org/officeDocument/2006/relationships">
   <p:cSld>
@@ -1123,7 +1224,12 @@
           </a:p>
           <a:p>
             <a:r>
-              <a:t>但官方檔不能直接模擬，我們找到並修正了幾個問題：關節名稱打錯、各腿旋轉方向不一致、左右重量不對稱、碰撞形狀會讓模擬器崩潰。</a:t>
+              <a:t>但官方檔不能直接模擬，我們找到並修正了幾個問題：關節名稱打錯、各腿旋轉方向不一致、碰撞形狀會讓模擬器崩潰。</a:t>
+            </a:r>
+          </a:p>
+          <a:p>
+            <a:r>
+              <a:t>重量也改了：官方檔的本體只有約 0.6 公斤，實機秤起來是 870 到 880 公克，所以把各部位等比例放大到 875 公克，再加上 45 公克的 LiDAR，總共 920 公克。</a:t>
             </a:r>
           </a:p>
           <a:p>
@@ -1203,22 +1309,22 @@
           </a:p>
           <a:p>
             <a:r>
-              <a:t>藍線是機器狗實際走過的路：先往上繞過長方塊，再從中間穿過，最後到右上角。</a:t>
-            </a:r>
-          </a:p>
-          <a:p>
-            <a:r>
-              <a:t>點線是機器狗自己用 LiDAR 畫出的地圖，和灰色的真實障礙物大致對得上，偏差約 0.2 公尺——這就是定位誤差，後面會再提到。</a:t>
-            </a:r>
-          </a:p>
-          <a:p>
-            <a:r>
-              <a:t>結果：走了 14.4 公尺，約 143 秒到達，最後離目標只差 7 公分。</a:t>
-            </a:r>
-          </a:p>
-          <a:p>
-            <a:r>
-              <a:t>（備註：導航程式在 150 秒時限內還在做最後的方向對齊，所以正式狀態記為逾時，但位置已經到了。）</a:t>
+              <a:t>藍線是機器狗實際走過的路：先往上繞過長方塊，從中間穿過，再從下面繞過圓柱，最後到右上角。</a:t>
+            </a:r>
+          </a:p>
+          <a:p>
+            <a:r>
+              <a:t>這次用的是強化學習避障。約 108 秒到達，全程沒有擦碰，離障礙物最近 13 公分。</a:t>
+            </a:r>
+          </a:p>
+          <a:p>
+            <a:r>
+              <a:t>停下時離目標 26 公分：強化學習控制器的設定是進入目標 25 公分內就算到達，所以不是誤差大，而是到達範圍設得寬。</a:t>
+            </a:r>
+          </a:p>
+          <a:p>
+            <a:r>
+              <a:t>同樣的測試跑了兩次，另一次是 117 秒，結果一致。</a:t>
             </a:r>
           </a:p>
         </p:txBody>
@@ -1393,7 +1499,7 @@
           </a:p>
           <a:p>
             <a:r>
-              <a:t>結果四個數字都大幅改善，速度反而變快五倍。</a:t>
+              <a:t>這四個數字是模型還用官方質量（625 公克）時量的。後來改成實機重量 920 公克，重新調整關節參數後，晃動約 2.5 度、最大傾斜約 5 度，仍然穩。</a:t>
             </a:r>
           </a:p>
         </p:txBody>
@@ -1468,17 +1574,22 @@
           </a:p>
           <a:p>
             <a:r>
-              <a:t>「控制器回報完成」是導航程式自己認為到了；「真的到達」是實際離目標 35 公分以內。兩者的落差主要來自定位誤差。</a:t>
-            </a:r>
-          </a:p>
-          <a:p>
-            <a:r>
-              <a:t>要誠實說：主任務成功了，但連續多點的到達率還不高。原因是 S1 走得慢（約 0.13 m/s），大場地常常 150 秒內走不完，而且跑久了定位誤差會累積。</a:t>
-            </a:r>
-          </a:p>
-          <a:p>
-            <a:r>
-              <a:t>強化學習速度快，但在窄通道擦碰比較多。</a:t>
+              <a:t>「控制器回報完成」是導航程式自己認為到了；「真的到達」是實際離目標 35 公分以內。</a:t>
+            </a:r>
+          </a:p>
+          <a:p>
+            <a:r>
+              <a:t>強化學習跑了兩次，兩次都是 7 個目標全部到達，沒有擦碰，也沒有翻倒。</a:t>
+            </a:r>
+          </a:p>
+          <a:p>
+            <a:r>
+              <a:t>要誠實說明兩點。第一，進步主要來自模型變穩：改成實機重量、調整 LiDAR 位置和關節參數之後，舊的權重也能 7 個全到；新訓練的版本只快了一點。</a:t>
+            </a:r>
+          </a:p>
+          <a:p>
+            <a:r>
+              <a:t>第二，這只在一個場地驗證過，而且走得慢，實際約每秒 8 公分。傳統的 Nav2 方法這次沒有重新調整，所以表現和之前差不多。</a:t>
             </a:r>
           </a:p>
         </p:txBody>
@@ -5117,7 +5228,7 @@
                 <a:ea typeface="Microsoft JhengHei"/>
                 <a:cs typeface="Microsoft JhengHei"/>
               </a:rPr>
-              <a:t>限制與下一步</a:t>
+              <a:t>避障測試結果</a:t>
             </a:r>
           </a:p>
         </p:txBody>
@@ -5196,7 +5307,7 @@
                 <a:ea typeface="Microsoft JhengHei"/>
                 <a:cs typeface="Microsoft JhengHei"/>
               </a:rPr>
-              <a:t>模擬已經把系統做通，接下來提高可靠度並搬到實機</a:t>
+              <a:t>連續走 7 個目標點：強化學習兩次都是 7 / 7 到達，沒有擦碰、沒有翻倒</a:t>
             </a:r>
           </a:p>
         </p:txBody>
@@ -5289,16 +5400,553 @@
           </a:p>
         </p:txBody>
       </p:sp>
-      <p:sp>
-        <p:nvSpPr>
-          <p:cNvPr id="10" name="TextBox 9"/>
+      <p:graphicFrame>
+        <p:nvGraphicFramePr>
+          <p:cNvPr id="10" name="Table 9"/>
+          <p:cNvGraphicFramePr>
+            <a:graphicFrameLocks noGrp="1"/>
+          </p:cNvGraphicFramePr>
+          <p:nvPr/>
+        </p:nvGraphicFramePr>
+        <p:xfrm>
+          <a:off x="548640" y="2286000"/>
+          <a:ext cx="11091672" cy="2011680"/>
+        </p:xfrm>
+        <a:graphic>
+          <a:graphicData uri="http://schemas.openxmlformats.org/drawingml/2006/table">
+            <a:tbl>
+              <a:tblPr firstRow="1" bandRow="1">
+                <a:tableStyleId>{5940675A-B579-460E-94D1-54222C63F5DA}</a:tableStyleId>
+              </a:tblPr>
+              <a:tblGrid>
+                <a:gridCol w="2743200"/>
+                <a:gridCol w="2103120"/>
+                <a:gridCol w="1828800"/>
+                <a:gridCol w="1828800"/>
+                <a:gridCol w="2587752"/>
+              </a:tblGrid>
+              <a:tr h="502920">
+                <a:tc>
+                  <a:txBody>
+                    <a:bodyPr wrap="square"/>
+                    <a:lstStyle/>
+                    <a:p>
+                      <a:pPr algn="l"/>
+                      <a:r>
+                        <a:rPr sz="1350" b="1">
+                          <a:solidFill>
+                            <a:srgbClr val="FFFFFF"/>
+                          </a:solidFill>
+                          <a:latin typeface="Calibri"/>
+                          <a:ea typeface="Microsoft JhengHei"/>
+                          <a:cs typeface="Microsoft JhengHei"/>
+                        </a:rPr>
+                        <a:t>避障方法</a:t>
+                      </a:r>
+                    </a:p>
+                  </a:txBody>
+                  <a:tcPr marL="73152" marR="73152" marT="36576" marB="36576" anchor="ctr">
+                    <a:solidFill>
+                      <a:srgbClr val="00549D"/>
+                    </a:solidFill>
+                  </a:tcPr>
+                </a:tc>
+                <a:tc>
+                  <a:txBody>
+                    <a:bodyPr wrap="square"/>
+                    <a:lstStyle/>
+                    <a:p>
+                      <a:pPr algn="l"/>
+                      <a:r>
+                        <a:rPr sz="1350" b="1">
+                          <a:solidFill>
+                            <a:srgbClr val="FFFFFF"/>
+                          </a:solidFill>
+                          <a:latin typeface="Calibri"/>
+                          <a:ea typeface="Microsoft JhengHei"/>
+                          <a:cs typeface="Microsoft JhengHei"/>
+                        </a:rPr>
+                        <a:t>控制器回報完成</a:t>
+                      </a:r>
+                    </a:p>
+                  </a:txBody>
+                  <a:tcPr marL="73152" marR="73152" marT="36576" marB="36576" anchor="ctr">
+                    <a:solidFill>
+                      <a:srgbClr val="00549D"/>
+                    </a:solidFill>
+                  </a:tcPr>
+                </a:tc>
+                <a:tc>
+                  <a:txBody>
+                    <a:bodyPr wrap="square"/>
+                    <a:lstStyle/>
+                    <a:p>
+                      <a:pPr algn="l"/>
+                      <a:r>
+                        <a:rPr sz="1350" b="1">
+                          <a:solidFill>
+                            <a:srgbClr val="FFFFFF"/>
+                          </a:solidFill>
+                          <a:latin typeface="Calibri"/>
+                          <a:ea typeface="Microsoft JhengHei"/>
+                          <a:cs typeface="Microsoft JhengHei"/>
+                        </a:rPr>
+                        <a:t>真的到達</a:t>
+                      </a:r>
+                    </a:p>
+                  </a:txBody>
+                  <a:tcPr marL="73152" marR="73152" marT="36576" marB="36576" anchor="ctr">
+                    <a:solidFill>
+                      <a:srgbClr val="00549D"/>
+                    </a:solidFill>
+                  </a:tcPr>
+                </a:tc>
+                <a:tc>
+                  <a:txBody>
+                    <a:bodyPr wrap="square"/>
+                    <a:lstStyle/>
+                    <a:p>
+                      <a:pPr algn="l"/>
+                      <a:r>
+                        <a:rPr sz="1350" b="1">
+                          <a:solidFill>
+                            <a:srgbClr val="FFFFFF"/>
+                          </a:solidFill>
+                          <a:latin typeface="Calibri"/>
+                          <a:ea typeface="Microsoft JhengHei"/>
+                          <a:cs typeface="Microsoft JhengHei"/>
+                        </a:rPr>
+                        <a:t>擦碰次數</a:t>
+                      </a:r>
+                    </a:p>
+                  </a:txBody>
+                  <a:tcPr marL="73152" marR="73152" marT="36576" marB="36576" anchor="ctr">
+                    <a:solidFill>
+                      <a:srgbClr val="00549D"/>
+                    </a:solidFill>
+                  </a:tcPr>
+                </a:tc>
+                <a:tc>
+                  <a:txBody>
+                    <a:bodyPr wrap="square"/>
+                    <a:lstStyle/>
+                    <a:p>
+                      <a:pPr algn="l"/>
+                      <a:r>
+                        <a:rPr sz="1350" b="1">
+                          <a:solidFill>
+                            <a:srgbClr val="FFFFFF"/>
+                          </a:solidFill>
+                          <a:latin typeface="Calibri"/>
+                          <a:ea typeface="Microsoft JhengHei"/>
+                          <a:cs typeface="Microsoft JhengHei"/>
+                        </a:rPr>
+                        <a:t>特色</a:t>
+                      </a:r>
+                    </a:p>
+                  </a:txBody>
+                  <a:tcPr marL="73152" marR="73152" marT="36576" marB="36576" anchor="ctr">
+                    <a:solidFill>
+                      <a:srgbClr val="00549D"/>
+                    </a:solidFill>
+                  </a:tcPr>
+                </a:tc>
+              </a:tr>
+              <a:tr h="502920">
+                <a:tc>
+                  <a:txBody>
+                    <a:bodyPr wrap="square"/>
+                    <a:lstStyle/>
+                    <a:p>
+                      <a:pPr algn="l"/>
+                      <a:r>
+                        <a:rPr sz="1350" b="0">
+                          <a:solidFill>
+                            <a:srgbClr val="0B0B0B"/>
+                          </a:solidFill>
+                          <a:latin typeface="Calibri"/>
+                          <a:ea typeface="Microsoft JhengHei"/>
+                          <a:cs typeface="Microsoft JhengHei"/>
+                        </a:rPr>
+                        <a:t>強化學習（PPO）</a:t>
+                      </a:r>
+                    </a:p>
+                  </a:txBody>
+                  <a:tcPr marL="73152" marR="73152" marT="36576" marB="36576" anchor="ctr">
+                    <a:solidFill>
+                      <a:srgbClr val="FFFFFF"/>
+                    </a:solidFill>
+                  </a:tcPr>
+                </a:tc>
+                <a:tc>
+                  <a:txBody>
+                    <a:bodyPr wrap="square"/>
+                    <a:lstStyle/>
+                    <a:p>
+                      <a:pPr algn="ctr"/>
+                      <a:r>
+                        <a:rPr sz="1350" b="0">
+                          <a:solidFill>
+                            <a:srgbClr val="0B0B0B"/>
+                          </a:solidFill>
+                          <a:latin typeface="Calibri"/>
+                          <a:ea typeface="Microsoft JhengHei"/>
+                          <a:cs typeface="Microsoft JhengHei"/>
+                        </a:rPr>
+                        <a:t>7 / 7</a:t>
+                      </a:r>
+                    </a:p>
+                  </a:txBody>
+                  <a:tcPr marL="73152" marR="73152" marT="36576" marB="36576" anchor="ctr">
+                    <a:solidFill>
+                      <a:srgbClr val="FFFFFF"/>
+                    </a:solidFill>
+                  </a:tcPr>
+                </a:tc>
+                <a:tc>
+                  <a:txBody>
+                    <a:bodyPr wrap="square"/>
+                    <a:lstStyle/>
+                    <a:p>
+                      <a:pPr algn="ctr"/>
+                      <a:r>
+                        <a:rPr sz="1350" b="0">
+                          <a:solidFill>
+                            <a:srgbClr val="0B0B0B"/>
+                          </a:solidFill>
+                          <a:latin typeface="Calibri"/>
+                          <a:ea typeface="Microsoft JhengHei"/>
+                          <a:cs typeface="Microsoft JhengHei"/>
+                        </a:rPr>
+                        <a:t>7 / 7</a:t>
+                      </a:r>
+                    </a:p>
+                  </a:txBody>
+                  <a:tcPr marL="73152" marR="73152" marT="36576" marB="36576" anchor="ctr">
+                    <a:solidFill>
+                      <a:srgbClr val="FFFFFF"/>
+                    </a:solidFill>
+                  </a:tcPr>
+                </a:tc>
+                <a:tc>
+                  <a:txBody>
+                    <a:bodyPr wrap="square"/>
+                    <a:lstStyle/>
+                    <a:p>
+                      <a:pPr algn="ctr"/>
+                      <a:r>
+                        <a:rPr sz="1350" b="0">
+                          <a:solidFill>
+                            <a:srgbClr val="0B0B0B"/>
+                          </a:solidFill>
+                          <a:latin typeface="Calibri"/>
+                          <a:ea typeface="Microsoft JhengHei"/>
+                          <a:cs typeface="Microsoft JhengHei"/>
+                        </a:rPr>
+                        <a:t>0</a:t>
+                      </a:r>
+                    </a:p>
+                  </a:txBody>
+                  <a:tcPr marL="73152" marR="73152" marT="36576" marB="36576" anchor="ctr">
+                    <a:solidFill>
+                      <a:srgbClr val="FFFFFF"/>
+                    </a:solidFill>
+                  </a:tcPr>
+                </a:tc>
+                <a:tc>
+                  <a:txBody>
+                    <a:bodyPr wrap="square"/>
+                    <a:lstStyle/>
+                    <a:p>
+                      <a:pPr algn="l"/>
+                      <a:r>
+                        <a:rPr sz="1350" b="0">
+                          <a:solidFill>
+                            <a:srgbClr val="0B0B0B"/>
+                          </a:solidFill>
+                          <a:latin typeface="Calibri"/>
+                          <a:ea typeface="Microsoft JhengHei"/>
+                          <a:cs typeface="Microsoft JhengHei"/>
+                        </a:rPr>
+                        <a:t>兩次結果相同，每段約 80 秒</a:t>
+                      </a:r>
+                    </a:p>
+                  </a:txBody>
+                  <a:tcPr marL="73152" marR="73152" marT="36576" marB="36576" anchor="ctr">
+                    <a:solidFill>
+                      <a:srgbClr val="FFFFFF"/>
+                    </a:solidFill>
+                  </a:tcPr>
+                </a:tc>
+              </a:tr>
+              <a:tr h="502920">
+                <a:tc>
+                  <a:txBody>
+                    <a:bodyPr wrap="square"/>
+                    <a:lstStyle/>
+                    <a:p>
+                      <a:pPr algn="l"/>
+                      <a:r>
+                        <a:rPr sz="1350" b="0">
+                          <a:solidFill>
+                            <a:srgbClr val="0B0B0B"/>
+                          </a:solidFill>
+                          <a:latin typeface="Calibri"/>
+                          <a:ea typeface="Microsoft JhengHei"/>
+                          <a:cs typeface="Microsoft JhengHei"/>
+                        </a:rPr>
+                        <a:t>Nav2 RPP</a:t>
+                      </a:r>
+                    </a:p>
+                  </a:txBody>
+                  <a:tcPr marL="73152" marR="73152" marT="36576" marB="36576" anchor="ctr">
+                    <a:solidFill>
+                      <a:srgbClr val="F4F4F2"/>
+                    </a:solidFill>
+                  </a:tcPr>
+                </a:tc>
+                <a:tc>
+                  <a:txBody>
+                    <a:bodyPr wrap="square"/>
+                    <a:lstStyle/>
+                    <a:p>
+                      <a:pPr algn="ctr"/>
+                      <a:r>
+                        <a:rPr sz="1350" b="0">
+                          <a:solidFill>
+                            <a:srgbClr val="0B0B0B"/>
+                          </a:solidFill>
+                          <a:latin typeface="Calibri"/>
+                          <a:ea typeface="Microsoft JhengHei"/>
+                          <a:cs typeface="Microsoft JhengHei"/>
+                        </a:rPr>
+                        <a:t>3 / 7</a:t>
+                      </a:r>
+                    </a:p>
+                  </a:txBody>
+                  <a:tcPr marL="73152" marR="73152" marT="36576" marB="36576" anchor="ctr">
+                    <a:solidFill>
+                      <a:srgbClr val="F4F4F2"/>
+                    </a:solidFill>
+                  </a:tcPr>
+                </a:tc>
+                <a:tc>
+                  <a:txBody>
+                    <a:bodyPr wrap="square"/>
+                    <a:lstStyle/>
+                    <a:p>
+                      <a:pPr algn="ctr"/>
+                      <a:r>
+                        <a:rPr sz="1350" b="0">
+                          <a:solidFill>
+                            <a:srgbClr val="0B0B0B"/>
+                          </a:solidFill>
+                          <a:latin typeface="Calibri"/>
+                          <a:ea typeface="Microsoft JhengHei"/>
+                          <a:cs typeface="Microsoft JhengHei"/>
+                        </a:rPr>
+                        <a:t>1 / 7</a:t>
+                      </a:r>
+                    </a:p>
+                  </a:txBody>
+                  <a:tcPr marL="73152" marR="73152" marT="36576" marB="36576" anchor="ctr">
+                    <a:solidFill>
+                      <a:srgbClr val="F4F4F2"/>
+                    </a:solidFill>
+                  </a:tcPr>
+                </a:tc>
+                <a:tc>
+                  <a:txBody>
+                    <a:bodyPr wrap="square"/>
+                    <a:lstStyle/>
+                    <a:p>
+                      <a:pPr algn="ctr"/>
+                      <a:r>
+                        <a:rPr sz="1350" b="0">
+                          <a:solidFill>
+                            <a:srgbClr val="0B0B0B"/>
+                          </a:solidFill>
+                          <a:latin typeface="Calibri"/>
+                          <a:ea typeface="Microsoft JhengHei"/>
+                          <a:cs typeface="Microsoft JhengHei"/>
+                        </a:rPr>
+                        <a:t>3</a:t>
+                      </a:r>
+                    </a:p>
+                  </a:txBody>
+                  <a:tcPr marL="73152" marR="73152" marT="36576" marB="36576" anchor="ctr">
+                    <a:solidFill>
+                      <a:srgbClr val="F4F4F2"/>
+                    </a:solidFill>
+                  </a:tcPr>
+                </a:tc>
+                <a:tc>
+                  <a:txBody>
+                    <a:bodyPr wrap="square"/>
+                    <a:lstStyle/>
+                    <a:p>
+                      <a:pPr algn="l"/>
+                      <a:r>
+                        <a:rPr sz="1350" b="0">
+                          <a:solidFill>
+                            <a:srgbClr val="0B0B0B"/>
+                          </a:solidFill>
+                          <a:latin typeface="Calibri"/>
+                          <a:ea typeface="Microsoft JhengHei"/>
+                          <a:cs typeface="Microsoft JhengHei"/>
+                        </a:rPr>
+                        <a:t>走走停停，定位誤差累積</a:t>
+                      </a:r>
+                    </a:p>
+                  </a:txBody>
+                  <a:tcPr marL="73152" marR="73152" marT="36576" marB="36576" anchor="ctr">
+                    <a:solidFill>
+                      <a:srgbClr val="F4F4F2"/>
+                    </a:solidFill>
+                  </a:tcPr>
+                </a:tc>
+              </a:tr>
+              <a:tr h="502920">
+                <a:tc>
+                  <a:txBody>
+                    <a:bodyPr wrap="square"/>
+                    <a:lstStyle/>
+                    <a:p>
+                      <a:pPr algn="l"/>
+                      <a:r>
+                        <a:rPr sz="1350" b="0">
+                          <a:solidFill>
+                            <a:srgbClr val="0B0B0B"/>
+                          </a:solidFill>
+                          <a:latin typeface="Calibri"/>
+                          <a:ea typeface="Microsoft JhengHei"/>
+                          <a:cs typeface="Microsoft JhengHei"/>
+                        </a:rPr>
+                        <a:t>Nav2 DWB</a:t>
+                      </a:r>
+                    </a:p>
+                  </a:txBody>
+                  <a:tcPr marL="73152" marR="73152" marT="36576" marB="36576" anchor="ctr">
+                    <a:solidFill>
+                      <a:srgbClr val="FFFFFF"/>
+                    </a:solidFill>
+                  </a:tcPr>
+                </a:tc>
+                <a:tc>
+                  <a:txBody>
+                    <a:bodyPr wrap="square"/>
+                    <a:lstStyle/>
+                    <a:p>
+                      <a:pPr algn="ctr"/>
+                      <a:r>
+                        <a:rPr sz="1350" b="0">
+                          <a:solidFill>
+                            <a:srgbClr val="0B0B0B"/>
+                          </a:solidFill>
+                          <a:latin typeface="Calibri"/>
+                          <a:ea typeface="Microsoft JhengHei"/>
+                          <a:cs typeface="Microsoft JhengHei"/>
+                        </a:rPr>
+                        <a:t>1 / 7</a:t>
+                      </a:r>
+                    </a:p>
+                  </a:txBody>
+                  <a:tcPr marL="73152" marR="73152" marT="36576" marB="36576" anchor="ctr">
+                    <a:solidFill>
+                      <a:srgbClr val="FFFFFF"/>
+                    </a:solidFill>
+                  </a:tcPr>
+                </a:tc>
+                <a:tc>
+                  <a:txBody>
+                    <a:bodyPr wrap="square"/>
+                    <a:lstStyle/>
+                    <a:p>
+                      <a:pPr algn="ctr"/>
+                      <a:r>
+                        <a:rPr sz="1350" b="0">
+                          <a:solidFill>
+                            <a:srgbClr val="0B0B0B"/>
+                          </a:solidFill>
+                          <a:latin typeface="Calibri"/>
+                          <a:ea typeface="Microsoft JhengHei"/>
+                          <a:cs typeface="Microsoft JhengHei"/>
+                        </a:rPr>
+                        <a:t>0 / 7</a:t>
+                      </a:r>
+                    </a:p>
+                  </a:txBody>
+                  <a:tcPr marL="73152" marR="73152" marT="36576" marB="36576" anchor="ctr">
+                    <a:solidFill>
+                      <a:srgbClr val="FFFFFF"/>
+                    </a:solidFill>
+                  </a:tcPr>
+                </a:tc>
+                <a:tc>
+                  <a:txBody>
+                    <a:bodyPr wrap="square"/>
+                    <a:lstStyle/>
+                    <a:p>
+                      <a:pPr algn="ctr"/>
+                      <a:r>
+                        <a:rPr sz="1350" b="0">
+                          <a:solidFill>
+                            <a:srgbClr val="0B0B0B"/>
+                          </a:solidFill>
+                          <a:latin typeface="Calibri"/>
+                          <a:ea typeface="Microsoft JhengHei"/>
+                          <a:cs typeface="Microsoft JhengHei"/>
+                        </a:rPr>
+                        <a:t>6</a:t>
+                      </a:r>
+                    </a:p>
+                  </a:txBody>
+                  <a:tcPr marL="73152" marR="73152" marT="36576" marB="36576" anchor="ctr">
+                    <a:solidFill>
+                      <a:srgbClr val="FFFFFF"/>
+                    </a:solidFill>
+                  </a:tcPr>
+                </a:tc>
+                <a:tc>
+                  <a:txBody>
+                    <a:bodyPr wrap="square"/>
+                    <a:lstStyle/>
+                    <a:p>
+                      <a:pPr algn="l"/>
+                      <a:r>
+                        <a:rPr sz="1350" b="0">
+                          <a:solidFill>
+                            <a:srgbClr val="0B0B0B"/>
+                          </a:solidFill>
+                          <a:latin typeface="Calibri"/>
+                          <a:ea typeface="Microsoft JhengHei"/>
+                          <a:cs typeface="Microsoft JhengHei"/>
+                        </a:rPr>
+                        <a:t>同上；未針對新重量重調</a:t>
+                      </a:r>
+                    </a:p>
+                  </a:txBody>
+                  <a:tcPr marL="73152" marR="73152" marT="36576" marB="36576" anchor="ctr">
+                    <a:solidFill>
+                      <a:srgbClr val="FFFFFF"/>
+                    </a:solidFill>
+                  </a:tcPr>
+                </a:tc>
+              </a:tr>
+            </a:tbl>
+          </a:graphicData>
+        </a:graphic>
+      </p:graphicFrame>
+      <p:sp>
+        <p:nvSpPr>
+          <p:cNvPr id="11" name="TextBox 10"/>
           <p:cNvSpPr txBox="1"/>
           <p:nvPr/>
         </p:nvSpPr>
         <p:spPr>
           <a:xfrm>
-            <a:off x="548640" y="2331720"/>
-            <a:ext cx="5394960" cy="384048"/>
+            <a:off x="548640" y="4434840"/>
+            <a:ext cx="11091672" cy="384048"/>
           </a:xfrm>
           <a:prstGeom prst="rect">
             <a:avLst/>
@@ -5320,7 +5968,7 @@
               </a:spcAft>
             </a:pPr>
             <a:r>
-              <a:rPr sz="1900" b="1">
+              <a:rPr sz="1700" b="1">
                 <a:solidFill>
                   <a:srgbClr val="0B0B0B"/>
                 </a:solidFill>
@@ -5328,158 +5976,21 @@
                 <a:ea typeface="Microsoft JhengHei"/>
                 <a:cs typeface="Microsoft JhengHei"/>
               </a:rPr>
-              <a:t>目前的限制</a:t>
-            </a:r>
-          </a:p>
-        </p:txBody>
-      </p:sp>
-      <p:sp>
-        <p:nvSpPr>
-          <p:cNvPr id="11" name="TextBox 10"/>
+              <a:t>說明</a:t>
+            </a:r>
+          </a:p>
+        </p:txBody>
+      </p:sp>
+      <p:sp>
+        <p:nvSpPr>
+          <p:cNvPr id="12" name="TextBox 11"/>
           <p:cNvSpPr txBox="1"/>
           <p:nvPr/>
         </p:nvSpPr>
         <p:spPr>
           <a:xfrm>
-            <a:off x="841248" y="2788920"/>
-            <a:ext cx="5120640" cy="3200400"/>
-          </a:xfrm>
-          <a:prstGeom prst="rect">
-            <a:avLst/>
-          </a:prstGeom>
-          <a:noFill/>
-        </p:spPr>
-        <p:txBody>
-          <a:bodyPr wrap="square" anchor="t" lIns="36576" rIns="36576" tIns="18288" bIns="18288">
-            <a:spAutoFit/>
-          </a:bodyPr>
-          <a:lstStyle/>
-          <a:p>
-            <a:pPr algn="l">
-              <a:lnSpc>
-                <a:spcPct val="125000"/>
-              </a:lnSpc>
-              <a:spcAft>
-                <a:spcPts val="1000"/>
-              </a:spcAft>
-            </a:pPr>
-            <a:r>
-              <a:rPr sz="1500" b="0">
-                <a:solidFill>
-                  <a:srgbClr val="0B0B0B"/>
-                </a:solidFill>
-                <a:latin typeface="Calibri"/>
-                <a:ea typeface="Microsoft JhengHei"/>
-                <a:cs typeface="Microsoft JhengHei"/>
-              </a:rPr>
-              <a:t>•  走得慢（約 0.13 m/s），長路段常逾時</a:t>
-            </a:r>
-          </a:p>
-          <a:p>
-            <a:pPr algn="l">
-              <a:lnSpc>
-                <a:spcPct val="125000"/>
-              </a:lnSpc>
-              <a:spcAft>
-                <a:spcPts val="1000"/>
-              </a:spcAft>
-            </a:pPr>
-            <a:r>
-              <a:rPr sz="1500" b="0">
-                <a:solidFill>
-                  <a:srgbClr val="0B0B0B"/>
-                </a:solidFill>
-                <a:latin typeface="Calibri"/>
-                <a:ea typeface="Microsoft JhengHei"/>
-                <a:cs typeface="Microsoft JhengHei"/>
-              </a:rPr>
-              <a:t>•  長時間運行後定位誤差會累積</a:t>
-            </a:r>
-          </a:p>
-          <a:p>
-            <a:pPr algn="l">
-              <a:lnSpc>
-                <a:spcPct val="125000"/>
-              </a:lnSpc>
-              <a:spcAft>
-                <a:spcPts val="1000"/>
-              </a:spcAft>
-            </a:pPr>
-            <a:r>
-              <a:rPr sz="1500" b="0">
-                <a:solidFill>
-                  <a:srgbClr val="0B0B0B"/>
-                </a:solidFill>
-                <a:latin typeface="Calibri"/>
-                <a:ea typeface="Microsoft JhengHei"/>
-                <a:cs typeface="Microsoft JhengHei"/>
-              </a:rPr>
-              <a:t>•  強化學習在窄通道擦碰多</a:t>
-            </a:r>
-          </a:p>
-          <a:p>
-            <a:pPr algn="l">
-              <a:lnSpc>
-                <a:spcPct val="125000"/>
-              </a:lnSpc>
-              <a:spcAft>
-                <a:spcPts val="1000"/>
-              </a:spcAft>
-            </a:pPr>
-            <a:r>
-              <a:rPr sz="1500" b="0">
-                <a:solidFill>
-                  <a:srgbClr val="0B0B0B"/>
-                </a:solidFill>
-                <a:latin typeface="Calibri"/>
-                <a:ea typeface="Microsoft JhengHei"/>
-                <a:cs typeface="Microsoft JhengHei"/>
-              </a:rPr>
-              <a:t>•  尚未在實機上驗證</a:t>
-            </a:r>
-          </a:p>
-        </p:txBody>
-      </p:sp>
-      <p:sp>
-        <p:nvSpPr>
-          <p:cNvPr id="12" name="Rectangle 11"/>
-          <p:cNvSpPr/>
-          <p:nvPr/>
-        </p:nvSpPr>
-        <p:spPr>
-          <a:xfrm>
-            <a:off x="6245352" y="2286000"/>
-            <a:ext cx="5394960" cy="3886200"/>
-          </a:xfrm>
-          <a:prstGeom prst="rect">
-            <a:avLst/>
-          </a:prstGeom>
-          <a:solidFill>
-            <a:srgbClr val="EEF3F9"/>
-          </a:solidFill>
-          <a:ln>
-            <a:noFill/>
-          </a:ln>
-          <a:effectLst/>
-        </p:spPr>
-        <p:txBody>
-          <a:bodyPr rtlCol="0" anchor="ctr"/>
-          <a:lstStyle/>
-          <a:p>
-            <a:pPr algn="ctr"/>
-          </a:p>
-        </p:txBody>
-      </p:sp>
-      <p:sp>
-        <p:nvSpPr>
-          <p:cNvPr id="13" name="TextBox 12"/>
-          <p:cNvSpPr txBox="1"/>
-          <p:nvPr/>
-        </p:nvSpPr>
-        <p:spPr>
-          <a:xfrm>
-            <a:off x="6446520" y="2377440"/>
-            <a:ext cx="5029200" cy="384048"/>
+            <a:off x="841248" y="4846320"/>
+            <a:ext cx="10789920" cy="1371600"/>
           </a:xfrm>
           <a:prstGeom prst="rect">
             <a:avLst/>
@@ -5497,55 +6008,32 @@
                 <a:spcPct val="115000"/>
               </a:lnSpc>
               <a:spcAft>
-                <a:spcPts val="400"/>
+                <a:spcPts val="600"/>
               </a:spcAft>
             </a:pPr>
             <a:r>
-              <a:rPr sz="1900" b="1">
-                <a:solidFill>
-                  <a:srgbClr val="00549D"/>
+              <a:rPr sz="1400" b="0">
+                <a:solidFill>
+                  <a:srgbClr val="0B0B0B"/>
                 </a:solidFill>
                 <a:latin typeface="Calibri"/>
                 <a:ea typeface="Microsoft JhengHei"/>
                 <a:cs typeface="Microsoft JhengHei"/>
               </a:rPr>
-              <a:t>下一步</a:t>
-            </a:r>
-          </a:p>
-        </p:txBody>
-      </p:sp>
-      <p:sp>
-        <p:nvSpPr>
-          <p:cNvPr id="14" name="TextBox 13"/>
-          <p:cNvSpPr txBox="1"/>
-          <p:nvPr/>
-        </p:nvSpPr>
-        <p:spPr>
-          <a:xfrm>
-            <a:off x="6739128" y="2834640"/>
-            <a:ext cx="4754880" cy="3291840"/>
-          </a:xfrm>
-          <a:prstGeom prst="rect">
-            <a:avLst/>
-          </a:prstGeom>
-          <a:noFill/>
-        </p:spPr>
-        <p:txBody>
-          <a:bodyPr wrap="square" anchor="t" lIns="36576" rIns="36576" tIns="18288" bIns="18288">
-            <a:spAutoFit/>
-          </a:bodyPr>
-          <a:lstStyle/>
+              <a:t>•  模型改成實機重量並重調後走路變穩：同一份舊的強化學習權重，從 3 / 7（且翻倒）變成 7 / 7</a:t>
+            </a:r>
+          </a:p>
           <a:p>
             <a:pPr algn="l">
               <a:lnSpc>
-                <a:spcPct val="125000"/>
+                <a:spcPct val="115000"/>
               </a:lnSpc>
               <a:spcAft>
-                <a:spcPts val="1000"/>
+                <a:spcPts val="600"/>
               </a:spcAft>
             </a:pPr>
             <a:r>
-              <a:rPr sz="1500" b="0">
+              <a:rPr sz="1400" b="0">
                 <a:solidFill>
                   <a:srgbClr val="0B0B0B"/>
                 </a:solidFill>
@@ -5553,20 +6041,20 @@
                 <a:ea typeface="Microsoft JhengHei"/>
                 <a:cs typeface="Microsoft JhengHei"/>
               </a:rPr>
-              <a:t>•  部署到實機（樹莓派），重測速度與晃動</a:t>
+              <a:t>•  強化學習走得平順，定位誤差全程約 0.1 m；Nav2 走走停停，定位誤差累積到 1 m 以上</a:t>
             </a:r>
           </a:p>
           <a:p>
             <a:pPr algn="l">
               <a:lnSpc>
-                <a:spcPct val="125000"/>
+                <a:spcPct val="115000"/>
               </a:lnSpc>
               <a:spcAft>
-                <a:spcPts val="1000"/>
+                <a:spcPts val="600"/>
               </a:spcAft>
             </a:pPr>
             <a:r>
-              <a:rPr sz="1500" b="0">
+              <a:rPr sz="1400" b="0">
                 <a:solidFill>
                   <a:srgbClr val="0B0B0B"/>
                 </a:solidFill>
@@ -5574,49 +6062,7 @@
                 <a:ea typeface="Microsoft JhengHei"/>
                 <a:cs typeface="Microsoft JhengHei"/>
               </a:rPr>
-              <a:t>•  依路段長度調整時限、改善長時間 SLAM</a:t>
-            </a:r>
-          </a:p>
-          <a:p>
-            <a:pPr algn="l">
-              <a:lnSpc>
-                <a:spcPct val="125000"/>
-              </a:lnSpc>
-              <a:spcAft>
-                <a:spcPts val="1000"/>
-              </a:spcAft>
-            </a:pPr>
-            <a:r>
-              <a:rPr sz="1500" b="0">
-                <a:solidFill>
-                  <a:srgbClr val="0B0B0B"/>
-                </a:solidFill>
-                <a:latin typeface="Calibri"/>
-                <a:ea typeface="Microsoft JhengHei"/>
-                <a:cs typeface="Microsoft JhengHei"/>
-              </a:rPr>
-              <a:t>•  針對窄通道重新訓練強化學習</a:t>
-            </a:r>
-          </a:p>
-          <a:p>
-            <a:pPr algn="l">
-              <a:lnSpc>
-                <a:spcPct val="125000"/>
-              </a:lnSpc>
-              <a:spcAft>
-                <a:spcPts val="1000"/>
-              </a:spcAft>
-            </a:pPr>
-            <a:r>
-              <a:rPr sz="1500" b="0">
-                <a:solidFill>
-                  <a:srgbClr val="0B0B0B"/>
-                </a:solidFill>
-                <a:latin typeface="Calibri"/>
-                <a:ea typeface="Microsoft JhengHei"/>
-                <a:cs typeface="Microsoft JhengHei"/>
-              </a:rPr>
-              <a:t>•  實機與模擬結果對照，回頭修正模型</a:t>
+              <a:t>•  只在這一個場地驗證過；Nav2 各跑一次。強化學習實際速度約 0.08 m/s，還是慢</a:t>
             </a:r>
           </a:p>
         </p:txBody>
@@ -5787,7 +6233,7 @@
                 <a:ea typeface="Microsoft JhengHei"/>
                 <a:cs typeface="Microsoft JhengHei"/>
               </a:rPr>
-              <a:t>現場展示：如何啟動模擬</a:t>
+              <a:t>限制與下一步</a:t>
             </a:r>
           </a:p>
         </p:txBody>
@@ -5866,7 +6312,7 @@
                 <a:ea typeface="Microsoft JhengHei"/>
                 <a:cs typeface="Microsoft JhengHei"/>
               </a:rPr>
-              <a:t>三個指令啟動，在 RViz 點一下目標，機器狗就會自己走過去</a:t>
+              <a:t>模擬已經把系統做通，接下來提高可靠度並搬到實機</a:t>
             </a:r>
           </a:p>
         </p:txBody>
@@ -5961,44 +6407,14 @@
       </p:sp>
       <p:sp>
         <p:nvSpPr>
-          <p:cNvPr id="10" name="Oval 9"/>
-          <p:cNvSpPr/>
-          <p:nvPr/>
-        </p:nvSpPr>
-        <p:spPr>
-          <a:xfrm>
-            <a:off x="548640" y="2240280"/>
-            <a:ext cx="548640" cy="548640"/>
-          </a:xfrm>
-          <a:prstGeom prst="ellipse">
-            <a:avLst/>
-          </a:prstGeom>
-          <a:solidFill>
-            <a:srgbClr val="00549D"/>
-          </a:solidFill>
-          <a:ln>
-            <a:noFill/>
-          </a:ln>
-          <a:effectLst/>
-        </p:spPr>
-        <p:txBody>
-          <a:bodyPr rtlCol="0" anchor="ctr"/>
-          <a:lstStyle/>
-          <a:p>
-            <a:pPr algn="ctr"/>
-          </a:p>
-        </p:txBody>
-      </p:sp>
-      <p:sp>
-        <p:nvSpPr>
-          <p:cNvPr id="11" name="TextBox 10"/>
+          <p:cNvPr id="10" name="TextBox 9"/>
           <p:cNvSpPr txBox="1"/>
           <p:nvPr/>
         </p:nvSpPr>
         <p:spPr>
           <a:xfrm>
-            <a:off x="548640" y="2240280"/>
-            <a:ext cx="548640" cy="548640"/>
+            <a:off x="548640" y="2331720"/>
+            <a:ext cx="5394960" cy="384048"/>
           </a:xfrm>
           <a:prstGeom prst="rect">
             <a:avLst/>
@@ -6006,51 +6422,7 @@
           <a:noFill/>
         </p:spPr>
         <p:txBody>
-          <a:bodyPr wrap="square" anchor="ctr" lIns="36576" rIns="36576" tIns="18288" bIns="18288">
-            <a:spAutoFit/>
-          </a:bodyPr>
-          <a:lstStyle/>
-          <a:p>
-            <a:pPr algn="ctr">
-              <a:lnSpc>
-                <a:spcPct val="115000"/>
-              </a:lnSpc>
-              <a:spcAft>
-                <a:spcPts val="400"/>
-              </a:spcAft>
-            </a:pPr>
-            <a:r>
-              <a:rPr sz="1800" b="1">
-                <a:solidFill>
-                  <a:srgbClr val="FFFFFF"/>
-                </a:solidFill>
-                <a:latin typeface="Calibri"/>
-                <a:ea typeface="Microsoft JhengHei"/>
-                <a:cs typeface="Microsoft JhengHei"/>
-              </a:rPr>
-              <a:t>1</a:t>
-            </a:r>
-          </a:p>
-        </p:txBody>
-      </p:sp>
-      <p:sp>
-        <p:nvSpPr>
-          <p:cNvPr id="12" name="TextBox 11"/>
-          <p:cNvSpPr txBox="1"/>
-          <p:nvPr/>
-        </p:nvSpPr>
-        <p:spPr>
-          <a:xfrm>
-            <a:off x="1280160" y="2258568"/>
-            <a:ext cx="4937760" cy="548640"/>
-          </a:xfrm>
-          <a:prstGeom prst="rect">
-            <a:avLst/>
-          </a:prstGeom>
-          <a:noFill/>
-        </p:spPr>
-        <p:txBody>
-          <a:bodyPr wrap="square" anchor="ctr" lIns="36576" rIns="36576" tIns="18288" bIns="18288">
+          <a:bodyPr wrap="square" anchor="t" lIns="36576" rIns="36576" tIns="18288" bIns="18288">
             <a:spAutoFit/>
           </a:bodyPr>
           <a:lstStyle/>
@@ -6064,7 +6436,7 @@
               </a:spcAft>
             </a:pPr>
             <a:r>
-              <a:rPr sz="1500" b="0">
+              <a:rPr sz="1900" b="1">
                 <a:solidFill>
                   <a:srgbClr val="0B0B0B"/>
                 </a:solidFill>
@@ -6072,27 +6444,134 @@
                 <a:ea typeface="Microsoft JhengHei"/>
                 <a:cs typeface="Microsoft JhengHei"/>
               </a:rPr>
-              <a:t>開終端機，進入資料夾</a:t>
-            </a:r>
-          </a:p>
-        </p:txBody>
-      </p:sp>
-      <p:sp>
-        <p:nvSpPr>
-          <p:cNvPr id="13" name="Rectangle 12"/>
+              <a:t>目前的限制</a:t>
+            </a:r>
+          </a:p>
+        </p:txBody>
+      </p:sp>
+      <p:sp>
+        <p:nvSpPr>
+          <p:cNvPr id="11" name="TextBox 10"/>
+          <p:cNvSpPr txBox="1"/>
+          <p:nvPr/>
+        </p:nvSpPr>
+        <p:spPr>
+          <a:xfrm>
+            <a:off x="841248" y="2788920"/>
+            <a:ext cx="5120640" cy="3200400"/>
+          </a:xfrm>
+          <a:prstGeom prst="rect">
+            <a:avLst/>
+          </a:prstGeom>
+          <a:noFill/>
+        </p:spPr>
+        <p:txBody>
+          <a:bodyPr wrap="square" anchor="t" lIns="36576" rIns="36576" tIns="18288" bIns="18288">
+            <a:spAutoFit/>
+          </a:bodyPr>
+          <a:lstStyle/>
+          <a:p>
+            <a:pPr algn="l">
+              <a:lnSpc>
+                <a:spcPct val="125000"/>
+              </a:lnSpc>
+              <a:spcAft>
+                <a:spcPts val="1000"/>
+              </a:spcAft>
+            </a:pPr>
+            <a:r>
+              <a:rPr sz="1500" b="0">
+                <a:solidFill>
+                  <a:srgbClr val="0B0B0B"/>
+                </a:solidFill>
+                <a:latin typeface="Calibri"/>
+                <a:ea typeface="Microsoft JhengHei"/>
+                <a:cs typeface="Microsoft JhengHei"/>
+              </a:rPr>
+              <a:t>•  走得慢：實際約 0.08 m/s（再快，急停時會翻倒）</a:t>
+            </a:r>
+          </a:p>
+          <a:p>
+            <a:pPr algn="l">
+              <a:lnSpc>
+                <a:spcPct val="125000"/>
+              </a:lnSpc>
+              <a:spcAft>
+                <a:spcPts val="1000"/>
+              </a:spcAft>
+            </a:pPr>
+            <a:r>
+              <a:rPr sz="1500" b="0">
+                <a:solidFill>
+                  <a:srgbClr val="0B0B0B"/>
+                </a:solidFill>
+                <a:latin typeface="Calibri"/>
+                <a:ea typeface="Microsoft JhengHei"/>
+                <a:cs typeface="Microsoft JhengHei"/>
+              </a:rPr>
+              <a:t>•  只在一個場地驗證過，測試次數少</a:t>
+            </a:r>
+          </a:p>
+          <a:p>
+            <a:pPr algn="l">
+              <a:lnSpc>
+                <a:spcPct val="125000"/>
+              </a:lnSpc>
+              <a:spcAft>
+                <a:spcPts val="1000"/>
+              </a:spcAft>
+            </a:pPr>
+            <a:r>
+              <a:rPr sz="1500" b="0">
+                <a:solidFill>
+                  <a:srgbClr val="0B0B0B"/>
+                </a:solidFill>
+                <a:latin typeface="Calibri"/>
+                <a:ea typeface="Microsoft JhengHei"/>
+                <a:cs typeface="Microsoft JhengHei"/>
+              </a:rPr>
+              <a:t>•  靜止站立時會慢慢往後滑（約 1 cm/s）</a:t>
+            </a:r>
+          </a:p>
+          <a:p>
+            <a:pPr algn="l">
+              <a:lnSpc>
+                <a:spcPct val="125000"/>
+              </a:lnSpc>
+              <a:spcAft>
+                <a:spcPts val="1000"/>
+              </a:spcAft>
+            </a:pPr>
+            <a:r>
+              <a:rPr sz="1500" b="0">
+                <a:solidFill>
+                  <a:srgbClr val="0B0B0B"/>
+                </a:solidFill>
+                <a:latin typeface="Calibri"/>
+                <a:ea typeface="Microsoft JhengHei"/>
+                <a:cs typeface="Microsoft JhengHei"/>
+              </a:rPr>
+              <a:t>•  尚未在實機上驗證</a:t>
+            </a:r>
+          </a:p>
+        </p:txBody>
+      </p:sp>
+      <p:sp>
+        <p:nvSpPr>
+          <p:cNvPr id="12" name="Rectangle 11"/>
           <p:cNvSpPr/>
           <p:nvPr/>
         </p:nvSpPr>
         <p:spPr>
           <a:xfrm>
-            <a:off x="6309360" y="2221992"/>
-            <a:ext cx="5330952" cy="603504"/>
+            <a:off x="6245352" y="2286000"/>
+            <a:ext cx="5394960" cy="3886200"/>
           </a:xfrm>
           <a:prstGeom prst="rect">
             <a:avLst/>
           </a:prstGeom>
           <a:solidFill>
-            <a:srgbClr val="1E1E1E"/>
+            <a:srgbClr val="EEF3F9"/>
           </a:solidFill>
           <a:ln>
             <a:noFill/>
@@ -6109,14 +6588,14 @@
       </p:sp>
       <p:sp>
         <p:nvSpPr>
-          <p:cNvPr id="14" name="TextBox 13"/>
+          <p:cNvPr id="13" name="TextBox 12"/>
           <p:cNvSpPr txBox="1"/>
           <p:nvPr/>
         </p:nvSpPr>
         <p:spPr>
           <a:xfrm>
-            <a:off x="6446520" y="2221992"/>
-            <a:ext cx="5120640" cy="603504"/>
+            <a:off x="6446520" y="2377440"/>
+            <a:ext cx="5029200" cy="384048"/>
           </a:xfrm>
           <a:prstGeom prst="rect">
             <a:avLst/>
@@ -6124,125 +6603,7 @@
           <a:noFill/>
         </p:spPr>
         <p:txBody>
-          <a:bodyPr wrap="square" anchor="ctr" lIns="36576" rIns="36576" tIns="18288" bIns="18288">
-            <a:spAutoFit/>
-          </a:bodyPr>
-          <a:lstStyle/>
-          <a:p>
-            <a:pPr algn="l">
-              <a:lnSpc>
-                <a:spcPct val="100000"/>
-              </a:lnSpc>
-              <a:spcAft>
-                <a:spcPts val="0"/>
-              </a:spcAft>
-            </a:pPr>
-            <a:r>
-              <a:rPr sz="1400" b="0">
-                <a:solidFill>
-                  <a:srgbClr val="F2F2F2"/>
-                </a:solidFill>
-                <a:latin typeface="Consolas"/>
-                <a:ea typeface="Microsoft JhengHei"/>
-                <a:cs typeface="Microsoft JhengHei"/>
-              </a:rPr>
-              <a:t>cd DOGZILLA/sim_env</a:t>
-            </a:r>
-          </a:p>
-        </p:txBody>
-      </p:sp>
-      <p:sp>
-        <p:nvSpPr>
-          <p:cNvPr id="15" name="Oval 14"/>
-          <p:cNvSpPr/>
-          <p:nvPr/>
-        </p:nvSpPr>
-        <p:spPr>
-          <a:xfrm>
-            <a:off x="548640" y="3026664"/>
-            <a:ext cx="548640" cy="548640"/>
-          </a:xfrm>
-          <a:prstGeom prst="ellipse">
-            <a:avLst/>
-          </a:prstGeom>
-          <a:solidFill>
-            <a:srgbClr val="00549D"/>
-          </a:solidFill>
-          <a:ln>
-            <a:noFill/>
-          </a:ln>
-          <a:effectLst/>
-        </p:spPr>
-        <p:txBody>
-          <a:bodyPr rtlCol="0" anchor="ctr"/>
-          <a:lstStyle/>
-          <a:p>
-            <a:pPr algn="ctr"/>
-          </a:p>
-        </p:txBody>
-      </p:sp>
-      <p:sp>
-        <p:nvSpPr>
-          <p:cNvPr id="16" name="TextBox 15"/>
-          <p:cNvSpPr txBox="1"/>
-          <p:nvPr/>
-        </p:nvSpPr>
-        <p:spPr>
-          <a:xfrm>
-            <a:off x="548640" y="3026664"/>
-            <a:ext cx="548640" cy="548640"/>
-          </a:xfrm>
-          <a:prstGeom prst="rect">
-            <a:avLst/>
-          </a:prstGeom>
-          <a:noFill/>
-        </p:spPr>
-        <p:txBody>
-          <a:bodyPr wrap="square" anchor="ctr" lIns="36576" rIns="36576" tIns="18288" bIns="18288">
-            <a:spAutoFit/>
-          </a:bodyPr>
-          <a:lstStyle/>
-          <a:p>
-            <a:pPr algn="ctr">
-              <a:lnSpc>
-                <a:spcPct val="115000"/>
-              </a:lnSpc>
-              <a:spcAft>
-                <a:spcPts val="400"/>
-              </a:spcAft>
-            </a:pPr>
-            <a:r>
-              <a:rPr sz="1800" b="1">
-                <a:solidFill>
-                  <a:srgbClr val="FFFFFF"/>
-                </a:solidFill>
-                <a:latin typeface="Calibri"/>
-                <a:ea typeface="Microsoft JhengHei"/>
-                <a:cs typeface="Microsoft JhengHei"/>
-              </a:rPr>
-              <a:t>2</a:t>
-            </a:r>
-          </a:p>
-        </p:txBody>
-      </p:sp>
-      <p:sp>
-        <p:nvSpPr>
-          <p:cNvPr id="17" name="TextBox 16"/>
-          <p:cNvSpPr txBox="1"/>
-          <p:nvPr/>
-        </p:nvSpPr>
-        <p:spPr>
-          <a:xfrm>
-            <a:off x="1280160" y="3044952"/>
-            <a:ext cx="4937760" cy="548640"/>
-          </a:xfrm>
-          <a:prstGeom prst="rect">
-            <a:avLst/>
-          </a:prstGeom>
-          <a:noFill/>
-        </p:spPr>
-        <p:txBody>
-          <a:bodyPr wrap="square" anchor="ctr" lIns="36576" rIns="36576" tIns="18288" bIns="18288">
+          <a:bodyPr wrap="square" anchor="t" lIns="36576" rIns="36576" tIns="18288" bIns="18288">
             <a:spAutoFit/>
           </a:bodyPr>
           <a:lstStyle/>
@@ -6256,59 +6617,29 @@
               </a:spcAft>
             </a:pPr>
             <a:r>
-              <a:rPr sz="1500" b="0">
-                <a:solidFill>
-                  <a:srgbClr val="0B0B0B"/>
+              <a:rPr sz="1900" b="1">
+                <a:solidFill>
+                  <a:srgbClr val="00549D"/>
                 </a:solidFill>
                 <a:latin typeface="Calibri"/>
                 <a:ea typeface="Microsoft JhengHei"/>
                 <a:cs typeface="Microsoft JhengHei"/>
               </a:rPr>
-              <a:t>第一次才需要：建環境（約 15 分鐘）</a:t>
-            </a:r>
-          </a:p>
-        </p:txBody>
-      </p:sp>
-      <p:sp>
-        <p:nvSpPr>
-          <p:cNvPr id="18" name="Rectangle 17"/>
-          <p:cNvSpPr/>
-          <p:nvPr/>
-        </p:nvSpPr>
-        <p:spPr>
-          <a:xfrm>
-            <a:off x="6309360" y="3008376"/>
-            <a:ext cx="5330952" cy="713232"/>
-          </a:xfrm>
-          <a:prstGeom prst="rect">
-            <a:avLst/>
-          </a:prstGeom>
-          <a:solidFill>
-            <a:srgbClr val="1E1E1E"/>
-          </a:solidFill>
-          <a:ln>
-            <a:noFill/>
-          </a:ln>
-          <a:effectLst/>
-        </p:spPr>
-        <p:txBody>
-          <a:bodyPr rtlCol="0" anchor="ctr"/>
-          <a:lstStyle/>
-          <a:p>
-            <a:pPr algn="ctr"/>
-          </a:p>
-        </p:txBody>
-      </p:sp>
-      <p:sp>
-        <p:nvSpPr>
-          <p:cNvPr id="19" name="TextBox 18"/>
+              <a:t>下一步</a:t>
+            </a:r>
+          </a:p>
+        </p:txBody>
+      </p:sp>
+      <p:sp>
+        <p:nvSpPr>
+          <p:cNvPr id="14" name="TextBox 13"/>
           <p:cNvSpPr txBox="1"/>
           <p:nvPr/>
         </p:nvSpPr>
         <p:spPr>
           <a:xfrm>
-            <a:off x="6446520" y="3008376"/>
-            <a:ext cx="5120640" cy="713232"/>
+            <a:off x="6739128" y="2834640"/>
+            <a:ext cx="4754880" cy="3291840"/>
           </a:xfrm>
           <a:prstGeom prst="rect">
             <a:avLst/>
@@ -6316,136 +6647,38 @@
           <a:noFill/>
         </p:spPr>
         <p:txBody>
-          <a:bodyPr wrap="square" anchor="ctr" lIns="36576" rIns="36576" tIns="18288" bIns="18288">
+          <a:bodyPr wrap="square" anchor="t" lIns="36576" rIns="36576" tIns="18288" bIns="18288">
             <a:spAutoFit/>
           </a:bodyPr>
           <a:lstStyle/>
           <a:p>
             <a:pPr algn="l">
               <a:lnSpc>
-                <a:spcPct val="100000"/>
+                <a:spcPct val="125000"/>
               </a:lnSpc>
               <a:spcAft>
-                <a:spcPts val="0"/>
+                <a:spcPts val="1000"/>
               </a:spcAft>
             </a:pPr>
             <a:r>
-              <a:rPr sz="1400" b="0">
-                <a:solidFill>
-                  <a:srgbClr val="F2F2F2"/>
-                </a:solidFill>
-                <a:latin typeface="Consolas"/>
-                <a:ea typeface="Microsoft JhengHei"/>
-                <a:cs typeface="Microsoft JhengHei"/>
-              </a:rPr>
-              <a:t>./run.sh build
-./run.sh colcon</a:t>
-            </a:r>
-          </a:p>
-        </p:txBody>
-      </p:sp>
-      <p:sp>
-        <p:nvSpPr>
-          <p:cNvPr id="20" name="Oval 19"/>
-          <p:cNvSpPr/>
-          <p:nvPr/>
-        </p:nvSpPr>
-        <p:spPr>
-          <a:xfrm>
-            <a:off x="548640" y="3813048"/>
-            <a:ext cx="548640" cy="548640"/>
-          </a:xfrm>
-          <a:prstGeom prst="ellipse">
-            <a:avLst/>
-          </a:prstGeom>
-          <a:solidFill>
-            <a:srgbClr val="00549D"/>
-          </a:solidFill>
-          <a:ln>
-            <a:noFill/>
-          </a:ln>
-          <a:effectLst/>
-        </p:spPr>
-        <p:txBody>
-          <a:bodyPr rtlCol="0" anchor="ctr"/>
-          <a:lstStyle/>
-          <a:p>
-            <a:pPr algn="ctr"/>
-          </a:p>
-        </p:txBody>
-      </p:sp>
-      <p:sp>
-        <p:nvSpPr>
-          <p:cNvPr id="21" name="TextBox 20"/>
-          <p:cNvSpPr txBox="1"/>
-          <p:nvPr/>
-        </p:nvSpPr>
-        <p:spPr>
-          <a:xfrm>
-            <a:off x="548640" y="3813048"/>
-            <a:ext cx="548640" cy="548640"/>
-          </a:xfrm>
-          <a:prstGeom prst="rect">
-            <a:avLst/>
-          </a:prstGeom>
-          <a:noFill/>
-        </p:spPr>
-        <p:txBody>
-          <a:bodyPr wrap="square" anchor="ctr" lIns="36576" rIns="36576" tIns="18288" bIns="18288">
-            <a:spAutoFit/>
-          </a:bodyPr>
-          <a:lstStyle/>
-          <a:p>
-            <a:pPr algn="ctr">
-              <a:lnSpc>
-                <a:spcPct val="115000"/>
-              </a:lnSpc>
-              <a:spcAft>
-                <a:spcPts val="400"/>
-              </a:spcAft>
-            </a:pPr>
-            <a:r>
-              <a:rPr sz="1800" b="1">
-                <a:solidFill>
-                  <a:srgbClr val="FFFFFF"/>
+              <a:rPr sz="1500" b="0">
+                <a:solidFill>
+                  <a:srgbClr val="0B0B0B"/>
                 </a:solidFill>
                 <a:latin typeface="Calibri"/>
                 <a:ea typeface="Microsoft JhengHei"/>
                 <a:cs typeface="Microsoft JhengHei"/>
               </a:rPr>
-              <a:t>3</a:t>
-            </a:r>
-          </a:p>
-        </p:txBody>
-      </p:sp>
-      <p:sp>
-        <p:nvSpPr>
-          <p:cNvPr id="22" name="TextBox 21"/>
-          <p:cNvSpPr txBox="1"/>
-          <p:nvPr/>
-        </p:nvSpPr>
-        <p:spPr>
-          <a:xfrm>
-            <a:off x="1280160" y="3831335"/>
-            <a:ext cx="4937760" cy="548640"/>
-          </a:xfrm>
-          <a:prstGeom prst="rect">
-            <a:avLst/>
-          </a:prstGeom>
-          <a:noFill/>
-        </p:spPr>
-        <p:txBody>
-          <a:bodyPr wrap="square" anchor="ctr" lIns="36576" rIns="36576" tIns="18288" bIns="18288">
-            <a:spAutoFit/>
-          </a:bodyPr>
-          <a:lstStyle/>
+              <a:t>•  部署到實機（樹莓派），重測速度與晃動</a:t>
+            </a:r>
+          </a:p>
           <a:p>
             <a:pPr algn="l">
               <a:lnSpc>
-                <a:spcPct val="115000"/>
+                <a:spcPct val="125000"/>
               </a:lnSpc>
               <a:spcAft>
-                <a:spcPts val="400"/>
+                <a:spcPts val="1000"/>
               </a:spcAft>
             </a:pPr>
             <a:r>
@@ -6457,187 +6690,37 @@
                 <a:ea typeface="Microsoft JhengHei"/>
                 <a:cs typeface="Microsoft JhengHei"/>
               </a:rPr>
-              <a:t>啟動模擬（約 30 秒後出現畫面）</a:t>
-            </a:r>
-          </a:p>
-        </p:txBody>
-      </p:sp>
-      <p:sp>
-        <p:nvSpPr>
-          <p:cNvPr id="23" name="Rectangle 22"/>
-          <p:cNvSpPr/>
-          <p:nvPr/>
-        </p:nvSpPr>
-        <p:spPr>
-          <a:xfrm>
-            <a:off x="6309360" y="3794760"/>
-            <a:ext cx="5330952" cy="603504"/>
-          </a:xfrm>
-          <a:prstGeom prst="rect">
-            <a:avLst/>
-          </a:prstGeom>
-          <a:solidFill>
-            <a:srgbClr val="1E1E1E"/>
-          </a:solidFill>
-          <a:ln>
-            <a:noFill/>
-          </a:ln>
-          <a:effectLst/>
-        </p:spPr>
-        <p:txBody>
-          <a:bodyPr rtlCol="0" anchor="ctr"/>
-          <a:lstStyle/>
-          <a:p>
-            <a:pPr algn="ctr"/>
-          </a:p>
-        </p:txBody>
-      </p:sp>
-      <p:sp>
-        <p:nvSpPr>
-          <p:cNvPr id="24" name="TextBox 23"/>
-          <p:cNvSpPr txBox="1"/>
-          <p:nvPr/>
-        </p:nvSpPr>
-        <p:spPr>
-          <a:xfrm>
-            <a:off x="6446520" y="3794760"/>
-            <a:ext cx="5120640" cy="603504"/>
-          </a:xfrm>
-          <a:prstGeom prst="rect">
-            <a:avLst/>
-          </a:prstGeom>
-          <a:noFill/>
-        </p:spPr>
-        <p:txBody>
-          <a:bodyPr wrap="square" anchor="ctr" lIns="36576" rIns="36576" tIns="18288" bIns="18288">
-            <a:spAutoFit/>
-          </a:bodyPr>
-          <a:lstStyle/>
+              <a:t>•  放寬轉彎降速後重新訓練，讓它走快一點</a:t>
+            </a:r>
+          </a:p>
           <a:p>
             <a:pPr algn="l">
               <a:lnSpc>
-                <a:spcPct val="100000"/>
+                <a:spcPct val="125000"/>
               </a:lnSpc>
               <a:spcAft>
-                <a:spcPts val="0"/>
+                <a:spcPts val="1000"/>
               </a:spcAft>
             </a:pPr>
             <a:r>
-              <a:rPr sz="1400" b="0">
-                <a:solidFill>
-                  <a:srgbClr val="F2F2F2"/>
-                </a:solidFill>
-                <a:latin typeface="Consolas"/>
-                <a:ea typeface="Microsoft JhengHei"/>
-                <a:cs typeface="Microsoft JhengHei"/>
-              </a:rPr>
-              <a:t>./run.sh sim</a:t>
-            </a:r>
-          </a:p>
-        </p:txBody>
-      </p:sp>
-      <p:sp>
-        <p:nvSpPr>
-          <p:cNvPr id="25" name="Oval 24"/>
-          <p:cNvSpPr/>
-          <p:nvPr/>
-        </p:nvSpPr>
-        <p:spPr>
-          <a:xfrm>
-            <a:off x="548640" y="4599432"/>
-            <a:ext cx="548640" cy="548640"/>
-          </a:xfrm>
-          <a:prstGeom prst="ellipse">
-            <a:avLst/>
-          </a:prstGeom>
-          <a:solidFill>
-            <a:srgbClr val="00549D"/>
-          </a:solidFill>
-          <a:ln>
-            <a:noFill/>
-          </a:ln>
-          <a:effectLst/>
-        </p:spPr>
-        <p:txBody>
-          <a:bodyPr rtlCol="0" anchor="ctr"/>
-          <a:lstStyle/>
-          <a:p>
-            <a:pPr algn="ctr"/>
-          </a:p>
-        </p:txBody>
-      </p:sp>
-      <p:sp>
-        <p:nvSpPr>
-          <p:cNvPr id="26" name="TextBox 25"/>
-          <p:cNvSpPr txBox="1"/>
-          <p:nvPr/>
-        </p:nvSpPr>
-        <p:spPr>
-          <a:xfrm>
-            <a:off x="548640" y="4599432"/>
-            <a:ext cx="548640" cy="548640"/>
-          </a:xfrm>
-          <a:prstGeom prst="rect">
-            <a:avLst/>
-          </a:prstGeom>
-          <a:noFill/>
-        </p:spPr>
-        <p:txBody>
-          <a:bodyPr wrap="square" anchor="ctr" lIns="36576" rIns="36576" tIns="18288" bIns="18288">
-            <a:spAutoFit/>
-          </a:bodyPr>
-          <a:lstStyle/>
-          <a:p>
-            <a:pPr algn="ctr">
-              <a:lnSpc>
-                <a:spcPct val="115000"/>
-              </a:lnSpc>
-              <a:spcAft>
-                <a:spcPts val="400"/>
-              </a:spcAft>
-            </a:pPr>
-            <a:r>
-              <a:rPr sz="1800" b="1">
-                <a:solidFill>
-                  <a:srgbClr val="FFFFFF"/>
+              <a:rPr sz="1500" b="0">
+                <a:solidFill>
+                  <a:srgbClr val="0B0B0B"/>
                 </a:solidFill>
                 <a:latin typeface="Calibri"/>
                 <a:ea typeface="Microsoft JhengHei"/>
                 <a:cs typeface="Microsoft JhengHei"/>
               </a:rPr>
-              <a:t>4</a:t>
-            </a:r>
-          </a:p>
-        </p:txBody>
-      </p:sp>
-      <p:sp>
-        <p:nvSpPr>
-          <p:cNvPr id="27" name="TextBox 26"/>
-          <p:cNvSpPr txBox="1"/>
-          <p:nvPr/>
-        </p:nvSpPr>
-        <p:spPr>
-          <a:xfrm>
-            <a:off x="1280160" y="4617720"/>
-            <a:ext cx="4937760" cy="548640"/>
-          </a:xfrm>
-          <a:prstGeom prst="rect">
-            <a:avLst/>
-          </a:prstGeom>
-          <a:noFill/>
-        </p:spPr>
-        <p:txBody>
-          <a:bodyPr wrap="square" anchor="ctr" lIns="36576" rIns="36576" tIns="18288" bIns="18288">
-            <a:spAutoFit/>
-          </a:bodyPr>
-          <a:lstStyle/>
+              <a:t>•  換場地、多跑幾次，確認避障的穩定性</a:t>
+            </a:r>
+          </a:p>
           <a:p>
             <a:pPr algn="l">
               <a:lnSpc>
-                <a:spcPct val="115000"/>
+                <a:spcPct val="125000"/>
               </a:lnSpc>
               <a:spcAft>
-                <a:spcPts val="400"/>
+                <a:spcPts val="1000"/>
               </a:spcAft>
             </a:pPr>
             <a:r>
@@ -6649,315 +6732,7 @@
                 <a:ea typeface="Microsoft JhengHei"/>
                 <a:cs typeface="Microsoft JhengHei"/>
               </a:rPr>
-              <a:t>在 RViz 按「2D Goal Pose」，在地圖上點目標</a:t>
-            </a:r>
-          </a:p>
-        </p:txBody>
-      </p:sp>
-      <p:sp>
-        <p:nvSpPr>
-          <p:cNvPr id="28" name="Rectangle 27"/>
-          <p:cNvSpPr/>
-          <p:nvPr/>
-        </p:nvSpPr>
-        <p:spPr>
-          <a:xfrm>
-            <a:off x="6309360" y="4581144"/>
-            <a:ext cx="5330952" cy="603504"/>
-          </a:xfrm>
-          <a:prstGeom prst="rect">
-            <a:avLst/>
-          </a:prstGeom>
-          <a:noFill/>
-          <a:ln>
-            <a:noFill/>
-          </a:ln>
-          <a:effectLst/>
-        </p:spPr>
-        <p:txBody>
-          <a:bodyPr rtlCol="0" anchor="ctr"/>
-          <a:lstStyle/>
-          <a:p>
-            <a:pPr algn="ctr"/>
-          </a:p>
-        </p:txBody>
-      </p:sp>
-      <p:sp>
-        <p:nvSpPr>
-          <p:cNvPr id="29" name="TextBox 28"/>
-          <p:cNvSpPr txBox="1"/>
-          <p:nvPr/>
-        </p:nvSpPr>
-        <p:spPr>
-          <a:xfrm>
-            <a:off x="6446520" y="4581144"/>
-            <a:ext cx="5120640" cy="603504"/>
-          </a:xfrm>
-          <a:prstGeom prst="rect">
-            <a:avLst/>
-          </a:prstGeom>
-          <a:noFill/>
-        </p:spPr>
-        <p:txBody>
-          <a:bodyPr wrap="square" anchor="ctr" lIns="36576" rIns="36576" tIns="18288" bIns="18288">
-            <a:spAutoFit/>
-          </a:bodyPr>
-          <a:lstStyle/>
-          <a:p>
-            <a:pPr algn="l">
-              <a:lnSpc>
-                <a:spcPct val="100000"/>
-              </a:lnSpc>
-              <a:spcAft>
-                <a:spcPts val="0"/>
-              </a:spcAft>
-            </a:pPr>
-            <a:r>
-              <a:rPr sz="1300" b="0">
-                <a:solidFill>
-                  <a:srgbClr val="7A7977"/>
-                </a:solidFill>
-                <a:latin typeface="Calibri"/>
-                <a:ea typeface="Microsoft JhengHei"/>
-                <a:cs typeface="Microsoft JhengHei"/>
-              </a:rPr>
-              <a:t>（滑鼠操作）</a:t>
-            </a:r>
-          </a:p>
-        </p:txBody>
-      </p:sp>
-      <p:sp>
-        <p:nvSpPr>
-          <p:cNvPr id="30" name="Oval 29"/>
-          <p:cNvSpPr/>
-          <p:nvPr/>
-        </p:nvSpPr>
-        <p:spPr>
-          <a:xfrm>
-            <a:off x="548640" y="5385816"/>
-            <a:ext cx="548640" cy="548640"/>
-          </a:xfrm>
-          <a:prstGeom prst="ellipse">
-            <a:avLst/>
-          </a:prstGeom>
-          <a:solidFill>
-            <a:srgbClr val="00549D"/>
-          </a:solidFill>
-          <a:ln>
-            <a:noFill/>
-          </a:ln>
-          <a:effectLst/>
-        </p:spPr>
-        <p:txBody>
-          <a:bodyPr rtlCol="0" anchor="ctr"/>
-          <a:lstStyle/>
-          <a:p>
-            <a:pPr algn="ctr"/>
-          </a:p>
-        </p:txBody>
-      </p:sp>
-      <p:sp>
-        <p:nvSpPr>
-          <p:cNvPr id="31" name="TextBox 30"/>
-          <p:cNvSpPr txBox="1"/>
-          <p:nvPr/>
-        </p:nvSpPr>
-        <p:spPr>
-          <a:xfrm>
-            <a:off x="548640" y="5385816"/>
-            <a:ext cx="548640" cy="548640"/>
-          </a:xfrm>
-          <a:prstGeom prst="rect">
-            <a:avLst/>
-          </a:prstGeom>
-          <a:noFill/>
-        </p:spPr>
-        <p:txBody>
-          <a:bodyPr wrap="square" anchor="ctr" lIns="36576" rIns="36576" tIns="18288" bIns="18288">
-            <a:spAutoFit/>
-          </a:bodyPr>
-          <a:lstStyle/>
-          <a:p>
-            <a:pPr algn="ctr">
-              <a:lnSpc>
-                <a:spcPct val="115000"/>
-              </a:lnSpc>
-              <a:spcAft>
-                <a:spcPts val="400"/>
-              </a:spcAft>
-            </a:pPr>
-            <a:r>
-              <a:rPr sz="1800" b="1">
-                <a:solidFill>
-                  <a:srgbClr val="FFFFFF"/>
-                </a:solidFill>
-                <a:latin typeface="Calibri"/>
-                <a:ea typeface="Microsoft JhengHei"/>
-                <a:cs typeface="Microsoft JhengHei"/>
-              </a:rPr>
-              <a:t>5</a:t>
-            </a:r>
-          </a:p>
-        </p:txBody>
-      </p:sp>
-      <p:sp>
-        <p:nvSpPr>
-          <p:cNvPr id="32" name="TextBox 31"/>
-          <p:cNvSpPr txBox="1"/>
-          <p:nvPr/>
-        </p:nvSpPr>
-        <p:spPr>
-          <a:xfrm>
-            <a:off x="1280160" y="5404104"/>
-            <a:ext cx="4937760" cy="548640"/>
-          </a:xfrm>
-          <a:prstGeom prst="rect">
-            <a:avLst/>
-          </a:prstGeom>
-          <a:noFill/>
-        </p:spPr>
-        <p:txBody>
-          <a:bodyPr wrap="square" anchor="ctr" lIns="36576" rIns="36576" tIns="18288" bIns="18288">
-            <a:spAutoFit/>
-          </a:bodyPr>
-          <a:lstStyle/>
-          <a:p>
-            <a:pPr algn="l">
-              <a:lnSpc>
-                <a:spcPct val="115000"/>
-              </a:lnSpc>
-              <a:spcAft>
-                <a:spcPts val="400"/>
-              </a:spcAft>
-            </a:pPr>
-            <a:r>
-              <a:rPr sz="1500" b="0">
-                <a:solidFill>
-                  <a:srgbClr val="0B0B0B"/>
-                </a:solidFill>
-                <a:latin typeface="Calibri"/>
-                <a:ea typeface="Microsoft JhengHei"/>
-                <a:cs typeface="Microsoft JhengHei"/>
-              </a:rPr>
-              <a:t>結束</a:t>
-            </a:r>
-          </a:p>
-        </p:txBody>
-      </p:sp>
-      <p:sp>
-        <p:nvSpPr>
-          <p:cNvPr id="33" name="Rectangle 32"/>
-          <p:cNvSpPr/>
-          <p:nvPr/>
-        </p:nvSpPr>
-        <p:spPr>
-          <a:xfrm>
-            <a:off x="6309360" y="5367528"/>
-            <a:ext cx="5330952" cy="603504"/>
-          </a:xfrm>
-          <a:prstGeom prst="rect">
-            <a:avLst/>
-          </a:prstGeom>
-          <a:solidFill>
-            <a:srgbClr val="1E1E1E"/>
-          </a:solidFill>
-          <a:ln>
-            <a:noFill/>
-          </a:ln>
-          <a:effectLst/>
-        </p:spPr>
-        <p:txBody>
-          <a:bodyPr rtlCol="0" anchor="ctr"/>
-          <a:lstStyle/>
-          <a:p>
-            <a:pPr algn="ctr"/>
-          </a:p>
-        </p:txBody>
-      </p:sp>
-      <p:sp>
-        <p:nvSpPr>
-          <p:cNvPr id="34" name="TextBox 33"/>
-          <p:cNvSpPr txBox="1"/>
-          <p:nvPr/>
-        </p:nvSpPr>
-        <p:spPr>
-          <a:xfrm>
-            <a:off x="6446520" y="5367528"/>
-            <a:ext cx="5120640" cy="603504"/>
-          </a:xfrm>
-          <a:prstGeom prst="rect">
-            <a:avLst/>
-          </a:prstGeom>
-          <a:noFill/>
-        </p:spPr>
-        <p:txBody>
-          <a:bodyPr wrap="square" anchor="ctr" lIns="36576" rIns="36576" tIns="18288" bIns="18288">
-            <a:spAutoFit/>
-          </a:bodyPr>
-          <a:lstStyle/>
-          <a:p>
-            <a:pPr algn="l">
-              <a:lnSpc>
-                <a:spcPct val="100000"/>
-              </a:lnSpc>
-              <a:spcAft>
-                <a:spcPts val="0"/>
-              </a:spcAft>
-            </a:pPr>
-            <a:r>
-              <a:rPr sz="1400" b="0">
-                <a:solidFill>
-                  <a:srgbClr val="F2F2F2"/>
-                </a:solidFill>
-                <a:latin typeface="Consolas"/>
-                <a:ea typeface="Microsoft JhengHei"/>
-                <a:cs typeface="Microsoft JhengHei"/>
-              </a:rPr>
-              <a:t>./run.sh stop</a:t>
-            </a:r>
-          </a:p>
-        </p:txBody>
-      </p:sp>
-      <p:sp>
-        <p:nvSpPr>
-          <p:cNvPr id="35" name="TextBox 34"/>
-          <p:cNvSpPr txBox="1"/>
-          <p:nvPr/>
-        </p:nvSpPr>
-        <p:spPr>
-          <a:xfrm>
-            <a:off x="548640" y="6217920"/>
-            <a:ext cx="11091672" cy="274320"/>
-          </a:xfrm>
-          <a:prstGeom prst="rect">
-            <a:avLst/>
-          </a:prstGeom>
-          <a:noFill/>
-        </p:spPr>
-        <p:txBody>
-          <a:bodyPr wrap="square" anchor="t" lIns="36576" rIns="36576" tIns="18288" bIns="18288">
-            <a:spAutoFit/>
-          </a:bodyPr>
-          <a:lstStyle/>
-          <a:p>
-            <a:pPr algn="l">
-              <a:lnSpc>
-                <a:spcPct val="115000"/>
-              </a:lnSpc>
-              <a:spcAft>
-                <a:spcPts val="400"/>
-              </a:spcAft>
-            </a:pPr>
-            <a:r>
-              <a:rPr sz="1100" b="0">
-                <a:solidFill>
-                  <a:srgbClr val="7A7977"/>
-                </a:solidFill>
-                <a:latin typeface="Calibri"/>
-                <a:ea typeface="Microsoft JhengHei"/>
-                <a:cs typeface="Microsoft JhengHei"/>
-              </a:rPr>
-              <a:t>展示強化學習避障：./run.sh sim rl　｜　沒有螢幕時：./run.sh sim dwb gui:=false rviz:=false</a:t>
+              <a:t>•  量實機的重量分布，回頭修正模型</a:t>
             </a:r>
           </a:p>
         </p:txBody>
@@ -7128,7 +6903,7 @@
                 <a:ea typeface="Microsoft JhengHei"/>
                 <a:cs typeface="Microsoft JhengHei"/>
               </a:rPr>
-              <a:t>專案資料與文件</a:t>
+              <a:t>現場展示：如何啟動模擬</a:t>
             </a:r>
           </a:p>
         </p:txBody>
@@ -7207,7 +6982,7 @@
                 <a:ea typeface="Microsoft JhengHei"/>
                 <a:cs typeface="Microsoft JhengHei"/>
               </a:rPr>
-              <a:t>所有程式、設定、測試結果與說明都整理在同一個資料夾</a:t>
+              <a:t>三個指令啟動，在 RViz 點一下目標，機器狗就會自己走過去</a:t>
             </a:r>
           </a:p>
         </p:txBody>
@@ -7296,6 +7071,1347 @@
                 <a:cs typeface="Microsoft JhengHei"/>
               </a:rPr>
               <a:t>12</a:t>
+            </a:r>
+          </a:p>
+        </p:txBody>
+      </p:sp>
+      <p:sp>
+        <p:nvSpPr>
+          <p:cNvPr id="10" name="Oval 9"/>
+          <p:cNvSpPr/>
+          <p:nvPr/>
+        </p:nvSpPr>
+        <p:spPr>
+          <a:xfrm>
+            <a:off x="548640" y="2240280"/>
+            <a:ext cx="548640" cy="548640"/>
+          </a:xfrm>
+          <a:prstGeom prst="ellipse">
+            <a:avLst/>
+          </a:prstGeom>
+          <a:solidFill>
+            <a:srgbClr val="00549D"/>
+          </a:solidFill>
+          <a:ln>
+            <a:noFill/>
+          </a:ln>
+          <a:effectLst/>
+        </p:spPr>
+        <p:txBody>
+          <a:bodyPr rtlCol="0" anchor="ctr"/>
+          <a:lstStyle/>
+          <a:p>
+            <a:pPr algn="ctr"/>
+          </a:p>
+        </p:txBody>
+      </p:sp>
+      <p:sp>
+        <p:nvSpPr>
+          <p:cNvPr id="11" name="TextBox 10"/>
+          <p:cNvSpPr txBox="1"/>
+          <p:nvPr/>
+        </p:nvSpPr>
+        <p:spPr>
+          <a:xfrm>
+            <a:off x="548640" y="2240280"/>
+            <a:ext cx="548640" cy="548640"/>
+          </a:xfrm>
+          <a:prstGeom prst="rect">
+            <a:avLst/>
+          </a:prstGeom>
+          <a:noFill/>
+        </p:spPr>
+        <p:txBody>
+          <a:bodyPr wrap="square" anchor="ctr" lIns="36576" rIns="36576" tIns="18288" bIns="18288">
+            <a:spAutoFit/>
+          </a:bodyPr>
+          <a:lstStyle/>
+          <a:p>
+            <a:pPr algn="ctr">
+              <a:lnSpc>
+                <a:spcPct val="115000"/>
+              </a:lnSpc>
+              <a:spcAft>
+                <a:spcPts val="400"/>
+              </a:spcAft>
+            </a:pPr>
+            <a:r>
+              <a:rPr sz="1800" b="1">
+                <a:solidFill>
+                  <a:srgbClr val="FFFFFF"/>
+                </a:solidFill>
+                <a:latin typeface="Calibri"/>
+                <a:ea typeface="Microsoft JhengHei"/>
+                <a:cs typeface="Microsoft JhengHei"/>
+              </a:rPr>
+              <a:t>1</a:t>
+            </a:r>
+          </a:p>
+        </p:txBody>
+      </p:sp>
+      <p:sp>
+        <p:nvSpPr>
+          <p:cNvPr id="12" name="TextBox 11"/>
+          <p:cNvSpPr txBox="1"/>
+          <p:nvPr/>
+        </p:nvSpPr>
+        <p:spPr>
+          <a:xfrm>
+            <a:off x="1280160" y="2258568"/>
+            <a:ext cx="4937760" cy="548640"/>
+          </a:xfrm>
+          <a:prstGeom prst="rect">
+            <a:avLst/>
+          </a:prstGeom>
+          <a:noFill/>
+        </p:spPr>
+        <p:txBody>
+          <a:bodyPr wrap="square" anchor="ctr" lIns="36576" rIns="36576" tIns="18288" bIns="18288">
+            <a:spAutoFit/>
+          </a:bodyPr>
+          <a:lstStyle/>
+          <a:p>
+            <a:pPr algn="l">
+              <a:lnSpc>
+                <a:spcPct val="115000"/>
+              </a:lnSpc>
+              <a:spcAft>
+                <a:spcPts val="400"/>
+              </a:spcAft>
+            </a:pPr>
+            <a:r>
+              <a:rPr sz="1500" b="0">
+                <a:solidFill>
+                  <a:srgbClr val="0B0B0B"/>
+                </a:solidFill>
+                <a:latin typeface="Calibri"/>
+                <a:ea typeface="Microsoft JhengHei"/>
+                <a:cs typeface="Microsoft JhengHei"/>
+              </a:rPr>
+              <a:t>開終端機，進入資料夾</a:t>
+            </a:r>
+          </a:p>
+        </p:txBody>
+      </p:sp>
+      <p:sp>
+        <p:nvSpPr>
+          <p:cNvPr id="13" name="Rectangle 12"/>
+          <p:cNvSpPr/>
+          <p:nvPr/>
+        </p:nvSpPr>
+        <p:spPr>
+          <a:xfrm>
+            <a:off x="6309360" y="2221992"/>
+            <a:ext cx="5330952" cy="603504"/>
+          </a:xfrm>
+          <a:prstGeom prst="rect">
+            <a:avLst/>
+          </a:prstGeom>
+          <a:solidFill>
+            <a:srgbClr val="1E1E1E"/>
+          </a:solidFill>
+          <a:ln>
+            <a:noFill/>
+          </a:ln>
+          <a:effectLst/>
+        </p:spPr>
+        <p:txBody>
+          <a:bodyPr rtlCol="0" anchor="ctr"/>
+          <a:lstStyle/>
+          <a:p>
+            <a:pPr algn="ctr"/>
+          </a:p>
+        </p:txBody>
+      </p:sp>
+      <p:sp>
+        <p:nvSpPr>
+          <p:cNvPr id="14" name="TextBox 13"/>
+          <p:cNvSpPr txBox="1"/>
+          <p:nvPr/>
+        </p:nvSpPr>
+        <p:spPr>
+          <a:xfrm>
+            <a:off x="6446520" y="2221992"/>
+            <a:ext cx="5120640" cy="603504"/>
+          </a:xfrm>
+          <a:prstGeom prst="rect">
+            <a:avLst/>
+          </a:prstGeom>
+          <a:noFill/>
+        </p:spPr>
+        <p:txBody>
+          <a:bodyPr wrap="square" anchor="ctr" lIns="36576" rIns="36576" tIns="18288" bIns="18288">
+            <a:spAutoFit/>
+          </a:bodyPr>
+          <a:lstStyle/>
+          <a:p>
+            <a:pPr algn="l">
+              <a:lnSpc>
+                <a:spcPct val="100000"/>
+              </a:lnSpc>
+              <a:spcAft>
+                <a:spcPts val="0"/>
+              </a:spcAft>
+            </a:pPr>
+            <a:r>
+              <a:rPr sz="1400" b="0">
+                <a:solidFill>
+                  <a:srgbClr val="F2F2F2"/>
+                </a:solidFill>
+                <a:latin typeface="Consolas"/>
+                <a:ea typeface="Microsoft JhengHei"/>
+                <a:cs typeface="Microsoft JhengHei"/>
+              </a:rPr>
+              <a:t>cd DOGZILLA/sim_env</a:t>
+            </a:r>
+          </a:p>
+        </p:txBody>
+      </p:sp>
+      <p:sp>
+        <p:nvSpPr>
+          <p:cNvPr id="15" name="Oval 14"/>
+          <p:cNvSpPr/>
+          <p:nvPr/>
+        </p:nvSpPr>
+        <p:spPr>
+          <a:xfrm>
+            <a:off x="548640" y="3026664"/>
+            <a:ext cx="548640" cy="548640"/>
+          </a:xfrm>
+          <a:prstGeom prst="ellipse">
+            <a:avLst/>
+          </a:prstGeom>
+          <a:solidFill>
+            <a:srgbClr val="00549D"/>
+          </a:solidFill>
+          <a:ln>
+            <a:noFill/>
+          </a:ln>
+          <a:effectLst/>
+        </p:spPr>
+        <p:txBody>
+          <a:bodyPr rtlCol="0" anchor="ctr"/>
+          <a:lstStyle/>
+          <a:p>
+            <a:pPr algn="ctr"/>
+          </a:p>
+        </p:txBody>
+      </p:sp>
+      <p:sp>
+        <p:nvSpPr>
+          <p:cNvPr id="16" name="TextBox 15"/>
+          <p:cNvSpPr txBox="1"/>
+          <p:nvPr/>
+        </p:nvSpPr>
+        <p:spPr>
+          <a:xfrm>
+            <a:off x="548640" y="3026664"/>
+            <a:ext cx="548640" cy="548640"/>
+          </a:xfrm>
+          <a:prstGeom prst="rect">
+            <a:avLst/>
+          </a:prstGeom>
+          <a:noFill/>
+        </p:spPr>
+        <p:txBody>
+          <a:bodyPr wrap="square" anchor="ctr" lIns="36576" rIns="36576" tIns="18288" bIns="18288">
+            <a:spAutoFit/>
+          </a:bodyPr>
+          <a:lstStyle/>
+          <a:p>
+            <a:pPr algn="ctr">
+              <a:lnSpc>
+                <a:spcPct val="115000"/>
+              </a:lnSpc>
+              <a:spcAft>
+                <a:spcPts val="400"/>
+              </a:spcAft>
+            </a:pPr>
+            <a:r>
+              <a:rPr sz="1800" b="1">
+                <a:solidFill>
+                  <a:srgbClr val="FFFFFF"/>
+                </a:solidFill>
+                <a:latin typeface="Calibri"/>
+                <a:ea typeface="Microsoft JhengHei"/>
+                <a:cs typeface="Microsoft JhengHei"/>
+              </a:rPr>
+              <a:t>2</a:t>
+            </a:r>
+          </a:p>
+        </p:txBody>
+      </p:sp>
+      <p:sp>
+        <p:nvSpPr>
+          <p:cNvPr id="17" name="TextBox 16"/>
+          <p:cNvSpPr txBox="1"/>
+          <p:nvPr/>
+        </p:nvSpPr>
+        <p:spPr>
+          <a:xfrm>
+            <a:off x="1280160" y="3044952"/>
+            <a:ext cx="4937760" cy="548640"/>
+          </a:xfrm>
+          <a:prstGeom prst="rect">
+            <a:avLst/>
+          </a:prstGeom>
+          <a:noFill/>
+        </p:spPr>
+        <p:txBody>
+          <a:bodyPr wrap="square" anchor="ctr" lIns="36576" rIns="36576" tIns="18288" bIns="18288">
+            <a:spAutoFit/>
+          </a:bodyPr>
+          <a:lstStyle/>
+          <a:p>
+            <a:pPr algn="l">
+              <a:lnSpc>
+                <a:spcPct val="115000"/>
+              </a:lnSpc>
+              <a:spcAft>
+                <a:spcPts val="400"/>
+              </a:spcAft>
+            </a:pPr>
+            <a:r>
+              <a:rPr sz="1500" b="0">
+                <a:solidFill>
+                  <a:srgbClr val="0B0B0B"/>
+                </a:solidFill>
+                <a:latin typeface="Calibri"/>
+                <a:ea typeface="Microsoft JhengHei"/>
+                <a:cs typeface="Microsoft JhengHei"/>
+              </a:rPr>
+              <a:t>第一次才需要：建環境（約 15 分鐘）</a:t>
+            </a:r>
+          </a:p>
+        </p:txBody>
+      </p:sp>
+      <p:sp>
+        <p:nvSpPr>
+          <p:cNvPr id="18" name="Rectangle 17"/>
+          <p:cNvSpPr/>
+          <p:nvPr/>
+        </p:nvSpPr>
+        <p:spPr>
+          <a:xfrm>
+            <a:off x="6309360" y="3008376"/>
+            <a:ext cx="5330952" cy="713232"/>
+          </a:xfrm>
+          <a:prstGeom prst="rect">
+            <a:avLst/>
+          </a:prstGeom>
+          <a:solidFill>
+            <a:srgbClr val="1E1E1E"/>
+          </a:solidFill>
+          <a:ln>
+            <a:noFill/>
+          </a:ln>
+          <a:effectLst/>
+        </p:spPr>
+        <p:txBody>
+          <a:bodyPr rtlCol="0" anchor="ctr"/>
+          <a:lstStyle/>
+          <a:p>
+            <a:pPr algn="ctr"/>
+          </a:p>
+        </p:txBody>
+      </p:sp>
+      <p:sp>
+        <p:nvSpPr>
+          <p:cNvPr id="19" name="TextBox 18"/>
+          <p:cNvSpPr txBox="1"/>
+          <p:nvPr/>
+        </p:nvSpPr>
+        <p:spPr>
+          <a:xfrm>
+            <a:off x="6446520" y="3008376"/>
+            <a:ext cx="5120640" cy="713232"/>
+          </a:xfrm>
+          <a:prstGeom prst="rect">
+            <a:avLst/>
+          </a:prstGeom>
+          <a:noFill/>
+        </p:spPr>
+        <p:txBody>
+          <a:bodyPr wrap="square" anchor="ctr" lIns="36576" rIns="36576" tIns="18288" bIns="18288">
+            <a:spAutoFit/>
+          </a:bodyPr>
+          <a:lstStyle/>
+          <a:p>
+            <a:pPr algn="l">
+              <a:lnSpc>
+                <a:spcPct val="100000"/>
+              </a:lnSpc>
+              <a:spcAft>
+                <a:spcPts val="0"/>
+              </a:spcAft>
+            </a:pPr>
+            <a:r>
+              <a:rPr sz="1400" b="0">
+                <a:solidFill>
+                  <a:srgbClr val="F2F2F2"/>
+                </a:solidFill>
+                <a:latin typeface="Consolas"/>
+                <a:ea typeface="Microsoft JhengHei"/>
+                <a:cs typeface="Microsoft JhengHei"/>
+              </a:rPr>
+              <a:t>./run.sh build
+./run.sh colcon</a:t>
+            </a:r>
+          </a:p>
+        </p:txBody>
+      </p:sp>
+      <p:sp>
+        <p:nvSpPr>
+          <p:cNvPr id="20" name="Oval 19"/>
+          <p:cNvSpPr/>
+          <p:nvPr/>
+        </p:nvSpPr>
+        <p:spPr>
+          <a:xfrm>
+            <a:off x="548640" y="3813048"/>
+            <a:ext cx="548640" cy="548640"/>
+          </a:xfrm>
+          <a:prstGeom prst="ellipse">
+            <a:avLst/>
+          </a:prstGeom>
+          <a:solidFill>
+            <a:srgbClr val="00549D"/>
+          </a:solidFill>
+          <a:ln>
+            <a:noFill/>
+          </a:ln>
+          <a:effectLst/>
+        </p:spPr>
+        <p:txBody>
+          <a:bodyPr rtlCol="0" anchor="ctr"/>
+          <a:lstStyle/>
+          <a:p>
+            <a:pPr algn="ctr"/>
+          </a:p>
+        </p:txBody>
+      </p:sp>
+      <p:sp>
+        <p:nvSpPr>
+          <p:cNvPr id="21" name="TextBox 20"/>
+          <p:cNvSpPr txBox="1"/>
+          <p:nvPr/>
+        </p:nvSpPr>
+        <p:spPr>
+          <a:xfrm>
+            <a:off x="548640" y="3813048"/>
+            <a:ext cx="548640" cy="548640"/>
+          </a:xfrm>
+          <a:prstGeom prst="rect">
+            <a:avLst/>
+          </a:prstGeom>
+          <a:noFill/>
+        </p:spPr>
+        <p:txBody>
+          <a:bodyPr wrap="square" anchor="ctr" lIns="36576" rIns="36576" tIns="18288" bIns="18288">
+            <a:spAutoFit/>
+          </a:bodyPr>
+          <a:lstStyle/>
+          <a:p>
+            <a:pPr algn="ctr">
+              <a:lnSpc>
+                <a:spcPct val="115000"/>
+              </a:lnSpc>
+              <a:spcAft>
+                <a:spcPts val="400"/>
+              </a:spcAft>
+            </a:pPr>
+            <a:r>
+              <a:rPr sz="1800" b="1">
+                <a:solidFill>
+                  <a:srgbClr val="FFFFFF"/>
+                </a:solidFill>
+                <a:latin typeface="Calibri"/>
+                <a:ea typeface="Microsoft JhengHei"/>
+                <a:cs typeface="Microsoft JhengHei"/>
+              </a:rPr>
+              <a:t>3</a:t>
+            </a:r>
+          </a:p>
+        </p:txBody>
+      </p:sp>
+      <p:sp>
+        <p:nvSpPr>
+          <p:cNvPr id="22" name="TextBox 21"/>
+          <p:cNvSpPr txBox="1"/>
+          <p:nvPr/>
+        </p:nvSpPr>
+        <p:spPr>
+          <a:xfrm>
+            <a:off x="1280160" y="3831335"/>
+            <a:ext cx="4937760" cy="548640"/>
+          </a:xfrm>
+          <a:prstGeom prst="rect">
+            <a:avLst/>
+          </a:prstGeom>
+          <a:noFill/>
+        </p:spPr>
+        <p:txBody>
+          <a:bodyPr wrap="square" anchor="ctr" lIns="36576" rIns="36576" tIns="18288" bIns="18288">
+            <a:spAutoFit/>
+          </a:bodyPr>
+          <a:lstStyle/>
+          <a:p>
+            <a:pPr algn="l">
+              <a:lnSpc>
+                <a:spcPct val="115000"/>
+              </a:lnSpc>
+              <a:spcAft>
+                <a:spcPts val="400"/>
+              </a:spcAft>
+            </a:pPr>
+            <a:r>
+              <a:rPr sz="1500" b="0">
+                <a:solidFill>
+                  <a:srgbClr val="0B0B0B"/>
+                </a:solidFill>
+                <a:latin typeface="Calibri"/>
+                <a:ea typeface="Microsoft JhengHei"/>
+                <a:cs typeface="Microsoft JhengHei"/>
+              </a:rPr>
+              <a:t>啟動模擬（約 30 秒後出現畫面）</a:t>
+            </a:r>
+          </a:p>
+        </p:txBody>
+      </p:sp>
+      <p:sp>
+        <p:nvSpPr>
+          <p:cNvPr id="23" name="Rectangle 22"/>
+          <p:cNvSpPr/>
+          <p:nvPr/>
+        </p:nvSpPr>
+        <p:spPr>
+          <a:xfrm>
+            <a:off x="6309360" y="3794760"/>
+            <a:ext cx="5330952" cy="603504"/>
+          </a:xfrm>
+          <a:prstGeom prst="rect">
+            <a:avLst/>
+          </a:prstGeom>
+          <a:solidFill>
+            <a:srgbClr val="1E1E1E"/>
+          </a:solidFill>
+          <a:ln>
+            <a:noFill/>
+          </a:ln>
+          <a:effectLst/>
+        </p:spPr>
+        <p:txBody>
+          <a:bodyPr rtlCol="0" anchor="ctr"/>
+          <a:lstStyle/>
+          <a:p>
+            <a:pPr algn="ctr"/>
+          </a:p>
+        </p:txBody>
+      </p:sp>
+      <p:sp>
+        <p:nvSpPr>
+          <p:cNvPr id="24" name="TextBox 23"/>
+          <p:cNvSpPr txBox="1"/>
+          <p:nvPr/>
+        </p:nvSpPr>
+        <p:spPr>
+          <a:xfrm>
+            <a:off x="6446520" y="3794760"/>
+            <a:ext cx="5120640" cy="603504"/>
+          </a:xfrm>
+          <a:prstGeom prst="rect">
+            <a:avLst/>
+          </a:prstGeom>
+          <a:noFill/>
+        </p:spPr>
+        <p:txBody>
+          <a:bodyPr wrap="square" anchor="ctr" lIns="36576" rIns="36576" tIns="18288" bIns="18288">
+            <a:spAutoFit/>
+          </a:bodyPr>
+          <a:lstStyle/>
+          <a:p>
+            <a:pPr algn="l">
+              <a:lnSpc>
+                <a:spcPct val="100000"/>
+              </a:lnSpc>
+              <a:spcAft>
+                <a:spcPts val="0"/>
+              </a:spcAft>
+            </a:pPr>
+            <a:r>
+              <a:rPr sz="1400" b="0">
+                <a:solidFill>
+                  <a:srgbClr val="F2F2F2"/>
+                </a:solidFill>
+                <a:latin typeface="Consolas"/>
+                <a:ea typeface="Microsoft JhengHei"/>
+                <a:cs typeface="Microsoft JhengHei"/>
+              </a:rPr>
+              <a:t>./run.sh sim</a:t>
+            </a:r>
+          </a:p>
+        </p:txBody>
+      </p:sp>
+      <p:sp>
+        <p:nvSpPr>
+          <p:cNvPr id="25" name="Oval 24"/>
+          <p:cNvSpPr/>
+          <p:nvPr/>
+        </p:nvSpPr>
+        <p:spPr>
+          <a:xfrm>
+            <a:off x="548640" y="4599432"/>
+            <a:ext cx="548640" cy="548640"/>
+          </a:xfrm>
+          <a:prstGeom prst="ellipse">
+            <a:avLst/>
+          </a:prstGeom>
+          <a:solidFill>
+            <a:srgbClr val="00549D"/>
+          </a:solidFill>
+          <a:ln>
+            <a:noFill/>
+          </a:ln>
+          <a:effectLst/>
+        </p:spPr>
+        <p:txBody>
+          <a:bodyPr rtlCol="0" anchor="ctr"/>
+          <a:lstStyle/>
+          <a:p>
+            <a:pPr algn="ctr"/>
+          </a:p>
+        </p:txBody>
+      </p:sp>
+      <p:sp>
+        <p:nvSpPr>
+          <p:cNvPr id="26" name="TextBox 25"/>
+          <p:cNvSpPr txBox="1"/>
+          <p:nvPr/>
+        </p:nvSpPr>
+        <p:spPr>
+          <a:xfrm>
+            <a:off x="548640" y="4599432"/>
+            <a:ext cx="548640" cy="548640"/>
+          </a:xfrm>
+          <a:prstGeom prst="rect">
+            <a:avLst/>
+          </a:prstGeom>
+          <a:noFill/>
+        </p:spPr>
+        <p:txBody>
+          <a:bodyPr wrap="square" anchor="ctr" lIns="36576" rIns="36576" tIns="18288" bIns="18288">
+            <a:spAutoFit/>
+          </a:bodyPr>
+          <a:lstStyle/>
+          <a:p>
+            <a:pPr algn="ctr">
+              <a:lnSpc>
+                <a:spcPct val="115000"/>
+              </a:lnSpc>
+              <a:spcAft>
+                <a:spcPts val="400"/>
+              </a:spcAft>
+            </a:pPr>
+            <a:r>
+              <a:rPr sz="1800" b="1">
+                <a:solidFill>
+                  <a:srgbClr val="FFFFFF"/>
+                </a:solidFill>
+                <a:latin typeface="Calibri"/>
+                <a:ea typeface="Microsoft JhengHei"/>
+                <a:cs typeface="Microsoft JhengHei"/>
+              </a:rPr>
+              <a:t>4</a:t>
+            </a:r>
+          </a:p>
+        </p:txBody>
+      </p:sp>
+      <p:sp>
+        <p:nvSpPr>
+          <p:cNvPr id="27" name="TextBox 26"/>
+          <p:cNvSpPr txBox="1"/>
+          <p:nvPr/>
+        </p:nvSpPr>
+        <p:spPr>
+          <a:xfrm>
+            <a:off x="1280160" y="4617720"/>
+            <a:ext cx="4937760" cy="548640"/>
+          </a:xfrm>
+          <a:prstGeom prst="rect">
+            <a:avLst/>
+          </a:prstGeom>
+          <a:noFill/>
+        </p:spPr>
+        <p:txBody>
+          <a:bodyPr wrap="square" anchor="ctr" lIns="36576" rIns="36576" tIns="18288" bIns="18288">
+            <a:spAutoFit/>
+          </a:bodyPr>
+          <a:lstStyle/>
+          <a:p>
+            <a:pPr algn="l">
+              <a:lnSpc>
+                <a:spcPct val="115000"/>
+              </a:lnSpc>
+              <a:spcAft>
+                <a:spcPts val="400"/>
+              </a:spcAft>
+            </a:pPr>
+            <a:r>
+              <a:rPr sz="1500" b="0">
+                <a:solidFill>
+                  <a:srgbClr val="0B0B0B"/>
+                </a:solidFill>
+                <a:latin typeface="Calibri"/>
+                <a:ea typeface="Microsoft JhengHei"/>
+                <a:cs typeface="Microsoft JhengHei"/>
+              </a:rPr>
+              <a:t>在 RViz 按「2D Goal Pose」，在地圖上點目標</a:t>
+            </a:r>
+          </a:p>
+        </p:txBody>
+      </p:sp>
+      <p:sp>
+        <p:nvSpPr>
+          <p:cNvPr id="28" name="Rectangle 27"/>
+          <p:cNvSpPr/>
+          <p:nvPr/>
+        </p:nvSpPr>
+        <p:spPr>
+          <a:xfrm>
+            <a:off x="6309360" y="4581144"/>
+            <a:ext cx="5330952" cy="603504"/>
+          </a:xfrm>
+          <a:prstGeom prst="rect">
+            <a:avLst/>
+          </a:prstGeom>
+          <a:noFill/>
+          <a:ln>
+            <a:noFill/>
+          </a:ln>
+          <a:effectLst/>
+        </p:spPr>
+        <p:txBody>
+          <a:bodyPr rtlCol="0" anchor="ctr"/>
+          <a:lstStyle/>
+          <a:p>
+            <a:pPr algn="ctr"/>
+          </a:p>
+        </p:txBody>
+      </p:sp>
+      <p:sp>
+        <p:nvSpPr>
+          <p:cNvPr id="29" name="TextBox 28"/>
+          <p:cNvSpPr txBox="1"/>
+          <p:nvPr/>
+        </p:nvSpPr>
+        <p:spPr>
+          <a:xfrm>
+            <a:off x="6446520" y="4581144"/>
+            <a:ext cx="5120640" cy="603504"/>
+          </a:xfrm>
+          <a:prstGeom prst="rect">
+            <a:avLst/>
+          </a:prstGeom>
+          <a:noFill/>
+        </p:spPr>
+        <p:txBody>
+          <a:bodyPr wrap="square" anchor="ctr" lIns="36576" rIns="36576" tIns="18288" bIns="18288">
+            <a:spAutoFit/>
+          </a:bodyPr>
+          <a:lstStyle/>
+          <a:p>
+            <a:pPr algn="l">
+              <a:lnSpc>
+                <a:spcPct val="100000"/>
+              </a:lnSpc>
+              <a:spcAft>
+                <a:spcPts val="0"/>
+              </a:spcAft>
+            </a:pPr>
+            <a:r>
+              <a:rPr sz="1300" b="0">
+                <a:solidFill>
+                  <a:srgbClr val="7A7977"/>
+                </a:solidFill>
+                <a:latin typeface="Calibri"/>
+                <a:ea typeface="Microsoft JhengHei"/>
+                <a:cs typeface="Microsoft JhengHei"/>
+              </a:rPr>
+              <a:t>（滑鼠操作）</a:t>
+            </a:r>
+          </a:p>
+        </p:txBody>
+      </p:sp>
+      <p:sp>
+        <p:nvSpPr>
+          <p:cNvPr id="30" name="Oval 29"/>
+          <p:cNvSpPr/>
+          <p:nvPr/>
+        </p:nvSpPr>
+        <p:spPr>
+          <a:xfrm>
+            <a:off x="548640" y="5385816"/>
+            <a:ext cx="548640" cy="548640"/>
+          </a:xfrm>
+          <a:prstGeom prst="ellipse">
+            <a:avLst/>
+          </a:prstGeom>
+          <a:solidFill>
+            <a:srgbClr val="00549D"/>
+          </a:solidFill>
+          <a:ln>
+            <a:noFill/>
+          </a:ln>
+          <a:effectLst/>
+        </p:spPr>
+        <p:txBody>
+          <a:bodyPr rtlCol="0" anchor="ctr"/>
+          <a:lstStyle/>
+          <a:p>
+            <a:pPr algn="ctr"/>
+          </a:p>
+        </p:txBody>
+      </p:sp>
+      <p:sp>
+        <p:nvSpPr>
+          <p:cNvPr id="31" name="TextBox 30"/>
+          <p:cNvSpPr txBox="1"/>
+          <p:nvPr/>
+        </p:nvSpPr>
+        <p:spPr>
+          <a:xfrm>
+            <a:off x="548640" y="5385816"/>
+            <a:ext cx="548640" cy="548640"/>
+          </a:xfrm>
+          <a:prstGeom prst="rect">
+            <a:avLst/>
+          </a:prstGeom>
+          <a:noFill/>
+        </p:spPr>
+        <p:txBody>
+          <a:bodyPr wrap="square" anchor="ctr" lIns="36576" rIns="36576" tIns="18288" bIns="18288">
+            <a:spAutoFit/>
+          </a:bodyPr>
+          <a:lstStyle/>
+          <a:p>
+            <a:pPr algn="ctr">
+              <a:lnSpc>
+                <a:spcPct val="115000"/>
+              </a:lnSpc>
+              <a:spcAft>
+                <a:spcPts val="400"/>
+              </a:spcAft>
+            </a:pPr>
+            <a:r>
+              <a:rPr sz="1800" b="1">
+                <a:solidFill>
+                  <a:srgbClr val="FFFFFF"/>
+                </a:solidFill>
+                <a:latin typeface="Calibri"/>
+                <a:ea typeface="Microsoft JhengHei"/>
+                <a:cs typeface="Microsoft JhengHei"/>
+              </a:rPr>
+              <a:t>5</a:t>
+            </a:r>
+          </a:p>
+        </p:txBody>
+      </p:sp>
+      <p:sp>
+        <p:nvSpPr>
+          <p:cNvPr id="32" name="TextBox 31"/>
+          <p:cNvSpPr txBox="1"/>
+          <p:nvPr/>
+        </p:nvSpPr>
+        <p:spPr>
+          <a:xfrm>
+            <a:off x="1280160" y="5404104"/>
+            <a:ext cx="4937760" cy="548640"/>
+          </a:xfrm>
+          <a:prstGeom prst="rect">
+            <a:avLst/>
+          </a:prstGeom>
+          <a:noFill/>
+        </p:spPr>
+        <p:txBody>
+          <a:bodyPr wrap="square" anchor="ctr" lIns="36576" rIns="36576" tIns="18288" bIns="18288">
+            <a:spAutoFit/>
+          </a:bodyPr>
+          <a:lstStyle/>
+          <a:p>
+            <a:pPr algn="l">
+              <a:lnSpc>
+                <a:spcPct val="115000"/>
+              </a:lnSpc>
+              <a:spcAft>
+                <a:spcPts val="400"/>
+              </a:spcAft>
+            </a:pPr>
+            <a:r>
+              <a:rPr sz="1500" b="0">
+                <a:solidFill>
+                  <a:srgbClr val="0B0B0B"/>
+                </a:solidFill>
+                <a:latin typeface="Calibri"/>
+                <a:ea typeface="Microsoft JhengHei"/>
+                <a:cs typeface="Microsoft JhengHei"/>
+              </a:rPr>
+              <a:t>結束</a:t>
+            </a:r>
+          </a:p>
+        </p:txBody>
+      </p:sp>
+      <p:sp>
+        <p:nvSpPr>
+          <p:cNvPr id="33" name="Rectangle 32"/>
+          <p:cNvSpPr/>
+          <p:nvPr/>
+        </p:nvSpPr>
+        <p:spPr>
+          <a:xfrm>
+            <a:off x="6309360" y="5367528"/>
+            <a:ext cx="5330952" cy="603504"/>
+          </a:xfrm>
+          <a:prstGeom prst="rect">
+            <a:avLst/>
+          </a:prstGeom>
+          <a:solidFill>
+            <a:srgbClr val="1E1E1E"/>
+          </a:solidFill>
+          <a:ln>
+            <a:noFill/>
+          </a:ln>
+          <a:effectLst/>
+        </p:spPr>
+        <p:txBody>
+          <a:bodyPr rtlCol="0" anchor="ctr"/>
+          <a:lstStyle/>
+          <a:p>
+            <a:pPr algn="ctr"/>
+          </a:p>
+        </p:txBody>
+      </p:sp>
+      <p:sp>
+        <p:nvSpPr>
+          <p:cNvPr id="34" name="TextBox 33"/>
+          <p:cNvSpPr txBox="1"/>
+          <p:nvPr/>
+        </p:nvSpPr>
+        <p:spPr>
+          <a:xfrm>
+            <a:off x="6446520" y="5367528"/>
+            <a:ext cx="5120640" cy="603504"/>
+          </a:xfrm>
+          <a:prstGeom prst="rect">
+            <a:avLst/>
+          </a:prstGeom>
+          <a:noFill/>
+        </p:spPr>
+        <p:txBody>
+          <a:bodyPr wrap="square" anchor="ctr" lIns="36576" rIns="36576" tIns="18288" bIns="18288">
+            <a:spAutoFit/>
+          </a:bodyPr>
+          <a:lstStyle/>
+          <a:p>
+            <a:pPr algn="l">
+              <a:lnSpc>
+                <a:spcPct val="100000"/>
+              </a:lnSpc>
+              <a:spcAft>
+                <a:spcPts val="0"/>
+              </a:spcAft>
+            </a:pPr>
+            <a:r>
+              <a:rPr sz="1400" b="0">
+                <a:solidFill>
+                  <a:srgbClr val="F2F2F2"/>
+                </a:solidFill>
+                <a:latin typeface="Consolas"/>
+                <a:ea typeface="Microsoft JhengHei"/>
+                <a:cs typeface="Microsoft JhengHei"/>
+              </a:rPr>
+              <a:t>./run.sh stop</a:t>
+            </a:r>
+          </a:p>
+        </p:txBody>
+      </p:sp>
+      <p:sp>
+        <p:nvSpPr>
+          <p:cNvPr id="35" name="TextBox 34"/>
+          <p:cNvSpPr txBox="1"/>
+          <p:nvPr/>
+        </p:nvSpPr>
+        <p:spPr>
+          <a:xfrm>
+            <a:off x="548640" y="6217920"/>
+            <a:ext cx="11091672" cy="274320"/>
+          </a:xfrm>
+          <a:prstGeom prst="rect">
+            <a:avLst/>
+          </a:prstGeom>
+          <a:noFill/>
+        </p:spPr>
+        <p:txBody>
+          <a:bodyPr wrap="square" anchor="t" lIns="36576" rIns="36576" tIns="18288" bIns="18288">
+            <a:spAutoFit/>
+          </a:bodyPr>
+          <a:lstStyle/>
+          <a:p>
+            <a:pPr algn="l">
+              <a:lnSpc>
+                <a:spcPct val="115000"/>
+              </a:lnSpc>
+              <a:spcAft>
+                <a:spcPts val="400"/>
+              </a:spcAft>
+            </a:pPr>
+            <a:r>
+              <a:rPr sz="1100" b="0">
+                <a:solidFill>
+                  <a:srgbClr val="7A7977"/>
+                </a:solidFill>
+                <a:latin typeface="Calibri"/>
+                <a:ea typeface="Microsoft JhengHei"/>
+                <a:cs typeface="Microsoft JhengHei"/>
+              </a:rPr>
+              <a:t>展示強化學習避障：./run.sh sim rl　｜　沒有螢幕時：./run.sh sim dwb gui:=false rviz:=false</a:t>
+            </a:r>
+          </a:p>
+        </p:txBody>
+      </p:sp>
+    </p:spTree>
+  </p:cSld>
+  <p:clrMapOvr>
+    <a:masterClrMapping/>
+  </p:clrMapOvr>
+</p:sld>
+</file>
+
+<file path=ppt/slides/slide13.xml><?xml version="1.0" encoding="utf-8"?>
+<p:sld xmlns:a="http://schemas.openxmlformats.org/drawingml/2006/main" xmlns:p="http://schemas.openxmlformats.org/presentationml/2006/main" xmlns:r="http://schemas.openxmlformats.org/officeDocument/2006/relationships">
+  <p:cSld>
+    <p:spTree>
+      <p:nvGrpSpPr>
+        <p:cNvPr id="1" name=""/>
+        <p:cNvGrpSpPr/>
+        <p:nvPr/>
+      </p:nvGrpSpPr>
+      <p:grpSpPr/>
+      <p:sp>
+        <p:nvSpPr>
+          <p:cNvPr id="2" name="TextBox 1"/>
+          <p:cNvSpPr txBox="1"/>
+          <p:nvPr/>
+        </p:nvSpPr>
+        <p:spPr>
+          <a:xfrm>
+            <a:off x="548640" y="384048"/>
+            <a:ext cx="11091672" cy="292608"/>
+          </a:xfrm>
+          <a:prstGeom prst="rect">
+            <a:avLst/>
+          </a:prstGeom>
+          <a:noFill/>
+        </p:spPr>
+        <p:txBody>
+          <a:bodyPr wrap="square" anchor="t" lIns="36576" rIns="36576" tIns="18288" bIns="18288">
+            <a:spAutoFit/>
+          </a:bodyPr>
+          <a:lstStyle/>
+          <a:p>
+            <a:pPr algn="l">
+              <a:lnSpc>
+                <a:spcPct val="115000"/>
+              </a:lnSpc>
+              <a:spcAft>
+                <a:spcPts val="400"/>
+              </a:spcAft>
+            </a:pPr>
+            <a:r>
+              <a:rPr sz="1400" b="1">
+                <a:solidFill>
+                  <a:srgbClr val="7A7977"/>
+                </a:solidFill>
+                <a:latin typeface="Calibri"/>
+                <a:ea typeface="Microsoft JhengHei"/>
+                <a:cs typeface="Microsoft JhengHei"/>
+              </a:rPr>
+              <a:t>Project 3</a:t>
+            </a:r>
+          </a:p>
+        </p:txBody>
+      </p:sp>
+      <p:cxnSp>
+        <p:nvCxnSpPr>
+          <p:cNvPr id="3" name="Connector 2"/>
+          <p:cNvCxnSpPr/>
+          <p:nvPr/>
+        </p:nvCxnSpPr>
+        <p:spPr>
+          <a:xfrm>
+            <a:off x="548640" y="713232"/>
+            <a:ext cx="11091672" cy="0"/>
+          </a:xfrm>
+          <a:prstGeom prst="line">
+            <a:avLst/>
+          </a:prstGeom>
+          <a:ln w="9525">
+            <a:solidFill>
+              <a:srgbClr val="C8C7C2"/>
+            </a:solidFill>
+          </a:ln>
+        </p:spPr>
+        <p:style>
+          <a:lnRef idx="2">
+            <a:schemeClr val="accent1"/>
+          </a:lnRef>
+          <a:fillRef idx="0">
+            <a:schemeClr val="accent1"/>
+          </a:fillRef>
+          <a:effectRef idx="1">
+            <a:schemeClr val="accent1"/>
+          </a:effectRef>
+          <a:fontRef idx="minor">
+            <a:schemeClr val="tx1"/>
+          </a:fontRef>
+        </p:style>
+      </p:cxnSp>
+      <p:sp>
+        <p:nvSpPr>
+          <p:cNvPr id="4" name="Rectangle 3"/>
+          <p:cNvSpPr/>
+          <p:nvPr/>
+        </p:nvSpPr>
+        <p:spPr>
+          <a:xfrm>
+            <a:off x="548640" y="896112"/>
+            <a:ext cx="54864" cy="457200"/>
+          </a:xfrm>
+          <a:prstGeom prst="rect">
+            <a:avLst/>
+          </a:prstGeom>
+          <a:solidFill>
+            <a:srgbClr val="00549D"/>
+          </a:solidFill>
+          <a:ln>
+            <a:noFill/>
+          </a:ln>
+          <a:effectLst/>
+        </p:spPr>
+        <p:txBody>
+          <a:bodyPr rtlCol="0" anchor="ctr"/>
+          <a:lstStyle/>
+          <a:p>
+            <a:pPr algn="ctr"/>
+          </a:p>
+        </p:txBody>
+      </p:sp>
+      <p:sp>
+        <p:nvSpPr>
+          <p:cNvPr id="5" name="TextBox 4"/>
+          <p:cNvSpPr txBox="1"/>
+          <p:nvPr/>
+        </p:nvSpPr>
+        <p:spPr>
+          <a:xfrm>
+            <a:off x="713232" y="822960"/>
+            <a:ext cx="10515600" cy="594360"/>
+          </a:xfrm>
+          <a:prstGeom prst="rect">
+            <a:avLst/>
+          </a:prstGeom>
+          <a:noFill/>
+        </p:spPr>
+        <p:txBody>
+          <a:bodyPr wrap="square" anchor="ctr" lIns="36576" rIns="36576" tIns="18288" bIns="18288">
+            <a:spAutoFit/>
+          </a:bodyPr>
+          <a:lstStyle/>
+          <a:p>
+            <a:pPr algn="l">
+              <a:lnSpc>
+                <a:spcPct val="115000"/>
+              </a:lnSpc>
+              <a:spcAft>
+                <a:spcPts val="400"/>
+              </a:spcAft>
+            </a:pPr>
+            <a:r>
+              <a:rPr sz="2600" b="1">
+                <a:solidFill>
+                  <a:srgbClr val="00549D"/>
+                </a:solidFill>
+                <a:latin typeface="Calibri"/>
+                <a:ea typeface="Microsoft JhengHei"/>
+                <a:cs typeface="Microsoft JhengHei"/>
+              </a:rPr>
+              <a:t>專案資料與文件</a:t>
+            </a:r>
+          </a:p>
+        </p:txBody>
+      </p:sp>
+      <p:cxnSp>
+        <p:nvCxnSpPr>
+          <p:cNvPr id="6" name="Connector 5"/>
+          <p:cNvCxnSpPr/>
+          <p:nvPr/>
+        </p:nvCxnSpPr>
+        <p:spPr>
+          <a:xfrm>
+            <a:off x="548640" y="1536192"/>
+            <a:ext cx="11091672" cy="0"/>
+          </a:xfrm>
+          <a:prstGeom prst="line">
+            <a:avLst/>
+          </a:prstGeom>
+          <a:ln w="9525">
+            <a:solidFill>
+              <a:srgbClr val="C8C7C2"/>
+            </a:solidFill>
+          </a:ln>
+        </p:spPr>
+        <p:style>
+          <a:lnRef idx="2">
+            <a:schemeClr val="accent1"/>
+          </a:lnRef>
+          <a:fillRef idx="0">
+            <a:schemeClr val="accent1"/>
+          </a:fillRef>
+          <a:effectRef idx="1">
+            <a:schemeClr val="accent1"/>
+          </a:effectRef>
+          <a:fontRef idx="minor">
+            <a:schemeClr val="tx1"/>
+          </a:fontRef>
+        </p:style>
+      </p:cxnSp>
+      <p:sp>
+        <p:nvSpPr>
+          <p:cNvPr id="7" name="TextBox 6"/>
+          <p:cNvSpPr txBox="1"/>
+          <p:nvPr/>
+        </p:nvSpPr>
+        <p:spPr>
+          <a:xfrm>
+            <a:off x="548640" y="1700784"/>
+            <a:ext cx="11091672" cy="411480"/>
+          </a:xfrm>
+          <a:prstGeom prst="rect">
+            <a:avLst/>
+          </a:prstGeom>
+          <a:noFill/>
+        </p:spPr>
+        <p:txBody>
+          <a:bodyPr wrap="square" anchor="t" lIns="36576" rIns="36576" tIns="18288" bIns="18288">
+            <a:spAutoFit/>
+          </a:bodyPr>
+          <a:lstStyle/>
+          <a:p>
+            <a:pPr algn="l">
+              <a:lnSpc>
+                <a:spcPct val="115000"/>
+              </a:lnSpc>
+              <a:spcAft>
+                <a:spcPts val="400"/>
+              </a:spcAft>
+            </a:pPr>
+            <a:r>
+              <a:rPr sz="1500" b="1">
+                <a:solidFill>
+                  <a:srgbClr val="403F3D"/>
+                </a:solidFill>
+                <a:latin typeface="Calibri"/>
+                <a:ea typeface="Microsoft JhengHei"/>
+                <a:cs typeface="Microsoft JhengHei"/>
+              </a:rPr>
+              <a:t>所有程式、設定、測試結果與說明都整理在同一個資料夾</a:t>
+            </a:r>
+          </a:p>
+        </p:txBody>
+      </p:sp>
+      <p:sp>
+        <p:nvSpPr>
+          <p:cNvPr id="8" name="TextBox 7"/>
+          <p:cNvSpPr txBox="1"/>
+          <p:nvPr/>
+        </p:nvSpPr>
+        <p:spPr>
+          <a:xfrm>
+            <a:off x="548640" y="6473952"/>
+            <a:ext cx="7772400" cy="274320"/>
+          </a:xfrm>
+          <a:prstGeom prst="rect">
+            <a:avLst/>
+          </a:prstGeom>
+          <a:noFill/>
+        </p:spPr>
+        <p:txBody>
+          <a:bodyPr wrap="square" anchor="t" lIns="36576" rIns="36576" tIns="18288" bIns="18288">
+            <a:spAutoFit/>
+          </a:bodyPr>
+          <a:lstStyle/>
+          <a:p>
+            <a:pPr algn="l">
+              <a:lnSpc>
+                <a:spcPct val="115000"/>
+              </a:lnSpc>
+              <a:spcAft>
+                <a:spcPts val="400"/>
+              </a:spcAft>
+            </a:pPr>
+            <a:r>
+              <a:rPr sz="900" b="0">
+                <a:solidFill>
+                  <a:srgbClr val="7A7977"/>
+                </a:solidFill>
+                <a:latin typeface="Calibri"/>
+                <a:ea typeface="Microsoft JhengHei"/>
+                <a:cs typeface="Microsoft JhengHei"/>
+              </a:rPr>
+              <a:t>國立臺灣科技大學（NTUST） · 自主移動機器人實驗室</a:t>
+            </a:r>
+          </a:p>
+        </p:txBody>
+      </p:sp>
+      <p:sp>
+        <p:nvSpPr>
+          <p:cNvPr id="9" name="TextBox 8"/>
+          <p:cNvSpPr txBox="1"/>
+          <p:nvPr/>
+        </p:nvSpPr>
+        <p:spPr>
+          <a:xfrm>
+            <a:off x="11183112" y="6473952"/>
+            <a:ext cx="457200" cy="274320"/>
+          </a:xfrm>
+          <a:prstGeom prst="rect">
+            <a:avLst/>
+          </a:prstGeom>
+          <a:noFill/>
+        </p:spPr>
+        <p:txBody>
+          <a:bodyPr wrap="square" anchor="t" lIns="36576" rIns="36576" tIns="18288" bIns="18288">
+            <a:spAutoFit/>
+          </a:bodyPr>
+          <a:lstStyle/>
+          <a:p>
+            <a:pPr algn="r">
+              <a:lnSpc>
+                <a:spcPct val="115000"/>
+              </a:lnSpc>
+              <a:spcAft>
+                <a:spcPts val="400"/>
+              </a:spcAft>
+            </a:pPr>
+            <a:r>
+              <a:rPr sz="900" b="0">
+                <a:solidFill>
+                  <a:srgbClr val="7A7977"/>
+                </a:solidFill>
+                <a:latin typeface="Calibri"/>
+                <a:ea typeface="Microsoft JhengHei"/>
+                <a:cs typeface="Microsoft JhengHei"/>
+              </a:rPr>
+              <a:t>13</a:t>
             </a:r>
           </a:p>
         </p:txBody>
@@ -11464,7 +12580,7 @@
                 <a:ea typeface="Microsoft JhengHei"/>
                 <a:cs typeface="Microsoft JhengHei"/>
               </a:rPr>
-              <a:t>外觀、尺寸、質量都沿用 Yahboom 官方模型，只修正無法模擬的地方</a:t>
+              <a:t>外觀、尺寸沿用 Yahboom 官方模型；重量改成實機秤重，並修正無法模擬的地方</a:t>
             </a:r>
           </a:p>
         </p:txBody>
@@ -11620,7 +12736,7 @@
                 <a:ea typeface="Microsoft JhengHei"/>
                 <a:cs typeface="Microsoft JhengHei"/>
               </a:rPr>
-              <a:t>官方模型（站立姿勢）</a:t>
+              <a:t>官方模型（站立姿勢，圖中 LiDAR 在官方位置）</a:t>
             </a:r>
           </a:p>
         </p:txBody>
@@ -11819,7 +12935,7 @@
                           <a:ea typeface="Microsoft JhengHei"/>
                           <a:cs typeface="Microsoft JhengHei"/>
                         </a:rPr>
-                        <a:t>左右重量對稱</a:t>
+                        <a:t>重量</a:t>
                       </a:r>
                     </a:p>
                   </a:txBody>
@@ -11844,7 +12960,7 @@
                           <a:ea typeface="Microsoft JhengHei"/>
                           <a:cs typeface="Microsoft JhengHei"/>
                         </a:rPr>
-                        <a:t>官方右側髖部只有左側一半重，左轉時機身傾斜 30°</a:t>
+                        <a:t>總重改為實機 875 g + LiDAR 45 g；右髖補成與左側同重</a:t>
                       </a:r>
                     </a:p>
                   </a:txBody>
@@ -12225,7 +13341,7 @@
                 <a:ea typeface="Microsoft JhengHei"/>
                 <a:cs typeface="Microsoft JhengHei"/>
               </a:rPr>
-              <a:t>主任務成果</a:t>
+              <a:t>LiDAR 安裝位置：比官方位置往後 4 cm</a:t>
             </a:r>
           </a:p>
         </p:txBody>
@@ -12304,7 +13420,7 @@
                 <a:ea typeface="Microsoft JhengHei"/>
                 <a:cs typeface="Microsoft JhengHei"/>
               </a:rPr>
-              <a:t>在投影片的障礙物場景中，機器狗自己繞過障礙物走到右上角目標</a:t>
+              <a:t>在模擬中把 LiDAR 放在 8 個前後位置各走一遍，選出對行走影響最小的位置</a:t>
             </a:r>
           </a:p>
         </p:txBody>
@@ -12399,22 +13515,22 @@
       </p:sp>
       <p:pic>
         <p:nvPicPr>
-          <p:cNvPr id="10" name="Picture 9" descr="trajectory.png"/>
+          <p:cNvPr id="10" name="Picture 9" descr="robot.png"/>
           <p:cNvPicPr>
             <a:picLocks noChangeAspect="1"/>
           </p:cNvPicPr>
           <p:nvPr/>
         </p:nvPicPr>
         <p:blipFill>
-          <a:blip r:embed="rId3"/>
+          <a:blip r:embed="rId2"/>
           <a:stretch>
             <a:fillRect/>
           </a:stretch>
         </p:blipFill>
         <p:spPr>
           <a:xfrm>
-            <a:off x="548640" y="2148840"/>
-            <a:ext cx="6543040" cy="4206240"/>
+            <a:off x="548640" y="2240280"/>
+            <a:ext cx="4343400" cy="3487881"/>
           </a:xfrm>
           <a:prstGeom prst="rect">
             <a:avLst/>
@@ -12423,44 +13539,14 @@
       </p:pic>
       <p:sp>
         <p:nvSpPr>
-          <p:cNvPr id="11" name="Rectangle 10"/>
-          <p:cNvSpPr/>
-          <p:nvPr/>
-        </p:nvSpPr>
-        <p:spPr>
-          <a:xfrm>
-            <a:off x="7635240" y="2331720"/>
-            <a:ext cx="4005072" cy="1051560"/>
-          </a:xfrm>
-          <a:prstGeom prst="rect">
-            <a:avLst/>
-          </a:prstGeom>
-          <a:solidFill>
-            <a:srgbClr val="EEF3F9"/>
-          </a:solidFill>
-          <a:ln>
-            <a:noFill/>
-          </a:ln>
-          <a:effectLst/>
-        </p:spPr>
-        <p:txBody>
-          <a:bodyPr rtlCol="0" anchor="ctr"/>
-          <a:lstStyle/>
-          <a:p>
-            <a:pPr algn="ctr"/>
-          </a:p>
-        </p:txBody>
-      </p:sp>
-      <p:sp>
-        <p:nvSpPr>
-          <p:cNvPr id="12" name="TextBox 11"/>
+          <p:cNvPr id="11" name="TextBox 10"/>
           <p:cNvSpPr txBox="1"/>
           <p:nvPr/>
         </p:nvSpPr>
         <p:spPr>
           <a:xfrm>
-            <a:off x="7818119" y="2404872"/>
-            <a:ext cx="3657600" cy="640080"/>
+            <a:off x="548640" y="5852160"/>
+            <a:ext cx="4206240" cy="274320"/>
           </a:xfrm>
           <a:prstGeom prst="rect">
             <a:avLst/>
@@ -12468,7 +13554,51 @@
           <a:noFill/>
         </p:spPr>
         <p:txBody>
-          <a:bodyPr wrap="square" anchor="ctr" lIns="36576" rIns="36576" tIns="18288" bIns="18288">
+          <a:bodyPr wrap="square" anchor="t" lIns="36576" rIns="36576" tIns="18288" bIns="18288">
+            <a:spAutoFit/>
+          </a:bodyPr>
+          <a:lstStyle/>
+          <a:p>
+            <a:pPr algn="ctr">
+              <a:lnSpc>
+                <a:spcPct val="115000"/>
+              </a:lnSpc>
+              <a:spcAft>
+                <a:spcPts val="400"/>
+              </a:spcAft>
+            </a:pPr>
+            <a:r>
+              <a:rPr sz="1000" b="0">
+                <a:solidFill>
+                  <a:srgbClr val="7A7977"/>
+                </a:solidFill>
+                <a:latin typeface="Calibri"/>
+                <a:ea typeface="Microsoft JhengHei"/>
+                <a:cs typeface="Microsoft JhengHei"/>
+              </a:rPr>
+              <a:t>側視示意圖（右邊是機頭），圓點是測試過的 LiDAR 位置</a:t>
+            </a:r>
+          </a:p>
+        </p:txBody>
+      </p:sp>
+      <p:sp>
+        <p:nvSpPr>
+          <p:cNvPr id="13" name="TextBox 12"/>
+          <p:cNvSpPr txBox="1"/>
+          <p:nvPr/>
+        </p:nvSpPr>
+        <p:spPr>
+          <a:xfrm>
+            <a:off x="5029200" y="5230368"/>
+            <a:ext cx="6611112" cy="1005840"/>
+          </a:xfrm>
+          <a:prstGeom prst="rect">
+            <a:avLst/>
+          </a:prstGeom>
+          <a:noFill/>
+        </p:spPr>
+        <p:txBody>
+          <a:bodyPr wrap="square" anchor="t" lIns="36576" rIns="36576" tIns="18288" bIns="18288">
             <a:spAutoFit/>
           </a:bodyPr>
           <a:lstStyle/>
@@ -12482,376 +13612,831 @@
               </a:spcAft>
             </a:pPr>
             <a:r>
-              <a:rPr sz="3400" b="1">
-                <a:solidFill>
-                  <a:srgbClr val="00549D"/>
+              <a:rPr sz="1200" b="0">
+                <a:solidFill>
+                  <a:srgbClr val="403F3D"/>
                 </a:solidFill>
                 <a:latin typeface="Calibri"/>
                 <a:ea typeface="Microsoft JhengHei"/>
                 <a:cs typeface="Microsoft JhengHei"/>
               </a:rPr>
-              <a:t>7</a:t>
-            </a:r>
-            <a:r>
-              <a:rPr sz="1600" b="1">
-                <a:solidFill>
-                  <a:srgbClr val="00549D"/>
-                </a:solidFill>
-                <a:latin typeface="Calibri"/>
-                <a:ea typeface="Microsoft JhengHei"/>
-                <a:cs typeface="Microsoft JhengHei"/>
-              </a:rPr>
-              <a:t>  cm</a:t>
-            </a:r>
-          </a:p>
-        </p:txBody>
-      </p:sp>
-      <p:sp>
-        <p:nvSpPr>
-          <p:cNvPr id="13" name="TextBox 12"/>
-          <p:cNvSpPr txBox="1"/>
-          <p:nvPr/>
-        </p:nvSpPr>
-        <p:spPr>
-          <a:xfrm>
-            <a:off x="7818119" y="2990087"/>
-            <a:ext cx="3657600" cy="320040"/>
-          </a:xfrm>
-          <a:prstGeom prst="rect">
-            <a:avLst/>
-          </a:prstGeom>
-          <a:noFill/>
-        </p:spPr>
-        <p:txBody>
-          <a:bodyPr wrap="square" anchor="t" lIns="36576" rIns="36576" tIns="18288" bIns="18288">
-            <a:spAutoFit/>
-          </a:bodyPr>
-          <a:lstStyle/>
-          <a:p>
-            <a:pPr algn="l">
-              <a:lnSpc>
-                <a:spcPct val="115000"/>
-              </a:lnSpc>
-              <a:spcAft>
-                <a:spcPts val="400"/>
-              </a:spcAft>
-            </a:pPr>
-            <a:r>
-              <a:rPr sz="1200" b="0">
-                <a:solidFill>
-                  <a:srgbClr val="403F3D"/>
-                </a:solidFill>
-                <a:latin typeface="Calibri"/>
-                <a:ea typeface="Microsoft JhengHei"/>
-                <a:cs typeface="Microsoft JhengHei"/>
-              </a:rPr>
-              <a:t>最終位置誤差</a:t>
-            </a:r>
-          </a:p>
-        </p:txBody>
-      </p:sp>
-      <p:sp>
-        <p:nvSpPr>
-          <p:cNvPr id="14" name="Rectangle 13"/>
-          <p:cNvSpPr/>
-          <p:nvPr/>
-        </p:nvSpPr>
-        <p:spPr>
-          <a:xfrm>
-            <a:off x="7635240" y="3538728"/>
-            <a:ext cx="4005072" cy="1051560"/>
-          </a:xfrm>
-          <a:prstGeom prst="rect">
-            <a:avLst/>
-          </a:prstGeom>
-          <a:solidFill>
-            <a:srgbClr val="EEF3F9"/>
-          </a:solidFill>
-          <a:ln>
-            <a:noFill/>
-          </a:ln>
-          <a:effectLst/>
-        </p:spPr>
-        <p:txBody>
-          <a:bodyPr rtlCol="0" anchor="ctr"/>
-          <a:lstStyle/>
-          <a:p>
-            <a:pPr algn="ctr"/>
-          </a:p>
-        </p:txBody>
-      </p:sp>
-      <p:sp>
-        <p:nvSpPr>
-          <p:cNvPr id="15" name="TextBox 14"/>
-          <p:cNvSpPr txBox="1"/>
-          <p:nvPr/>
-        </p:nvSpPr>
-        <p:spPr>
-          <a:xfrm>
-            <a:off x="7818119" y="3611880"/>
-            <a:ext cx="3657600" cy="640080"/>
-          </a:xfrm>
-          <a:prstGeom prst="rect">
-            <a:avLst/>
-          </a:prstGeom>
-          <a:noFill/>
-        </p:spPr>
-        <p:txBody>
-          <a:bodyPr wrap="square" anchor="ctr" lIns="36576" rIns="36576" tIns="18288" bIns="18288">
-            <a:spAutoFit/>
-          </a:bodyPr>
-          <a:lstStyle/>
-          <a:p>
-            <a:pPr algn="l">
-              <a:lnSpc>
-                <a:spcPct val="115000"/>
-              </a:lnSpc>
-              <a:spcAft>
-                <a:spcPts val="400"/>
-              </a:spcAft>
-            </a:pPr>
-            <a:r>
-              <a:rPr sz="3400" b="1">
-                <a:solidFill>
-                  <a:srgbClr val="00549D"/>
-                </a:solidFill>
-                <a:latin typeface="Calibri"/>
-                <a:ea typeface="Microsoft JhengHei"/>
-                <a:cs typeface="Microsoft JhengHei"/>
-              </a:rPr>
-              <a:t>143</a:t>
-            </a:r>
-            <a:r>
-              <a:rPr sz="1600" b="1">
-                <a:solidFill>
-                  <a:srgbClr val="00549D"/>
-                </a:solidFill>
-                <a:latin typeface="Calibri"/>
-                <a:ea typeface="Microsoft JhengHei"/>
-                <a:cs typeface="Microsoft JhengHei"/>
-              </a:rPr>
-              <a:t>  s</a:t>
-            </a:r>
-          </a:p>
-        </p:txBody>
-      </p:sp>
-      <p:sp>
-        <p:nvSpPr>
-          <p:cNvPr id="16" name="TextBox 15"/>
-          <p:cNvSpPr txBox="1"/>
-          <p:nvPr/>
-        </p:nvSpPr>
-        <p:spPr>
-          <a:xfrm>
-            <a:off x="7818119" y="4197096"/>
-            <a:ext cx="3657600" cy="320040"/>
-          </a:xfrm>
-          <a:prstGeom prst="rect">
-            <a:avLst/>
-          </a:prstGeom>
-          <a:noFill/>
-        </p:spPr>
-        <p:txBody>
-          <a:bodyPr wrap="square" anchor="t" lIns="36576" rIns="36576" tIns="18288" bIns="18288">
-            <a:spAutoFit/>
-          </a:bodyPr>
-          <a:lstStyle/>
-          <a:p>
-            <a:pPr algn="l">
-              <a:lnSpc>
-                <a:spcPct val="115000"/>
-              </a:lnSpc>
-              <a:spcAft>
-                <a:spcPts val="400"/>
-              </a:spcAft>
-            </a:pPr>
-            <a:r>
-              <a:rPr sz="1200" b="0">
-                <a:solidFill>
-                  <a:srgbClr val="403F3D"/>
-                </a:solidFill>
-                <a:latin typeface="Calibri"/>
-                <a:ea typeface="Microsoft JhengHei"/>
-                <a:cs typeface="Microsoft JhengHei"/>
-              </a:rPr>
-              <a:t>到達時間</a:t>
-            </a:r>
-          </a:p>
-        </p:txBody>
-      </p:sp>
-      <p:sp>
-        <p:nvSpPr>
-          <p:cNvPr id="17" name="Rectangle 16"/>
-          <p:cNvSpPr/>
-          <p:nvPr/>
-        </p:nvSpPr>
-        <p:spPr>
-          <a:xfrm>
-            <a:off x="7635240" y="4745736"/>
-            <a:ext cx="4005072" cy="1051560"/>
-          </a:xfrm>
-          <a:prstGeom prst="rect">
-            <a:avLst/>
-          </a:prstGeom>
-          <a:solidFill>
-            <a:srgbClr val="EEF3F9"/>
-          </a:solidFill>
-          <a:ln>
-            <a:noFill/>
-          </a:ln>
-          <a:effectLst/>
-        </p:spPr>
-        <p:txBody>
-          <a:bodyPr rtlCol="0" anchor="ctr"/>
-          <a:lstStyle/>
-          <a:p>
-            <a:pPr algn="ctr"/>
-          </a:p>
-        </p:txBody>
-      </p:sp>
-      <p:sp>
-        <p:nvSpPr>
-          <p:cNvPr id="18" name="TextBox 17"/>
-          <p:cNvSpPr txBox="1"/>
-          <p:nvPr/>
-        </p:nvSpPr>
-        <p:spPr>
-          <a:xfrm>
-            <a:off x="7818119" y="4818888"/>
-            <a:ext cx="3657600" cy="640080"/>
-          </a:xfrm>
-          <a:prstGeom prst="rect">
-            <a:avLst/>
-          </a:prstGeom>
-          <a:noFill/>
-        </p:spPr>
-        <p:txBody>
-          <a:bodyPr wrap="square" anchor="ctr" lIns="36576" rIns="36576" tIns="18288" bIns="18288">
-            <a:spAutoFit/>
-          </a:bodyPr>
-          <a:lstStyle/>
-          <a:p>
-            <a:pPr algn="l">
-              <a:lnSpc>
-                <a:spcPct val="115000"/>
-              </a:lnSpc>
-              <a:spcAft>
-                <a:spcPts val="400"/>
-              </a:spcAft>
-            </a:pPr>
-            <a:r>
-              <a:rPr sz="3400" b="1">
-                <a:solidFill>
-                  <a:srgbClr val="00549D"/>
-                </a:solidFill>
-                <a:latin typeface="Calibri"/>
-                <a:ea typeface="Microsoft JhengHei"/>
-                <a:cs typeface="Microsoft JhengHei"/>
-              </a:rPr>
-              <a:t>14.4</a:t>
-            </a:r>
-            <a:r>
-              <a:rPr sz="1600" b="1">
-                <a:solidFill>
-                  <a:srgbClr val="00549D"/>
-                </a:solidFill>
-                <a:latin typeface="Calibri"/>
-                <a:ea typeface="Microsoft JhengHei"/>
-                <a:cs typeface="Microsoft JhengHei"/>
-              </a:rPr>
-              <a:t>  m</a:t>
-            </a:r>
-          </a:p>
-        </p:txBody>
-      </p:sp>
-      <p:sp>
-        <p:nvSpPr>
-          <p:cNvPr id="19" name="TextBox 18"/>
-          <p:cNvSpPr txBox="1"/>
-          <p:nvPr/>
-        </p:nvSpPr>
-        <p:spPr>
-          <a:xfrm>
-            <a:off x="7818119" y="5404103"/>
-            <a:ext cx="3657600" cy="320040"/>
-          </a:xfrm>
-          <a:prstGeom prst="rect">
-            <a:avLst/>
-          </a:prstGeom>
-          <a:noFill/>
-        </p:spPr>
-        <p:txBody>
-          <a:bodyPr wrap="square" anchor="t" lIns="36576" rIns="36576" tIns="18288" bIns="18288">
-            <a:spAutoFit/>
-          </a:bodyPr>
-          <a:lstStyle/>
-          <a:p>
-            <a:pPr algn="l">
-              <a:lnSpc>
-                <a:spcPct val="115000"/>
-              </a:lnSpc>
-              <a:spcAft>
-                <a:spcPts val="400"/>
-              </a:spcAft>
-            </a:pPr>
-            <a:r>
-              <a:rPr sz="1200" b="0">
-                <a:solidFill>
-                  <a:srgbClr val="403F3D"/>
-                </a:solidFill>
-                <a:latin typeface="Calibri"/>
-                <a:ea typeface="Microsoft JhengHei"/>
-                <a:cs typeface="Microsoft JhengHei"/>
-              </a:rPr>
-              <a:t>實際走過的路徑</a:t>
-            </a:r>
-          </a:p>
-        </p:txBody>
-      </p:sp>
-      <p:sp>
-        <p:nvSpPr>
-          <p:cNvPr id="20" name="TextBox 19"/>
-          <p:cNvSpPr txBox="1"/>
-          <p:nvPr/>
-        </p:nvSpPr>
-        <p:spPr>
-          <a:xfrm>
-            <a:off x="7635240" y="5943600"/>
-            <a:ext cx="4005072" cy="411480"/>
-          </a:xfrm>
-          <a:prstGeom prst="rect">
-            <a:avLst/>
-          </a:prstGeom>
-          <a:noFill/>
-        </p:spPr>
-        <p:txBody>
-          <a:bodyPr wrap="square" anchor="t" lIns="36576" rIns="36576" tIns="18288" bIns="18288">
-            <a:spAutoFit/>
-          </a:bodyPr>
-          <a:lstStyle/>
-          <a:p>
-            <a:pPr algn="l">
-              <a:lnSpc>
-                <a:spcPct val="115000"/>
-              </a:lnSpc>
-              <a:spcAft>
-                <a:spcPts val="400"/>
-              </a:spcAft>
-            </a:pPr>
-            <a:r>
-              <a:rPr sz="1000" b="0">
-                <a:solidFill>
-                  <a:srgbClr val="7A7977"/>
-                </a:solidFill>
-                <a:latin typeface="Calibri"/>
-                <a:ea typeface="Microsoft JhengHei"/>
-                <a:cs typeface="Microsoft JhengHei"/>
-              </a:rPr>
-              <a:t>使用 Nav2 RPP 控制器；模擬器記錄的真實位置</a:t>
-            </a:r>
-          </a:p>
-        </p:txBody>
-      </p:sp>
+              <a:t>晃動為機身傾斜的 RMS；每個位置重啟模擬量 2–6 次。各位置的靜態質心只差約 6 mm，解釋不了這個差異，位置是實測選出來的。採用位置在機身後段較低的平台上方，實機需要約 32 mm 高的支架。</a:t>
+            </a:r>
+          </a:p>
+        </p:txBody>
+      </p:sp>
+      <p:graphicFrame>
+        <p:nvGraphicFramePr>
+          <p:cNvPr id="14" name="Table 11"/>
+          <p:cNvGraphicFramePr>
+            <a:graphicFrameLocks noGrp="1"/>
+          </p:cNvGraphicFramePr>
+          <p:nvPr/>
+        </p:nvGraphicFramePr>
+        <p:xfrm>
+          <a:off x="5029200" y="2286000"/>
+          <a:ext cx="6611111" cy="2779776"/>
+        </p:xfrm>
+        <a:graphic>
+          <a:graphicData uri="http://schemas.openxmlformats.org/drawingml/2006/table">
+            <a:tbl>
+              <a:tblPr firstRow="1" bandRow="1">
+                <a:tableStyleId>{5940675A-B579-460E-94D1-54222C63F5DA}</a:tableStyleId>
+              </a:tblPr>
+              <a:tblGrid>
+                <a:gridCol w="2194560"/>
+                <a:gridCol w="1874519"/>
+                <a:gridCol w="822960"/>
+                <a:gridCol w="1719072"/>
+              </a:tblGrid>
+              <a:tr h="347472">
+                <a:tc>
+                  <a:txBody>
+                    <a:bodyPr/>
+                    <a:lstStyle/>
+                    <a:p>
+                      <a:r>
+                        <a:rPr sz="1200" b="1">
+                          <a:solidFill>
+                            <a:srgbClr val="FFFFFF"/>
+                          </a:solidFill>
+                          <a:latin typeface="Calibri"/>
+                          <a:ea typeface="Microsoft JhengHei"/>
+                          <a:cs typeface="Microsoft JhengHei"/>
+                        </a:rPr>
+                        <a:t>LiDAR 前後位置</a:t>
+                      </a:r>
+                    </a:p>
+                  </a:txBody>
+                  <a:tcPr marL="73152" marR="73152" marT="36576" marB="36576" anchor="ctr">
+                    <a:solidFill>
+                      <a:srgbClr val="00549D"/>
+                    </a:solidFill>
+                  </a:tcPr>
+                </a:tc>
+                <a:tc>
+                  <a:txBody>
+                    <a:bodyPr/>
+                    <a:lstStyle/>
+                    <a:p>
+                      <a:r>
+                        <a:rPr sz="1200" b="1">
+                          <a:solidFill>
+                            <a:srgbClr val="FFFFFF"/>
+                          </a:solidFill>
+                          <a:latin typeface="Calibri"/>
+                          <a:ea typeface="Microsoft JhengHei"/>
+                          <a:cs typeface="Microsoft JhengHei"/>
+                        </a:rPr>
+                        <a:t>前進晃動</a:t>
+                      </a:r>
+                    </a:p>
+                  </a:txBody>
+                  <a:tcPr marL="73152" marR="73152" marT="36576" marB="36576" anchor="ctr">
+                    <a:solidFill>
+                      <a:srgbClr val="00549D"/>
+                    </a:solidFill>
+                  </a:tcPr>
+                </a:tc>
+                <a:tc>
+                  <a:txBody>
+                    <a:bodyPr/>
+                    <a:lstStyle/>
+                    <a:p>
+                      <a:r>
+                        <a:rPr sz="1200" b="1">
+                          <a:solidFill>
+                            <a:srgbClr val="FFFFFF"/>
+                          </a:solidFill>
+                          <a:latin typeface="Calibri"/>
+                          <a:ea typeface="Microsoft JhengHei"/>
+                          <a:cs typeface="Microsoft JhengHei"/>
+                        </a:rPr>
+                        <a:t>最大傾斜</a:t>
+                      </a:r>
+                    </a:p>
+                  </a:txBody>
+                  <a:tcPr marL="73152" marR="73152" marT="36576" marB="36576" anchor="ctr">
+                    <a:solidFill>
+                      <a:srgbClr val="00549D"/>
+                    </a:solidFill>
+                  </a:tcPr>
+                </a:tc>
+                <a:tc>
+                  <a:txBody>
+                    <a:bodyPr/>
+                    <a:lstStyle/>
+                    <a:p>
+                      <a:r>
+                        <a:rPr sz="1200" b="1">
+                          <a:solidFill>
+                            <a:srgbClr val="FFFFFF"/>
+                          </a:solidFill>
+                          <a:latin typeface="Calibri"/>
+                          <a:ea typeface="Microsoft JhengHei"/>
+                          <a:cs typeface="Microsoft JhengHei"/>
+                        </a:rPr>
+                        <a:t>結果</a:t>
+                      </a:r>
+                    </a:p>
+                  </a:txBody>
+                  <a:tcPr marL="73152" marR="73152" marT="36576" marB="36576" anchor="ctr">
+                    <a:solidFill>
+                      <a:srgbClr val="00549D"/>
+                    </a:solidFill>
+                  </a:tcPr>
+                </a:tc>
+              </a:tr>
+              <a:tr h="347472">
+                <a:tc>
+                  <a:txBody>
+                    <a:bodyPr/>
+                    <a:lstStyle/>
+                    <a:p>
+                      <a:r>
+                        <a:rPr sz="1200" b="0">
+                          <a:solidFill>
+                            <a:srgbClr val="0B0B0B"/>
+                          </a:solidFill>
+                          <a:latin typeface="Calibri"/>
+                          <a:ea typeface="Microsoft JhengHei"/>
+                          <a:cs typeface="Microsoft JhengHei"/>
+                        </a:rPr>
+                        <a:t>往前 30 mm</a:t>
+                      </a:r>
+                    </a:p>
+                  </a:txBody>
+                  <a:tcPr marL="73152" marR="73152" marT="36576" marB="36576" anchor="ctr">
+                    <a:solidFill>
+                      <a:srgbClr val="FFFFFF"/>
+                    </a:solidFill>
+                  </a:tcPr>
+                </a:tc>
+                <a:tc>
+                  <a:txBody>
+                    <a:bodyPr/>
+                    <a:lstStyle/>
+                    <a:p>
+                      <a:r>
+                        <a:rPr sz="1200" b="0">
+                          <a:solidFill>
+                            <a:srgbClr val="0B0B0B"/>
+                          </a:solidFill>
+                          <a:latin typeface="Calibri"/>
+                          <a:ea typeface="Microsoft JhengHei"/>
+                          <a:cs typeface="Microsoft JhengHei"/>
+                        </a:rPr>
+                        <a:t>—</a:t>
+                      </a:r>
+                    </a:p>
+                  </a:txBody>
+                  <a:tcPr marL="73152" marR="73152" marT="36576" marB="36576" anchor="ctr">
+                    <a:solidFill>
+                      <a:srgbClr val="FFFFFF"/>
+                    </a:solidFill>
+                  </a:tcPr>
+                </a:tc>
+                <a:tc>
+                  <a:txBody>
+                    <a:bodyPr/>
+                    <a:lstStyle/>
+                    <a:p>
+                      <a:r>
+                        <a:rPr sz="1200" b="0">
+                          <a:solidFill>
+                            <a:srgbClr val="0B0B0B"/>
+                          </a:solidFill>
+                          <a:latin typeface="Calibri"/>
+                          <a:ea typeface="Microsoft JhengHei"/>
+                          <a:cs typeface="Microsoft JhengHei"/>
+                        </a:rPr>
+                        <a:t>166°</a:t>
+                      </a:r>
+                    </a:p>
+                  </a:txBody>
+                  <a:tcPr marL="73152" marR="73152" marT="36576" marB="36576" anchor="ctr">
+                    <a:solidFill>
+                      <a:srgbClr val="FFFFFF"/>
+                    </a:solidFill>
+                  </a:tcPr>
+                </a:tc>
+                <a:tc>
+                  <a:txBody>
+                    <a:bodyPr/>
+                    <a:lstStyle/>
+                    <a:p>
+                      <a:r>
+                        <a:rPr sz="1200" b="0">
+                          <a:solidFill>
+                            <a:srgbClr val="C0392B"/>
+                          </a:solidFill>
+                          <a:latin typeface="Calibri"/>
+                          <a:ea typeface="Microsoft JhengHei"/>
+                          <a:cs typeface="Microsoft JhengHei"/>
+                        </a:rPr>
+                        <a:t>一走就翻倒</a:t>
+                      </a:r>
+                    </a:p>
+                  </a:txBody>
+                  <a:tcPr marL="73152" marR="73152" marT="36576" marB="36576" anchor="ctr">
+                    <a:solidFill>
+                      <a:srgbClr val="FFFFFF"/>
+                    </a:solidFill>
+                  </a:tcPr>
+                </a:tc>
+              </a:tr>
+              <a:tr h="347472">
+                <a:tc>
+                  <a:txBody>
+                    <a:bodyPr/>
+                    <a:lstStyle/>
+                    <a:p>
+                      <a:r>
+                        <a:rPr sz="1200" b="0">
+                          <a:solidFill>
+                            <a:srgbClr val="0B0B0B"/>
+                          </a:solidFill>
+                          <a:latin typeface="Calibri"/>
+                          <a:ea typeface="Microsoft JhengHei"/>
+                          <a:cs typeface="Microsoft JhengHei"/>
+                        </a:rPr>
+                        <a:t>往前 4 mm</a:t>
+                      </a:r>
+                    </a:p>
+                  </a:txBody>
+                  <a:tcPr marL="73152" marR="73152" marT="36576" marB="36576" anchor="ctr">
+                    <a:solidFill>
+                      <a:srgbClr val="F4F4F2"/>
+                    </a:solidFill>
+                  </a:tcPr>
+                </a:tc>
+                <a:tc>
+                  <a:txBody>
+                    <a:bodyPr/>
+                    <a:lstStyle/>
+                    <a:p>
+                      <a:r>
+                        <a:rPr sz="1200" b="0">
+                          <a:solidFill>
+                            <a:srgbClr val="0B0B0B"/>
+                          </a:solidFill>
+                          <a:latin typeface="Calibri"/>
+                          <a:ea typeface="Microsoft JhengHei"/>
+                          <a:cs typeface="Microsoft JhengHei"/>
+                        </a:rPr>
+                        <a:t>3.1°，一次 19.7°</a:t>
+                      </a:r>
+                    </a:p>
+                  </a:txBody>
+                  <a:tcPr marL="73152" marR="73152" marT="36576" marB="36576" anchor="ctr">
+                    <a:solidFill>
+                      <a:srgbClr val="F4F4F2"/>
+                    </a:solidFill>
+                  </a:tcPr>
+                </a:tc>
+                <a:tc>
+                  <a:txBody>
+                    <a:bodyPr/>
+                    <a:lstStyle/>
+                    <a:p>
+                      <a:r>
+                        <a:rPr sz="1200" b="0">
+                          <a:solidFill>
+                            <a:srgbClr val="0B0B0B"/>
+                          </a:solidFill>
+                          <a:latin typeface="Calibri"/>
+                          <a:ea typeface="Microsoft JhengHei"/>
+                          <a:cs typeface="Microsoft JhengHei"/>
+                        </a:rPr>
+                        <a:t>67°</a:t>
+                      </a:r>
+                    </a:p>
+                  </a:txBody>
+                  <a:tcPr marL="73152" marR="73152" marT="36576" marB="36576" anchor="ctr">
+                    <a:solidFill>
+                      <a:srgbClr val="F4F4F2"/>
+                    </a:solidFill>
+                  </a:tcPr>
+                </a:tc>
+                <a:tc>
+                  <a:txBody>
+                    <a:bodyPr/>
+                    <a:lstStyle/>
+                    <a:p>
+                      <a:r>
+                        <a:rPr sz="1200" b="0">
+                          <a:solidFill>
+                            <a:srgbClr val="C0392B"/>
+                          </a:solidFill>
+                          <a:latin typeface="Calibri"/>
+                          <a:ea typeface="Microsoft JhengHei"/>
+                          <a:cs typeface="Microsoft JhengHei"/>
+                        </a:rPr>
+                        <a:t>第二次量測時翻倒</a:t>
+                      </a:r>
+                    </a:p>
+                  </a:txBody>
+                  <a:tcPr marL="73152" marR="73152" marT="36576" marB="36576" anchor="ctr">
+                    <a:solidFill>
+                      <a:srgbClr val="F4F4F2"/>
+                    </a:solidFill>
+                  </a:tcPr>
+                </a:tc>
+              </a:tr>
+              <a:tr h="347472">
+                <a:tc>
+                  <a:txBody>
+                    <a:bodyPr/>
+                    <a:lstStyle/>
+                    <a:p>
+                      <a:r>
+                        <a:rPr sz="1200" b="0">
+                          <a:solidFill>
+                            <a:srgbClr val="0B0B0B"/>
+                          </a:solidFill>
+                          <a:latin typeface="Calibri"/>
+                          <a:ea typeface="Microsoft JhengHei"/>
+                          <a:cs typeface="Microsoft JhengHei"/>
+                        </a:rPr>
+                        <a:t>官方位置（往後 17 mm）</a:t>
+                      </a:r>
+                    </a:p>
+                  </a:txBody>
+                  <a:tcPr marL="73152" marR="73152" marT="36576" marB="36576" anchor="ctr">
+                    <a:solidFill>
+                      <a:srgbClr val="FFFFFF"/>
+                    </a:solidFill>
+                  </a:tcPr>
+                </a:tc>
+                <a:tc>
+                  <a:txBody>
+                    <a:bodyPr/>
+                    <a:lstStyle/>
+                    <a:p>
+                      <a:r>
+                        <a:rPr sz="1200" b="0">
+                          <a:solidFill>
+                            <a:srgbClr val="0B0B0B"/>
+                          </a:solidFill>
+                          <a:latin typeface="Calibri"/>
+                          <a:ea typeface="Microsoft JhengHei"/>
+                          <a:cs typeface="Microsoft JhengHei"/>
+                        </a:rPr>
+                        <a:t>2.5–3.1°，一次 10.0°</a:t>
+                      </a:r>
+                    </a:p>
+                  </a:txBody>
+                  <a:tcPr marL="73152" marR="73152" marT="36576" marB="36576" anchor="ctr">
+                    <a:solidFill>
+                      <a:srgbClr val="FFFFFF"/>
+                    </a:solidFill>
+                  </a:tcPr>
+                </a:tc>
+                <a:tc>
+                  <a:txBody>
+                    <a:bodyPr/>
+                    <a:lstStyle/>
+                    <a:p>
+                      <a:r>
+                        <a:rPr sz="1200" b="0">
+                          <a:solidFill>
+                            <a:srgbClr val="0B0B0B"/>
+                          </a:solidFill>
+                          <a:latin typeface="Calibri"/>
+                          <a:ea typeface="Microsoft JhengHei"/>
+                          <a:cs typeface="Microsoft JhengHei"/>
+                        </a:rPr>
+                        <a:t>28°</a:t>
+                      </a:r>
+                    </a:p>
+                  </a:txBody>
+                  <a:tcPr marL="73152" marR="73152" marT="36576" marB="36576" anchor="ctr">
+                    <a:solidFill>
+                      <a:srgbClr val="FFFFFF"/>
+                    </a:solidFill>
+                  </a:tcPr>
+                </a:tc>
+                <a:tc>
+                  <a:txBody>
+                    <a:bodyPr/>
+                    <a:lstStyle/>
+                    <a:p>
+                      <a:r>
+                        <a:rPr sz="1200" b="0">
+                          <a:solidFill>
+                            <a:srgbClr val="0B0B0B"/>
+                          </a:solidFill>
+                          <a:latin typeface="Calibri"/>
+                          <a:ea typeface="Microsoft JhengHei"/>
+                          <a:cs typeface="Microsoft JhengHei"/>
+                        </a:rPr>
+                        <a:t>4 次有 1 次大幅晃動</a:t>
+                      </a:r>
+                    </a:p>
+                  </a:txBody>
+                  <a:tcPr marL="73152" marR="73152" marT="36576" marB="36576" anchor="ctr">
+                    <a:solidFill>
+                      <a:srgbClr val="FFFFFF"/>
+                    </a:solidFill>
+                  </a:tcPr>
+                </a:tc>
+              </a:tr>
+              <a:tr h="347472">
+                <a:tc>
+                  <a:txBody>
+                    <a:bodyPr/>
+                    <a:lstStyle/>
+                    <a:p>
+                      <a:r>
+                        <a:rPr sz="1200" b="0">
+                          <a:solidFill>
+                            <a:srgbClr val="0B0B0B"/>
+                          </a:solidFill>
+                          <a:latin typeface="Calibri"/>
+                          <a:ea typeface="Microsoft JhengHei"/>
+                          <a:cs typeface="Microsoft JhengHei"/>
+                        </a:rPr>
+                        <a:t>往後 40 mm</a:t>
+                      </a:r>
+                    </a:p>
+                  </a:txBody>
+                  <a:tcPr marL="73152" marR="73152" marT="36576" marB="36576" anchor="ctr">
+                    <a:solidFill>
+                      <a:srgbClr val="F4F4F2"/>
+                    </a:solidFill>
+                  </a:tcPr>
+                </a:tc>
+                <a:tc>
+                  <a:txBody>
+                    <a:bodyPr/>
+                    <a:lstStyle/>
+                    <a:p>
+                      <a:r>
+                        <a:rPr sz="1200" b="0">
+                          <a:solidFill>
+                            <a:srgbClr val="0B0B0B"/>
+                          </a:solidFill>
+                          <a:latin typeface="Calibri"/>
+                          <a:ea typeface="Microsoft JhengHei"/>
+                          <a:cs typeface="Microsoft JhengHei"/>
+                        </a:rPr>
+                        <a:t>1.7–2.5°</a:t>
+                      </a:r>
+                    </a:p>
+                  </a:txBody>
+                  <a:tcPr marL="73152" marR="73152" marT="36576" marB="36576" anchor="ctr">
+                    <a:solidFill>
+                      <a:srgbClr val="F4F4F2"/>
+                    </a:solidFill>
+                  </a:tcPr>
+                </a:tc>
+                <a:tc>
+                  <a:txBody>
+                    <a:bodyPr/>
+                    <a:lstStyle/>
+                    <a:p>
+                      <a:r>
+                        <a:rPr sz="1200" b="0">
+                          <a:solidFill>
+                            <a:srgbClr val="0B0B0B"/>
+                          </a:solidFill>
+                          <a:latin typeface="Calibri"/>
+                          <a:ea typeface="Microsoft JhengHei"/>
+                          <a:cs typeface="Microsoft JhengHei"/>
+                        </a:rPr>
+                        <a:t>11°</a:t>
+                      </a:r>
+                    </a:p>
+                  </a:txBody>
+                  <a:tcPr marL="73152" marR="73152" marT="36576" marB="36576" anchor="ctr">
+                    <a:solidFill>
+                      <a:srgbClr val="F4F4F2"/>
+                    </a:solidFill>
+                  </a:tcPr>
+                </a:tc>
+                <a:tc>
+                  <a:txBody>
+                    <a:bodyPr/>
+                    <a:lstStyle/>
+                    <a:p>
+                      <a:r>
+                        <a:rPr sz="1200" b="0">
+                          <a:solidFill>
+                            <a:srgbClr val="0B0B0B"/>
+                          </a:solidFill>
+                          <a:latin typeface="Calibri"/>
+                          <a:ea typeface="Microsoft JhengHei"/>
+                          <a:cs typeface="Microsoft JhengHei"/>
+                        </a:rPr>
+                        <a:t>穩</a:t>
+                      </a:r>
+                    </a:p>
+                  </a:txBody>
+                  <a:tcPr marL="73152" marR="73152" marT="36576" marB="36576" anchor="ctr">
+                    <a:solidFill>
+                      <a:srgbClr val="F4F4F2"/>
+                    </a:solidFill>
+                  </a:tcPr>
+                </a:tc>
+              </a:tr>
+              <a:tr h="347472">
+                <a:tc>
+                  <a:txBody>
+                    <a:bodyPr/>
+                    <a:lstStyle/>
+                    <a:p>
+                      <a:r>
+                        <a:rPr sz="1200" b="1">
+                          <a:solidFill>
+                            <a:srgbClr val="00549D"/>
+                          </a:solidFill>
+                          <a:latin typeface="Calibri"/>
+                          <a:ea typeface="Microsoft JhengHei"/>
+                          <a:cs typeface="Microsoft JhengHei"/>
+                        </a:rPr>
+                        <a:t>往後 60 mm（採用）</a:t>
+                      </a:r>
+                    </a:p>
+                  </a:txBody>
+                  <a:tcPr marL="73152" marR="73152" marT="36576" marB="36576" anchor="ctr">
+                    <a:solidFill>
+                      <a:srgbClr val="E6EEF7"/>
+                    </a:solidFill>
+                  </a:tcPr>
+                </a:tc>
+                <a:tc>
+                  <a:txBody>
+                    <a:bodyPr/>
+                    <a:lstStyle/>
+                    <a:p>
+                      <a:r>
+                        <a:rPr sz="1200" b="1">
+                          <a:solidFill>
+                            <a:srgbClr val="00549D"/>
+                          </a:solidFill>
+                          <a:latin typeface="Calibri"/>
+                          <a:ea typeface="Microsoft JhengHei"/>
+                          <a:cs typeface="Microsoft JhengHei"/>
+                        </a:rPr>
+                        <a:t>2.2–2.8°</a:t>
+                      </a:r>
+                    </a:p>
+                  </a:txBody>
+                  <a:tcPr marL="73152" marR="73152" marT="36576" marB="36576" anchor="ctr">
+                    <a:solidFill>
+                      <a:srgbClr val="E6EEF7"/>
+                    </a:solidFill>
+                  </a:tcPr>
+                </a:tc>
+                <a:tc>
+                  <a:txBody>
+                    <a:bodyPr/>
+                    <a:lstStyle/>
+                    <a:p>
+                      <a:r>
+                        <a:rPr sz="1200" b="1">
+                          <a:solidFill>
+                            <a:srgbClr val="00549D"/>
+                          </a:solidFill>
+                          <a:latin typeface="Calibri"/>
+                          <a:ea typeface="Microsoft JhengHei"/>
+                          <a:cs typeface="Microsoft JhengHei"/>
+                        </a:rPr>
+                        <a:t>5.3°</a:t>
+                      </a:r>
+                    </a:p>
+                  </a:txBody>
+                  <a:tcPr marL="73152" marR="73152" marT="36576" marB="36576" anchor="ctr">
+                    <a:solidFill>
+                      <a:srgbClr val="E6EEF7"/>
+                    </a:solidFill>
+                  </a:tcPr>
+                </a:tc>
+                <a:tc>
+                  <a:txBody>
+                    <a:bodyPr/>
+                    <a:lstStyle/>
+                    <a:p>
+                      <a:r>
+                        <a:rPr sz="1200" b="1">
+                          <a:solidFill>
+                            <a:srgbClr val="00549D"/>
+                          </a:solidFill>
+                          <a:latin typeface="Calibri"/>
+                          <a:ea typeface="Microsoft JhengHei"/>
+                          <a:cs typeface="Microsoft JhengHei"/>
+                        </a:rPr>
+                        <a:t>穩，6 次都沒有異常</a:t>
+                      </a:r>
+                    </a:p>
+                  </a:txBody>
+                  <a:tcPr marL="73152" marR="73152" marT="36576" marB="36576" anchor="ctr">
+                    <a:solidFill>
+                      <a:srgbClr val="E6EEF7"/>
+                    </a:solidFill>
+                  </a:tcPr>
+                </a:tc>
+              </a:tr>
+              <a:tr h="347472">
+                <a:tc>
+                  <a:txBody>
+                    <a:bodyPr/>
+                    <a:lstStyle/>
+                    <a:p>
+                      <a:r>
+                        <a:rPr sz="1200" b="0">
+                          <a:solidFill>
+                            <a:srgbClr val="0B0B0B"/>
+                          </a:solidFill>
+                          <a:latin typeface="Calibri"/>
+                          <a:ea typeface="Microsoft JhengHei"/>
+                          <a:cs typeface="Microsoft JhengHei"/>
+                        </a:rPr>
+                        <a:t>往後 86 mm（貼齊機尾）</a:t>
+                      </a:r>
+                    </a:p>
+                  </a:txBody>
+                  <a:tcPr marL="73152" marR="73152" marT="36576" marB="36576" anchor="ctr">
+                    <a:solidFill>
+                      <a:srgbClr val="F4F4F2"/>
+                    </a:solidFill>
+                  </a:tcPr>
+                </a:tc>
+                <a:tc>
+                  <a:txBody>
+                    <a:bodyPr/>
+                    <a:lstStyle/>
+                    <a:p>
+                      <a:r>
+                        <a:rPr sz="1200" b="0">
+                          <a:solidFill>
+                            <a:srgbClr val="0B0B0B"/>
+                          </a:solidFill>
+                          <a:latin typeface="Calibri"/>
+                          <a:ea typeface="Microsoft JhengHei"/>
+                          <a:cs typeface="Microsoft JhengHei"/>
+                        </a:rPr>
+                        <a:t>2.2–2.7°</a:t>
+                      </a:r>
+                    </a:p>
+                  </a:txBody>
+                  <a:tcPr marL="73152" marR="73152" marT="36576" marB="36576" anchor="ctr">
+                    <a:solidFill>
+                      <a:srgbClr val="F4F4F2"/>
+                    </a:solidFill>
+                  </a:tcPr>
+                </a:tc>
+                <a:tc>
+                  <a:txBody>
+                    <a:bodyPr/>
+                    <a:lstStyle/>
+                    <a:p>
+                      <a:r>
+                        <a:rPr sz="1200" b="0">
+                          <a:solidFill>
+                            <a:srgbClr val="0B0B0B"/>
+                          </a:solidFill>
+                          <a:latin typeface="Calibri"/>
+                          <a:ea typeface="Microsoft JhengHei"/>
+                          <a:cs typeface="Microsoft JhengHei"/>
+                        </a:rPr>
+                        <a:t>5.0°</a:t>
+                      </a:r>
+                    </a:p>
+                  </a:txBody>
+                  <a:tcPr marL="73152" marR="73152" marT="36576" marB="36576" anchor="ctr">
+                    <a:solidFill>
+                      <a:srgbClr val="F4F4F2"/>
+                    </a:solidFill>
+                  </a:tcPr>
+                </a:tc>
+                <a:tc>
+                  <a:txBody>
+                    <a:bodyPr/>
+                    <a:lstStyle/>
+                    <a:p>
+                      <a:r>
+                        <a:rPr sz="1200" b="0">
+                          <a:solidFill>
+                            <a:srgbClr val="0B0B0B"/>
+                          </a:solidFill>
+                          <a:latin typeface="Calibri"/>
+                          <a:ea typeface="Microsoft JhengHei"/>
+                          <a:cs typeface="Microsoft JhengHei"/>
+                        </a:rPr>
+                        <a:t>穩，後腿負擔較重</a:t>
+                      </a:r>
+                    </a:p>
+                  </a:txBody>
+                  <a:tcPr marL="73152" marR="73152" marT="36576" marB="36576" anchor="ctr">
+                    <a:solidFill>
+                      <a:srgbClr val="F4F4F2"/>
+                    </a:solidFill>
+                  </a:tcPr>
+                </a:tc>
+              </a:tr>
+              <a:tr h="347472">
+                <a:tc>
+                  <a:txBody>
+                    <a:bodyPr/>
+                    <a:lstStyle/>
+                    <a:p>
+                      <a:r>
+                        <a:rPr sz="1200" b="0">
+                          <a:solidFill>
+                            <a:srgbClr val="0B0B0B"/>
+                          </a:solidFill>
+                          <a:latin typeface="Calibri"/>
+                          <a:ea typeface="Microsoft JhengHei"/>
+                          <a:cs typeface="Microsoft JhengHei"/>
+                        </a:rPr>
+                        <a:t>不裝 LiDAR（對照）</a:t>
+                      </a:r>
+                    </a:p>
+                  </a:txBody>
+                  <a:tcPr marL="73152" marR="73152" marT="36576" marB="36576" anchor="ctr">
+                    <a:solidFill>
+                      <a:srgbClr val="FFFFFF"/>
+                    </a:solidFill>
+                  </a:tcPr>
+                </a:tc>
+                <a:tc>
+                  <a:txBody>
+                    <a:bodyPr/>
+                    <a:lstStyle/>
+                    <a:p>
+                      <a:r>
+                        <a:rPr sz="1200" b="0">
+                          <a:solidFill>
+                            <a:srgbClr val="0B0B0B"/>
+                          </a:solidFill>
+                          <a:latin typeface="Calibri"/>
+                          <a:ea typeface="Microsoft JhengHei"/>
+                          <a:cs typeface="Microsoft JhengHei"/>
+                        </a:rPr>
+                        <a:t>1.8–1.9°</a:t>
+                      </a:r>
+                    </a:p>
+                  </a:txBody>
+                  <a:tcPr marL="73152" marR="73152" marT="36576" marB="36576" anchor="ctr">
+                    <a:solidFill>
+                      <a:srgbClr val="FFFFFF"/>
+                    </a:solidFill>
+                  </a:tcPr>
+                </a:tc>
+                <a:tc>
+                  <a:txBody>
+                    <a:bodyPr/>
+                    <a:lstStyle/>
+                    <a:p>
+                      <a:r>
+                        <a:rPr sz="1200" b="0">
+                          <a:solidFill>
+                            <a:srgbClr val="0B0B0B"/>
+                          </a:solidFill>
+                          <a:latin typeface="Calibri"/>
+                          <a:ea typeface="Microsoft JhengHei"/>
+                          <a:cs typeface="Microsoft JhengHei"/>
+                        </a:rPr>
+                        <a:t>5.9°</a:t>
+                      </a:r>
+                    </a:p>
+                  </a:txBody>
+                  <a:tcPr marL="73152" marR="73152" marT="36576" marB="36576" anchor="ctr">
+                    <a:solidFill>
+                      <a:srgbClr val="FFFFFF"/>
+                    </a:solidFill>
+                  </a:tcPr>
+                </a:tc>
+                <a:tc>
+                  <a:txBody>
+                    <a:bodyPr/>
+                    <a:lstStyle/>
+                    <a:p>
+                      <a:r>
+                        <a:rPr sz="1200" b="0">
+                          <a:solidFill>
+                            <a:srgbClr val="0B0B0B"/>
+                          </a:solidFill>
+                          <a:latin typeface="Calibri"/>
+                          <a:ea typeface="Microsoft JhengHei"/>
+                          <a:cs typeface="Microsoft JhengHei"/>
+                        </a:rPr>
+                        <a:t>穩</a:t>
+                      </a:r>
+                    </a:p>
+                  </a:txBody>
+                  <a:tcPr marL="73152" marR="73152" marT="36576" marB="36576" anchor="ctr">
+                    <a:solidFill>
+                      <a:srgbClr val="FFFFFF"/>
+                    </a:solidFill>
+                  </a:tcPr>
+                </a:tc>
+              </a:tr>
+            </a:tbl>
+          </a:graphicData>
+        </a:graphic>
+      </p:graphicFrame>
     </p:spTree>
   </p:cSld>
   <p:clrMapOvr>
@@ -13018,7 +14603,7 @@
                 <a:ea typeface="Microsoft JhengHei"/>
                 <a:cs typeface="Microsoft JhengHei"/>
               </a:rPr>
-              <a:t>遇到的問題與解法</a:t>
+              <a:t>主任務成果</a:t>
             </a:r>
           </a:p>
         </p:txBody>
@@ -13097,7 +14682,7 @@
                 <a:ea typeface="Microsoft JhengHei"/>
                 <a:cs typeface="Microsoft JhengHei"/>
               </a:rPr>
-              <a:t>這些問題在實機上也會遇到，解法可以直接沿用</a:t>
+              <a:t>在投影片的障礙物場景中，機器狗自己繞過障礙物走到右上角目標</a:t>
             </a:r>
           </a:p>
         </p:txBody>
@@ -13186,6 +14771,799 @@
                 <a:cs typeface="Microsoft JhengHei"/>
               </a:rPr>
               <a:t>7</a:t>
+            </a:r>
+          </a:p>
+        </p:txBody>
+      </p:sp>
+      <p:pic>
+        <p:nvPicPr>
+          <p:cNvPr id="10" name="Picture 9" descr="trajectory.png"/>
+          <p:cNvPicPr>
+            <a:picLocks noChangeAspect="1"/>
+          </p:cNvPicPr>
+          <p:nvPr/>
+        </p:nvPicPr>
+        <p:blipFill>
+          <a:blip r:embed="rId4"/>
+          <a:stretch>
+            <a:fillRect/>
+          </a:stretch>
+        </p:blipFill>
+        <p:spPr>
+          <a:xfrm>
+            <a:off x="548640" y="2148840"/>
+            <a:ext cx="6543040" cy="4206240"/>
+          </a:xfrm>
+          <a:prstGeom prst="rect">
+            <a:avLst/>
+          </a:prstGeom>
+        </p:spPr>
+      </p:pic>
+      <p:sp>
+        <p:nvSpPr>
+          <p:cNvPr id="11" name="Rectangle 10"/>
+          <p:cNvSpPr/>
+          <p:nvPr/>
+        </p:nvSpPr>
+        <p:spPr>
+          <a:xfrm>
+            <a:off x="7635240" y="2331720"/>
+            <a:ext cx="4005072" cy="1051560"/>
+          </a:xfrm>
+          <a:prstGeom prst="rect">
+            <a:avLst/>
+          </a:prstGeom>
+          <a:solidFill>
+            <a:srgbClr val="EEF3F9"/>
+          </a:solidFill>
+          <a:ln>
+            <a:noFill/>
+          </a:ln>
+          <a:effectLst/>
+        </p:spPr>
+        <p:txBody>
+          <a:bodyPr rtlCol="0" anchor="ctr"/>
+          <a:lstStyle/>
+          <a:p>
+            <a:pPr algn="ctr"/>
+          </a:p>
+        </p:txBody>
+      </p:sp>
+      <p:sp>
+        <p:nvSpPr>
+          <p:cNvPr id="12" name="TextBox 11"/>
+          <p:cNvSpPr txBox="1"/>
+          <p:nvPr/>
+        </p:nvSpPr>
+        <p:spPr>
+          <a:xfrm>
+            <a:off x="7818119" y="2404872"/>
+            <a:ext cx="3657600" cy="640080"/>
+          </a:xfrm>
+          <a:prstGeom prst="rect">
+            <a:avLst/>
+          </a:prstGeom>
+          <a:noFill/>
+        </p:spPr>
+        <p:txBody>
+          <a:bodyPr wrap="square" anchor="ctr" lIns="36576" rIns="36576" tIns="18288" bIns="18288">
+            <a:spAutoFit/>
+          </a:bodyPr>
+          <a:lstStyle/>
+          <a:p>
+            <a:pPr algn="l">
+              <a:lnSpc>
+                <a:spcPct val="115000"/>
+              </a:lnSpc>
+              <a:spcAft>
+                <a:spcPts val="400"/>
+              </a:spcAft>
+            </a:pPr>
+            <a:r>
+              <a:rPr sz="3400" b="1">
+                <a:solidFill>
+                  <a:srgbClr val="00549D"/>
+                </a:solidFill>
+                <a:latin typeface="Calibri"/>
+                <a:ea typeface="Microsoft JhengHei"/>
+                <a:cs typeface="Microsoft JhengHei"/>
+              </a:rPr>
+              <a:t>26</a:t>
+            </a:r>
+            <a:r>
+              <a:rPr sz="1600" b="1">
+                <a:solidFill>
+                  <a:srgbClr val="00549D"/>
+                </a:solidFill>
+                <a:latin typeface="Calibri"/>
+                <a:ea typeface="Microsoft JhengHei"/>
+                <a:cs typeface="Microsoft JhengHei"/>
+              </a:rPr>
+              <a:t>  cm</a:t>
+            </a:r>
+          </a:p>
+        </p:txBody>
+      </p:sp>
+      <p:sp>
+        <p:nvSpPr>
+          <p:cNvPr id="13" name="TextBox 12"/>
+          <p:cNvSpPr txBox="1"/>
+          <p:nvPr/>
+        </p:nvSpPr>
+        <p:spPr>
+          <a:xfrm>
+            <a:off x="7818119" y="2990087"/>
+            <a:ext cx="3657600" cy="320040"/>
+          </a:xfrm>
+          <a:prstGeom prst="rect">
+            <a:avLst/>
+          </a:prstGeom>
+          <a:noFill/>
+        </p:spPr>
+        <p:txBody>
+          <a:bodyPr wrap="square" anchor="t" lIns="36576" rIns="36576" tIns="18288" bIns="18288">
+            <a:spAutoFit/>
+          </a:bodyPr>
+          <a:lstStyle/>
+          <a:p>
+            <a:pPr algn="l">
+              <a:lnSpc>
+                <a:spcPct val="115000"/>
+              </a:lnSpc>
+              <a:spcAft>
+                <a:spcPts val="400"/>
+              </a:spcAft>
+            </a:pPr>
+            <a:r>
+              <a:rPr sz="1200" b="0">
+                <a:solidFill>
+                  <a:srgbClr val="403F3D"/>
+                </a:solidFill>
+                <a:latin typeface="Calibri"/>
+                <a:ea typeface="Microsoft JhengHei"/>
+                <a:cs typeface="Microsoft JhengHei"/>
+              </a:rPr>
+              <a:t>停下時離目標（到達範圍設定為 25 cm）</a:t>
+            </a:r>
+          </a:p>
+        </p:txBody>
+      </p:sp>
+      <p:sp>
+        <p:nvSpPr>
+          <p:cNvPr id="14" name="Rectangle 13"/>
+          <p:cNvSpPr/>
+          <p:nvPr/>
+        </p:nvSpPr>
+        <p:spPr>
+          <a:xfrm>
+            <a:off x="7635240" y="3538728"/>
+            <a:ext cx="4005072" cy="1051560"/>
+          </a:xfrm>
+          <a:prstGeom prst="rect">
+            <a:avLst/>
+          </a:prstGeom>
+          <a:solidFill>
+            <a:srgbClr val="EEF3F9"/>
+          </a:solidFill>
+          <a:ln>
+            <a:noFill/>
+          </a:ln>
+          <a:effectLst/>
+        </p:spPr>
+        <p:txBody>
+          <a:bodyPr rtlCol="0" anchor="ctr"/>
+          <a:lstStyle/>
+          <a:p>
+            <a:pPr algn="ctr"/>
+          </a:p>
+        </p:txBody>
+      </p:sp>
+      <p:sp>
+        <p:nvSpPr>
+          <p:cNvPr id="15" name="TextBox 14"/>
+          <p:cNvSpPr txBox="1"/>
+          <p:nvPr/>
+        </p:nvSpPr>
+        <p:spPr>
+          <a:xfrm>
+            <a:off x="7818119" y="3611880"/>
+            <a:ext cx="3657600" cy="640080"/>
+          </a:xfrm>
+          <a:prstGeom prst="rect">
+            <a:avLst/>
+          </a:prstGeom>
+          <a:noFill/>
+        </p:spPr>
+        <p:txBody>
+          <a:bodyPr wrap="square" anchor="ctr" lIns="36576" rIns="36576" tIns="18288" bIns="18288">
+            <a:spAutoFit/>
+          </a:bodyPr>
+          <a:lstStyle/>
+          <a:p>
+            <a:pPr algn="l">
+              <a:lnSpc>
+                <a:spcPct val="115000"/>
+              </a:lnSpc>
+              <a:spcAft>
+                <a:spcPts val="400"/>
+              </a:spcAft>
+            </a:pPr>
+            <a:r>
+              <a:rPr sz="3400" b="1">
+                <a:solidFill>
+                  <a:srgbClr val="00549D"/>
+                </a:solidFill>
+                <a:latin typeface="Calibri"/>
+                <a:ea typeface="Microsoft JhengHei"/>
+                <a:cs typeface="Microsoft JhengHei"/>
+              </a:rPr>
+              <a:t>108</a:t>
+            </a:r>
+            <a:r>
+              <a:rPr sz="1600" b="1">
+                <a:solidFill>
+                  <a:srgbClr val="00549D"/>
+                </a:solidFill>
+                <a:latin typeface="Calibri"/>
+                <a:ea typeface="Microsoft JhengHei"/>
+                <a:cs typeface="Microsoft JhengHei"/>
+              </a:rPr>
+              <a:t>  s</a:t>
+            </a:r>
+          </a:p>
+        </p:txBody>
+      </p:sp>
+      <p:sp>
+        <p:nvSpPr>
+          <p:cNvPr id="16" name="TextBox 15"/>
+          <p:cNvSpPr txBox="1"/>
+          <p:nvPr/>
+        </p:nvSpPr>
+        <p:spPr>
+          <a:xfrm>
+            <a:off x="7818119" y="4197096"/>
+            <a:ext cx="3657600" cy="320040"/>
+          </a:xfrm>
+          <a:prstGeom prst="rect">
+            <a:avLst/>
+          </a:prstGeom>
+          <a:noFill/>
+        </p:spPr>
+        <p:txBody>
+          <a:bodyPr wrap="square" anchor="t" lIns="36576" rIns="36576" tIns="18288" bIns="18288">
+            <a:spAutoFit/>
+          </a:bodyPr>
+          <a:lstStyle/>
+          <a:p>
+            <a:pPr algn="l">
+              <a:lnSpc>
+                <a:spcPct val="115000"/>
+              </a:lnSpc>
+              <a:spcAft>
+                <a:spcPts val="400"/>
+              </a:spcAft>
+            </a:pPr>
+            <a:r>
+              <a:rPr sz="1200" b="0">
+                <a:solidFill>
+                  <a:srgbClr val="403F3D"/>
+                </a:solidFill>
+                <a:latin typeface="Calibri"/>
+                <a:ea typeface="Microsoft JhengHei"/>
+                <a:cs typeface="Microsoft JhengHei"/>
+              </a:rPr>
+              <a:t>到達時間</a:t>
+            </a:r>
+          </a:p>
+        </p:txBody>
+      </p:sp>
+      <p:sp>
+        <p:nvSpPr>
+          <p:cNvPr id="17" name="Rectangle 16"/>
+          <p:cNvSpPr/>
+          <p:nvPr/>
+        </p:nvSpPr>
+        <p:spPr>
+          <a:xfrm>
+            <a:off x="7635240" y="4745736"/>
+            <a:ext cx="4005072" cy="1051560"/>
+          </a:xfrm>
+          <a:prstGeom prst="rect">
+            <a:avLst/>
+          </a:prstGeom>
+          <a:solidFill>
+            <a:srgbClr val="EEF3F9"/>
+          </a:solidFill>
+          <a:ln>
+            <a:noFill/>
+          </a:ln>
+          <a:effectLst/>
+        </p:spPr>
+        <p:txBody>
+          <a:bodyPr rtlCol="0" anchor="ctr"/>
+          <a:lstStyle/>
+          <a:p>
+            <a:pPr algn="ctr"/>
+          </a:p>
+        </p:txBody>
+      </p:sp>
+      <p:sp>
+        <p:nvSpPr>
+          <p:cNvPr id="18" name="TextBox 17"/>
+          <p:cNvSpPr txBox="1"/>
+          <p:nvPr/>
+        </p:nvSpPr>
+        <p:spPr>
+          <a:xfrm>
+            <a:off x="7818119" y="4818888"/>
+            <a:ext cx="3657600" cy="640080"/>
+          </a:xfrm>
+          <a:prstGeom prst="rect">
+            <a:avLst/>
+          </a:prstGeom>
+          <a:noFill/>
+        </p:spPr>
+        <p:txBody>
+          <a:bodyPr wrap="square" anchor="ctr" lIns="36576" rIns="36576" tIns="18288" bIns="18288">
+            <a:spAutoFit/>
+          </a:bodyPr>
+          <a:lstStyle/>
+          <a:p>
+            <a:pPr algn="l">
+              <a:lnSpc>
+                <a:spcPct val="115000"/>
+              </a:lnSpc>
+              <a:spcAft>
+                <a:spcPts val="400"/>
+              </a:spcAft>
+            </a:pPr>
+            <a:r>
+              <a:rPr sz="3400" b="1">
+                <a:solidFill>
+                  <a:srgbClr val="00549D"/>
+                </a:solidFill>
+                <a:latin typeface="Calibri"/>
+                <a:ea typeface="Microsoft JhengHei"/>
+                <a:cs typeface="Microsoft JhengHei"/>
+              </a:rPr>
+              <a:t>0</a:t>
+            </a:r>
+            <a:r>
+              <a:rPr sz="1600" b="1">
+                <a:solidFill>
+                  <a:srgbClr val="00549D"/>
+                </a:solidFill>
+                <a:latin typeface="Calibri"/>
+                <a:ea typeface="Microsoft JhengHei"/>
+                <a:cs typeface="Microsoft JhengHei"/>
+              </a:rPr>
+              <a:t>  次</a:t>
+            </a:r>
+          </a:p>
+        </p:txBody>
+      </p:sp>
+      <p:sp>
+        <p:nvSpPr>
+          <p:cNvPr id="19" name="TextBox 18"/>
+          <p:cNvSpPr txBox="1"/>
+          <p:nvPr/>
+        </p:nvSpPr>
+        <p:spPr>
+          <a:xfrm>
+            <a:off x="7818119" y="5404103"/>
+            <a:ext cx="3657600" cy="320040"/>
+          </a:xfrm>
+          <a:prstGeom prst="rect">
+            <a:avLst/>
+          </a:prstGeom>
+          <a:noFill/>
+        </p:spPr>
+        <p:txBody>
+          <a:bodyPr wrap="square" anchor="t" lIns="36576" rIns="36576" tIns="18288" bIns="18288">
+            <a:spAutoFit/>
+          </a:bodyPr>
+          <a:lstStyle/>
+          <a:p>
+            <a:pPr algn="l">
+              <a:lnSpc>
+                <a:spcPct val="115000"/>
+              </a:lnSpc>
+              <a:spcAft>
+                <a:spcPts val="400"/>
+              </a:spcAft>
+            </a:pPr>
+            <a:r>
+              <a:rPr sz="1200" b="0">
+                <a:solidFill>
+                  <a:srgbClr val="403F3D"/>
+                </a:solidFill>
+                <a:latin typeface="Calibri"/>
+                <a:ea typeface="Microsoft JhengHei"/>
+                <a:cs typeface="Microsoft JhengHei"/>
+              </a:rPr>
+              <a:t>擦碰（離障礙物最近 0.13 m）</a:t>
+            </a:r>
+          </a:p>
+        </p:txBody>
+      </p:sp>
+      <p:sp>
+        <p:nvSpPr>
+          <p:cNvPr id="20" name="TextBox 19"/>
+          <p:cNvSpPr txBox="1"/>
+          <p:nvPr/>
+        </p:nvSpPr>
+        <p:spPr>
+          <a:xfrm>
+            <a:off x="7635240" y="5943600"/>
+            <a:ext cx="4005072" cy="411480"/>
+          </a:xfrm>
+          <a:prstGeom prst="rect">
+            <a:avLst/>
+          </a:prstGeom>
+          <a:noFill/>
+        </p:spPr>
+        <p:txBody>
+          <a:bodyPr wrap="square" anchor="t" lIns="36576" rIns="36576" tIns="18288" bIns="18288">
+            <a:spAutoFit/>
+          </a:bodyPr>
+          <a:lstStyle/>
+          <a:p>
+            <a:pPr algn="l">
+              <a:lnSpc>
+                <a:spcPct val="115000"/>
+              </a:lnSpc>
+              <a:spcAft>
+                <a:spcPts val="400"/>
+              </a:spcAft>
+            </a:pPr>
+            <a:r>
+              <a:rPr sz="1000" b="0">
+                <a:solidFill>
+                  <a:srgbClr val="7A7977"/>
+                </a:solidFill>
+                <a:latin typeface="Calibri"/>
+                <a:ea typeface="Microsoft JhengHei"/>
+                <a:cs typeface="Microsoft JhengHei"/>
+              </a:rPr>
+              <a:t>使用強化學習（PPO）避障；模擬器記錄的真實位置。另一次執行為 117 s</a:t>
+            </a:r>
+          </a:p>
+        </p:txBody>
+      </p:sp>
+    </p:spTree>
+  </p:cSld>
+  <p:clrMapOvr>
+    <a:masterClrMapping/>
+  </p:clrMapOvr>
+</p:sld>
+</file>
+
+<file path=ppt/slides/slide8.xml><?xml version="1.0" encoding="utf-8"?>
+<p:sld xmlns:a="http://schemas.openxmlformats.org/drawingml/2006/main" xmlns:p="http://schemas.openxmlformats.org/presentationml/2006/main" xmlns:r="http://schemas.openxmlformats.org/officeDocument/2006/relationships">
+  <p:cSld>
+    <p:spTree>
+      <p:nvGrpSpPr>
+        <p:cNvPr id="1" name=""/>
+        <p:cNvGrpSpPr/>
+        <p:nvPr/>
+      </p:nvGrpSpPr>
+      <p:grpSpPr/>
+      <p:sp>
+        <p:nvSpPr>
+          <p:cNvPr id="2" name="TextBox 1"/>
+          <p:cNvSpPr txBox="1"/>
+          <p:nvPr/>
+        </p:nvSpPr>
+        <p:spPr>
+          <a:xfrm>
+            <a:off x="548640" y="384048"/>
+            <a:ext cx="11091672" cy="292608"/>
+          </a:xfrm>
+          <a:prstGeom prst="rect">
+            <a:avLst/>
+          </a:prstGeom>
+          <a:noFill/>
+        </p:spPr>
+        <p:txBody>
+          <a:bodyPr wrap="square" anchor="t" lIns="36576" rIns="36576" tIns="18288" bIns="18288">
+            <a:spAutoFit/>
+          </a:bodyPr>
+          <a:lstStyle/>
+          <a:p>
+            <a:pPr algn="l">
+              <a:lnSpc>
+                <a:spcPct val="115000"/>
+              </a:lnSpc>
+              <a:spcAft>
+                <a:spcPts val="400"/>
+              </a:spcAft>
+            </a:pPr>
+            <a:r>
+              <a:rPr sz="1400" b="1">
+                <a:solidFill>
+                  <a:srgbClr val="7A7977"/>
+                </a:solidFill>
+                <a:latin typeface="Calibri"/>
+                <a:ea typeface="Microsoft JhengHei"/>
+                <a:cs typeface="Microsoft JhengHei"/>
+              </a:rPr>
+              <a:t>Project 3</a:t>
+            </a:r>
+          </a:p>
+        </p:txBody>
+      </p:sp>
+      <p:cxnSp>
+        <p:nvCxnSpPr>
+          <p:cNvPr id="3" name="Connector 2"/>
+          <p:cNvCxnSpPr/>
+          <p:nvPr/>
+        </p:nvCxnSpPr>
+        <p:spPr>
+          <a:xfrm>
+            <a:off x="548640" y="713232"/>
+            <a:ext cx="11091672" cy="0"/>
+          </a:xfrm>
+          <a:prstGeom prst="line">
+            <a:avLst/>
+          </a:prstGeom>
+          <a:ln w="9525">
+            <a:solidFill>
+              <a:srgbClr val="C8C7C2"/>
+            </a:solidFill>
+          </a:ln>
+        </p:spPr>
+        <p:style>
+          <a:lnRef idx="2">
+            <a:schemeClr val="accent1"/>
+          </a:lnRef>
+          <a:fillRef idx="0">
+            <a:schemeClr val="accent1"/>
+          </a:fillRef>
+          <a:effectRef idx="1">
+            <a:schemeClr val="accent1"/>
+          </a:effectRef>
+          <a:fontRef idx="minor">
+            <a:schemeClr val="tx1"/>
+          </a:fontRef>
+        </p:style>
+      </p:cxnSp>
+      <p:sp>
+        <p:nvSpPr>
+          <p:cNvPr id="4" name="Rectangle 3"/>
+          <p:cNvSpPr/>
+          <p:nvPr/>
+        </p:nvSpPr>
+        <p:spPr>
+          <a:xfrm>
+            <a:off x="548640" y="896112"/>
+            <a:ext cx="54864" cy="457200"/>
+          </a:xfrm>
+          <a:prstGeom prst="rect">
+            <a:avLst/>
+          </a:prstGeom>
+          <a:solidFill>
+            <a:srgbClr val="00549D"/>
+          </a:solidFill>
+          <a:ln>
+            <a:noFill/>
+          </a:ln>
+          <a:effectLst/>
+        </p:spPr>
+        <p:txBody>
+          <a:bodyPr rtlCol="0" anchor="ctr"/>
+          <a:lstStyle/>
+          <a:p>
+            <a:pPr algn="ctr"/>
+          </a:p>
+        </p:txBody>
+      </p:sp>
+      <p:sp>
+        <p:nvSpPr>
+          <p:cNvPr id="5" name="TextBox 4"/>
+          <p:cNvSpPr txBox="1"/>
+          <p:nvPr/>
+        </p:nvSpPr>
+        <p:spPr>
+          <a:xfrm>
+            <a:off x="713232" y="822960"/>
+            <a:ext cx="10515600" cy="594360"/>
+          </a:xfrm>
+          <a:prstGeom prst="rect">
+            <a:avLst/>
+          </a:prstGeom>
+          <a:noFill/>
+        </p:spPr>
+        <p:txBody>
+          <a:bodyPr wrap="square" anchor="ctr" lIns="36576" rIns="36576" tIns="18288" bIns="18288">
+            <a:spAutoFit/>
+          </a:bodyPr>
+          <a:lstStyle/>
+          <a:p>
+            <a:pPr algn="l">
+              <a:lnSpc>
+                <a:spcPct val="115000"/>
+              </a:lnSpc>
+              <a:spcAft>
+                <a:spcPts val="400"/>
+              </a:spcAft>
+            </a:pPr>
+            <a:r>
+              <a:rPr sz="2600" b="1">
+                <a:solidFill>
+                  <a:srgbClr val="00549D"/>
+                </a:solidFill>
+                <a:latin typeface="Calibri"/>
+                <a:ea typeface="Microsoft JhengHei"/>
+                <a:cs typeface="Microsoft JhengHei"/>
+              </a:rPr>
+              <a:t>遇到的問題與解法</a:t>
+            </a:r>
+          </a:p>
+        </p:txBody>
+      </p:sp>
+      <p:cxnSp>
+        <p:nvCxnSpPr>
+          <p:cNvPr id="6" name="Connector 5"/>
+          <p:cNvCxnSpPr/>
+          <p:nvPr/>
+        </p:nvCxnSpPr>
+        <p:spPr>
+          <a:xfrm>
+            <a:off x="548640" y="1536192"/>
+            <a:ext cx="11091672" cy="0"/>
+          </a:xfrm>
+          <a:prstGeom prst="line">
+            <a:avLst/>
+          </a:prstGeom>
+          <a:ln w="9525">
+            <a:solidFill>
+              <a:srgbClr val="C8C7C2"/>
+            </a:solidFill>
+          </a:ln>
+        </p:spPr>
+        <p:style>
+          <a:lnRef idx="2">
+            <a:schemeClr val="accent1"/>
+          </a:lnRef>
+          <a:fillRef idx="0">
+            <a:schemeClr val="accent1"/>
+          </a:fillRef>
+          <a:effectRef idx="1">
+            <a:schemeClr val="accent1"/>
+          </a:effectRef>
+          <a:fontRef idx="minor">
+            <a:schemeClr val="tx1"/>
+          </a:fontRef>
+        </p:style>
+      </p:cxnSp>
+      <p:sp>
+        <p:nvSpPr>
+          <p:cNvPr id="7" name="TextBox 6"/>
+          <p:cNvSpPr txBox="1"/>
+          <p:nvPr/>
+        </p:nvSpPr>
+        <p:spPr>
+          <a:xfrm>
+            <a:off x="548640" y="1700784"/>
+            <a:ext cx="11091672" cy="411480"/>
+          </a:xfrm>
+          <a:prstGeom prst="rect">
+            <a:avLst/>
+          </a:prstGeom>
+          <a:noFill/>
+        </p:spPr>
+        <p:txBody>
+          <a:bodyPr wrap="square" anchor="t" lIns="36576" rIns="36576" tIns="18288" bIns="18288">
+            <a:spAutoFit/>
+          </a:bodyPr>
+          <a:lstStyle/>
+          <a:p>
+            <a:pPr algn="l">
+              <a:lnSpc>
+                <a:spcPct val="115000"/>
+              </a:lnSpc>
+              <a:spcAft>
+                <a:spcPts val="400"/>
+              </a:spcAft>
+            </a:pPr>
+            <a:r>
+              <a:rPr sz="1500" b="1">
+                <a:solidFill>
+                  <a:srgbClr val="403F3D"/>
+                </a:solidFill>
+                <a:latin typeface="Calibri"/>
+                <a:ea typeface="Microsoft JhengHei"/>
+                <a:cs typeface="Microsoft JhengHei"/>
+              </a:rPr>
+              <a:t>這些問題在實機上也會遇到，解法可以直接沿用</a:t>
+            </a:r>
+          </a:p>
+        </p:txBody>
+      </p:sp>
+      <p:sp>
+        <p:nvSpPr>
+          <p:cNvPr id="8" name="TextBox 7"/>
+          <p:cNvSpPr txBox="1"/>
+          <p:nvPr/>
+        </p:nvSpPr>
+        <p:spPr>
+          <a:xfrm>
+            <a:off x="548640" y="6473952"/>
+            <a:ext cx="7772400" cy="274320"/>
+          </a:xfrm>
+          <a:prstGeom prst="rect">
+            <a:avLst/>
+          </a:prstGeom>
+          <a:noFill/>
+        </p:spPr>
+        <p:txBody>
+          <a:bodyPr wrap="square" anchor="t" lIns="36576" rIns="36576" tIns="18288" bIns="18288">
+            <a:spAutoFit/>
+          </a:bodyPr>
+          <a:lstStyle/>
+          <a:p>
+            <a:pPr algn="l">
+              <a:lnSpc>
+                <a:spcPct val="115000"/>
+              </a:lnSpc>
+              <a:spcAft>
+                <a:spcPts val="400"/>
+              </a:spcAft>
+            </a:pPr>
+            <a:r>
+              <a:rPr sz="900" b="0">
+                <a:solidFill>
+                  <a:srgbClr val="7A7977"/>
+                </a:solidFill>
+                <a:latin typeface="Calibri"/>
+                <a:ea typeface="Microsoft JhengHei"/>
+                <a:cs typeface="Microsoft JhengHei"/>
+              </a:rPr>
+              <a:t>國立臺灣科技大學（NTUST） · 自主移動機器人實驗室</a:t>
+            </a:r>
+          </a:p>
+        </p:txBody>
+      </p:sp>
+      <p:sp>
+        <p:nvSpPr>
+          <p:cNvPr id="9" name="TextBox 8"/>
+          <p:cNvSpPr txBox="1"/>
+          <p:nvPr/>
+        </p:nvSpPr>
+        <p:spPr>
+          <a:xfrm>
+            <a:off x="11183112" y="6473952"/>
+            <a:ext cx="457200" cy="274320"/>
+          </a:xfrm>
+          <a:prstGeom prst="rect">
+            <a:avLst/>
+          </a:prstGeom>
+          <a:noFill/>
+        </p:spPr>
+        <p:txBody>
+          <a:bodyPr wrap="square" anchor="t" lIns="36576" rIns="36576" tIns="18288" bIns="18288">
+            <a:spAutoFit/>
+          </a:bodyPr>
+          <a:lstStyle/>
+          <a:p>
+            <a:pPr algn="r">
+              <a:lnSpc>
+                <a:spcPct val="115000"/>
+              </a:lnSpc>
+              <a:spcAft>
+                <a:spcPts val="400"/>
+              </a:spcAft>
+            </a:pPr>
+            <a:r>
+              <a:rPr sz="900" b="0">
+                <a:solidFill>
+                  <a:srgbClr val="7A7977"/>
+                </a:solidFill>
+                <a:latin typeface="Calibri"/>
+                <a:ea typeface="Microsoft JhengHei"/>
+                <a:cs typeface="Microsoft JhengHei"/>
+              </a:rPr>
+              <a:t>8</a:t>
             </a:r>
           </a:p>
         </p:txBody>
@@ -13764,7 +16142,7 @@
 </p:sld>
 </file>
 
-<file path=ppt/slides/slide8.xml><?xml version="1.0" encoding="utf-8"?>
+<file path=ppt/slides/slide9.xml><?xml version="1.0" encoding="utf-8"?>
 <p:sld xmlns:a="http://schemas.openxmlformats.org/drawingml/2006/main" xmlns:p="http://schemas.openxmlformats.org/presentationml/2006/main" xmlns:r="http://schemas.openxmlformats.org/officeDocument/2006/relationships">
   <p:cSld>
     <p:spTree>
@@ -14089,7 +16467,7 @@
                 <a:ea typeface="Microsoft JhengHei"/>
                 <a:cs typeface="Microsoft JhengHei"/>
               </a:rPr>
-              <a:t>8</a:t>
+              <a:t>9</a:t>
             </a:r>
           </a:p>
         </p:txBody>
@@ -14869,1012 +17247,7 @@
                 <a:ea typeface="Microsoft JhengHei"/>
                 <a:cs typeface="Microsoft JhengHei"/>
               </a:rPr>
-              <a:t>左：調整前　右：調整後（Gazebo 量測，官方 S1 模型）</a:t>
-            </a:r>
-          </a:p>
-        </p:txBody>
-      </p:sp>
-    </p:spTree>
-  </p:cSld>
-  <p:clrMapOvr>
-    <a:masterClrMapping/>
-  </p:clrMapOvr>
-</p:sld>
-</file>
-
-<file path=ppt/slides/slide9.xml><?xml version="1.0" encoding="utf-8"?>
-<p:sld xmlns:a="http://schemas.openxmlformats.org/drawingml/2006/main" xmlns:p="http://schemas.openxmlformats.org/presentationml/2006/main" xmlns:r="http://schemas.openxmlformats.org/officeDocument/2006/relationships">
-  <p:cSld>
-    <p:spTree>
-      <p:nvGrpSpPr>
-        <p:cNvPr id="1" name=""/>
-        <p:cNvGrpSpPr/>
-        <p:nvPr/>
-      </p:nvGrpSpPr>
-      <p:grpSpPr/>
-      <p:sp>
-        <p:nvSpPr>
-          <p:cNvPr id="2" name="TextBox 1"/>
-          <p:cNvSpPr txBox="1"/>
-          <p:nvPr/>
-        </p:nvSpPr>
-        <p:spPr>
-          <a:xfrm>
-            <a:off x="548640" y="384048"/>
-            <a:ext cx="11091672" cy="292608"/>
-          </a:xfrm>
-          <a:prstGeom prst="rect">
-            <a:avLst/>
-          </a:prstGeom>
-          <a:noFill/>
-        </p:spPr>
-        <p:txBody>
-          <a:bodyPr wrap="square" anchor="t" lIns="36576" rIns="36576" tIns="18288" bIns="18288">
-            <a:spAutoFit/>
-          </a:bodyPr>
-          <a:lstStyle/>
-          <a:p>
-            <a:pPr algn="l">
-              <a:lnSpc>
-                <a:spcPct val="115000"/>
-              </a:lnSpc>
-              <a:spcAft>
-                <a:spcPts val="400"/>
-              </a:spcAft>
-            </a:pPr>
-            <a:r>
-              <a:rPr sz="1400" b="1">
-                <a:solidFill>
-                  <a:srgbClr val="7A7977"/>
-                </a:solidFill>
-                <a:latin typeface="Calibri"/>
-                <a:ea typeface="Microsoft JhengHei"/>
-                <a:cs typeface="Microsoft JhengHei"/>
-              </a:rPr>
-              <a:t>Project 3</a:t>
-            </a:r>
-          </a:p>
-        </p:txBody>
-      </p:sp>
-      <p:cxnSp>
-        <p:nvCxnSpPr>
-          <p:cNvPr id="3" name="Connector 2"/>
-          <p:cNvCxnSpPr/>
-          <p:nvPr/>
-        </p:nvCxnSpPr>
-        <p:spPr>
-          <a:xfrm>
-            <a:off x="548640" y="713232"/>
-            <a:ext cx="11091672" cy="0"/>
-          </a:xfrm>
-          <a:prstGeom prst="line">
-            <a:avLst/>
-          </a:prstGeom>
-          <a:ln w="9525">
-            <a:solidFill>
-              <a:srgbClr val="C8C7C2"/>
-            </a:solidFill>
-          </a:ln>
-        </p:spPr>
-        <p:style>
-          <a:lnRef idx="2">
-            <a:schemeClr val="accent1"/>
-          </a:lnRef>
-          <a:fillRef idx="0">
-            <a:schemeClr val="accent1"/>
-          </a:fillRef>
-          <a:effectRef idx="1">
-            <a:schemeClr val="accent1"/>
-          </a:effectRef>
-          <a:fontRef idx="minor">
-            <a:schemeClr val="tx1"/>
-          </a:fontRef>
-        </p:style>
-      </p:cxnSp>
-      <p:sp>
-        <p:nvSpPr>
-          <p:cNvPr id="4" name="Rectangle 3"/>
-          <p:cNvSpPr/>
-          <p:nvPr/>
-        </p:nvSpPr>
-        <p:spPr>
-          <a:xfrm>
-            <a:off x="548640" y="896112"/>
-            <a:ext cx="54864" cy="457200"/>
-          </a:xfrm>
-          <a:prstGeom prst="rect">
-            <a:avLst/>
-          </a:prstGeom>
-          <a:solidFill>
-            <a:srgbClr val="00549D"/>
-          </a:solidFill>
-          <a:ln>
-            <a:noFill/>
-          </a:ln>
-          <a:effectLst/>
-        </p:spPr>
-        <p:txBody>
-          <a:bodyPr rtlCol="0" anchor="ctr"/>
-          <a:lstStyle/>
-          <a:p>
-            <a:pPr algn="ctr"/>
-          </a:p>
-        </p:txBody>
-      </p:sp>
-      <p:sp>
-        <p:nvSpPr>
-          <p:cNvPr id="5" name="TextBox 4"/>
-          <p:cNvSpPr txBox="1"/>
-          <p:nvPr/>
-        </p:nvSpPr>
-        <p:spPr>
-          <a:xfrm>
-            <a:off x="713232" y="822960"/>
-            <a:ext cx="10515600" cy="594360"/>
-          </a:xfrm>
-          <a:prstGeom prst="rect">
-            <a:avLst/>
-          </a:prstGeom>
-          <a:noFill/>
-        </p:spPr>
-        <p:txBody>
-          <a:bodyPr wrap="square" anchor="ctr" lIns="36576" rIns="36576" tIns="18288" bIns="18288">
-            <a:spAutoFit/>
-          </a:bodyPr>
-          <a:lstStyle/>
-          <a:p>
-            <a:pPr algn="l">
-              <a:lnSpc>
-                <a:spcPct val="115000"/>
-              </a:lnSpc>
-              <a:spcAft>
-                <a:spcPts val="400"/>
-              </a:spcAft>
-            </a:pPr>
-            <a:r>
-              <a:rPr sz="2600" b="1">
-                <a:solidFill>
-                  <a:srgbClr val="00549D"/>
-                </a:solidFill>
-                <a:latin typeface="Calibri"/>
-                <a:ea typeface="Microsoft JhengHei"/>
-                <a:cs typeface="Microsoft JhengHei"/>
-              </a:rPr>
-              <a:t>避障測試結果</a:t>
-            </a:r>
-          </a:p>
-        </p:txBody>
-      </p:sp>
-      <p:cxnSp>
-        <p:nvCxnSpPr>
-          <p:cNvPr id="6" name="Connector 5"/>
-          <p:cNvCxnSpPr/>
-          <p:nvPr/>
-        </p:nvCxnSpPr>
-        <p:spPr>
-          <a:xfrm>
-            <a:off x="548640" y="1536192"/>
-            <a:ext cx="11091672" cy="0"/>
-          </a:xfrm>
-          <a:prstGeom prst="line">
-            <a:avLst/>
-          </a:prstGeom>
-          <a:ln w="9525">
-            <a:solidFill>
-              <a:srgbClr val="C8C7C2"/>
-            </a:solidFill>
-          </a:ln>
-        </p:spPr>
-        <p:style>
-          <a:lnRef idx="2">
-            <a:schemeClr val="accent1"/>
-          </a:lnRef>
-          <a:fillRef idx="0">
-            <a:schemeClr val="accent1"/>
-          </a:fillRef>
-          <a:effectRef idx="1">
-            <a:schemeClr val="accent1"/>
-          </a:effectRef>
-          <a:fontRef idx="minor">
-            <a:schemeClr val="tx1"/>
-          </a:fontRef>
-        </p:style>
-      </p:cxnSp>
-      <p:sp>
-        <p:nvSpPr>
-          <p:cNvPr id="7" name="TextBox 6"/>
-          <p:cNvSpPr txBox="1"/>
-          <p:nvPr/>
-        </p:nvSpPr>
-        <p:spPr>
-          <a:xfrm>
-            <a:off x="548640" y="1700784"/>
-            <a:ext cx="11091672" cy="411480"/>
-          </a:xfrm>
-          <a:prstGeom prst="rect">
-            <a:avLst/>
-          </a:prstGeom>
-          <a:noFill/>
-        </p:spPr>
-        <p:txBody>
-          <a:bodyPr wrap="square" anchor="t" lIns="36576" rIns="36576" tIns="18288" bIns="18288">
-            <a:spAutoFit/>
-          </a:bodyPr>
-          <a:lstStyle/>
-          <a:p>
-            <a:pPr algn="l">
-              <a:lnSpc>
-                <a:spcPct val="115000"/>
-              </a:lnSpc>
-              <a:spcAft>
-                <a:spcPts val="400"/>
-              </a:spcAft>
-            </a:pPr>
-            <a:r>
-              <a:rPr sz="1500" b="1">
-                <a:solidFill>
-                  <a:srgbClr val="403F3D"/>
-                </a:solidFill>
-                <a:latin typeface="Calibri"/>
-                <a:ea typeface="Microsoft JhengHei"/>
-                <a:cs typeface="Microsoft JhengHei"/>
-              </a:rPr>
-              <a:t>連續走 7 個目標點：主任務做到了，但整體到達率還不高</a:t>
-            </a:r>
-          </a:p>
-        </p:txBody>
-      </p:sp>
-      <p:sp>
-        <p:nvSpPr>
-          <p:cNvPr id="8" name="TextBox 7"/>
-          <p:cNvSpPr txBox="1"/>
-          <p:nvPr/>
-        </p:nvSpPr>
-        <p:spPr>
-          <a:xfrm>
-            <a:off x="548640" y="6473952"/>
-            <a:ext cx="7772400" cy="274320"/>
-          </a:xfrm>
-          <a:prstGeom prst="rect">
-            <a:avLst/>
-          </a:prstGeom>
-          <a:noFill/>
-        </p:spPr>
-        <p:txBody>
-          <a:bodyPr wrap="square" anchor="t" lIns="36576" rIns="36576" tIns="18288" bIns="18288">
-            <a:spAutoFit/>
-          </a:bodyPr>
-          <a:lstStyle/>
-          <a:p>
-            <a:pPr algn="l">
-              <a:lnSpc>
-                <a:spcPct val="115000"/>
-              </a:lnSpc>
-              <a:spcAft>
-                <a:spcPts val="400"/>
-              </a:spcAft>
-            </a:pPr>
-            <a:r>
-              <a:rPr sz="900" b="0">
-                <a:solidFill>
-                  <a:srgbClr val="7A7977"/>
-                </a:solidFill>
-                <a:latin typeface="Calibri"/>
-                <a:ea typeface="Microsoft JhengHei"/>
-                <a:cs typeface="Microsoft JhengHei"/>
-              </a:rPr>
-              <a:t>國立臺灣科技大學（NTUST） · 自主移動機器人實驗室</a:t>
-            </a:r>
-          </a:p>
-        </p:txBody>
-      </p:sp>
-      <p:sp>
-        <p:nvSpPr>
-          <p:cNvPr id="9" name="TextBox 8"/>
-          <p:cNvSpPr txBox="1"/>
-          <p:nvPr/>
-        </p:nvSpPr>
-        <p:spPr>
-          <a:xfrm>
-            <a:off x="11183112" y="6473952"/>
-            <a:ext cx="457200" cy="274320"/>
-          </a:xfrm>
-          <a:prstGeom prst="rect">
-            <a:avLst/>
-          </a:prstGeom>
-          <a:noFill/>
-        </p:spPr>
-        <p:txBody>
-          <a:bodyPr wrap="square" anchor="t" lIns="36576" rIns="36576" tIns="18288" bIns="18288">
-            <a:spAutoFit/>
-          </a:bodyPr>
-          <a:lstStyle/>
-          <a:p>
-            <a:pPr algn="r">
-              <a:lnSpc>
-                <a:spcPct val="115000"/>
-              </a:lnSpc>
-              <a:spcAft>
-                <a:spcPts val="400"/>
-              </a:spcAft>
-            </a:pPr>
-            <a:r>
-              <a:rPr sz="900" b="0">
-                <a:solidFill>
-                  <a:srgbClr val="7A7977"/>
-                </a:solidFill>
-                <a:latin typeface="Calibri"/>
-                <a:ea typeface="Microsoft JhengHei"/>
-                <a:cs typeface="Microsoft JhengHei"/>
-              </a:rPr>
-              <a:t>9</a:t>
-            </a:r>
-          </a:p>
-        </p:txBody>
-      </p:sp>
-      <p:graphicFrame>
-        <p:nvGraphicFramePr>
-          <p:cNvPr id="10" name="Table 9"/>
-          <p:cNvGraphicFramePr>
-            <a:graphicFrameLocks noGrp="1"/>
-          </p:cNvGraphicFramePr>
-          <p:nvPr/>
-        </p:nvGraphicFramePr>
-        <p:xfrm>
-          <a:off x="548640" y="2286000"/>
-          <a:ext cx="11091672" cy="2011680"/>
-        </p:xfrm>
-        <a:graphic>
-          <a:graphicData uri="http://schemas.openxmlformats.org/drawingml/2006/table">
-            <a:tbl>
-              <a:tblPr firstRow="1" bandRow="1">
-                <a:tableStyleId>{5940675A-B579-460E-94D1-54222C63F5DA}</a:tableStyleId>
-              </a:tblPr>
-              <a:tblGrid>
-                <a:gridCol w="2743200"/>
-                <a:gridCol w="2103120"/>
-                <a:gridCol w="1828800"/>
-                <a:gridCol w="1828800"/>
-                <a:gridCol w="2587752"/>
-              </a:tblGrid>
-              <a:tr h="502920">
-                <a:tc>
-                  <a:txBody>
-                    <a:bodyPr wrap="square"/>
-                    <a:lstStyle/>
-                    <a:p>
-                      <a:pPr algn="l"/>
-                      <a:r>
-                        <a:rPr sz="1350" b="1">
-                          <a:solidFill>
-                            <a:srgbClr val="FFFFFF"/>
-                          </a:solidFill>
-                          <a:latin typeface="Calibri"/>
-                          <a:ea typeface="Microsoft JhengHei"/>
-                          <a:cs typeface="Microsoft JhengHei"/>
-                        </a:rPr>
-                        <a:t>避障方法</a:t>
-                      </a:r>
-                    </a:p>
-                  </a:txBody>
-                  <a:tcPr marL="73152" marR="73152" marT="36576" marB="36576" anchor="ctr">
-                    <a:solidFill>
-                      <a:srgbClr val="00549D"/>
-                    </a:solidFill>
-                  </a:tcPr>
-                </a:tc>
-                <a:tc>
-                  <a:txBody>
-                    <a:bodyPr wrap="square"/>
-                    <a:lstStyle/>
-                    <a:p>
-                      <a:pPr algn="l"/>
-                      <a:r>
-                        <a:rPr sz="1350" b="1">
-                          <a:solidFill>
-                            <a:srgbClr val="FFFFFF"/>
-                          </a:solidFill>
-                          <a:latin typeface="Calibri"/>
-                          <a:ea typeface="Microsoft JhengHei"/>
-                          <a:cs typeface="Microsoft JhengHei"/>
-                        </a:rPr>
-                        <a:t>控制器回報完成</a:t>
-                      </a:r>
-                    </a:p>
-                  </a:txBody>
-                  <a:tcPr marL="73152" marR="73152" marT="36576" marB="36576" anchor="ctr">
-                    <a:solidFill>
-                      <a:srgbClr val="00549D"/>
-                    </a:solidFill>
-                  </a:tcPr>
-                </a:tc>
-                <a:tc>
-                  <a:txBody>
-                    <a:bodyPr wrap="square"/>
-                    <a:lstStyle/>
-                    <a:p>
-                      <a:pPr algn="l"/>
-                      <a:r>
-                        <a:rPr sz="1350" b="1">
-                          <a:solidFill>
-                            <a:srgbClr val="FFFFFF"/>
-                          </a:solidFill>
-                          <a:latin typeface="Calibri"/>
-                          <a:ea typeface="Microsoft JhengHei"/>
-                          <a:cs typeface="Microsoft JhengHei"/>
-                        </a:rPr>
-                        <a:t>真的到達</a:t>
-                      </a:r>
-                    </a:p>
-                  </a:txBody>
-                  <a:tcPr marL="73152" marR="73152" marT="36576" marB="36576" anchor="ctr">
-                    <a:solidFill>
-                      <a:srgbClr val="00549D"/>
-                    </a:solidFill>
-                  </a:tcPr>
-                </a:tc>
-                <a:tc>
-                  <a:txBody>
-                    <a:bodyPr wrap="square"/>
-                    <a:lstStyle/>
-                    <a:p>
-                      <a:pPr algn="l"/>
-                      <a:r>
-                        <a:rPr sz="1350" b="1">
-                          <a:solidFill>
-                            <a:srgbClr val="FFFFFF"/>
-                          </a:solidFill>
-                          <a:latin typeface="Calibri"/>
-                          <a:ea typeface="Microsoft JhengHei"/>
-                          <a:cs typeface="Microsoft JhengHei"/>
-                        </a:rPr>
-                        <a:t>擦碰次數</a:t>
-                      </a:r>
-                    </a:p>
-                  </a:txBody>
-                  <a:tcPr marL="73152" marR="73152" marT="36576" marB="36576" anchor="ctr">
-                    <a:solidFill>
-                      <a:srgbClr val="00549D"/>
-                    </a:solidFill>
-                  </a:tcPr>
-                </a:tc>
-                <a:tc>
-                  <a:txBody>
-                    <a:bodyPr wrap="square"/>
-                    <a:lstStyle/>
-                    <a:p>
-                      <a:pPr algn="l"/>
-                      <a:r>
-                        <a:rPr sz="1350" b="1">
-                          <a:solidFill>
-                            <a:srgbClr val="FFFFFF"/>
-                          </a:solidFill>
-                          <a:latin typeface="Calibri"/>
-                          <a:ea typeface="Microsoft JhengHei"/>
-                          <a:cs typeface="Microsoft JhengHei"/>
-                        </a:rPr>
-                        <a:t>特色</a:t>
-                      </a:r>
-                    </a:p>
-                  </a:txBody>
-                  <a:tcPr marL="73152" marR="73152" marT="36576" marB="36576" anchor="ctr">
-                    <a:solidFill>
-                      <a:srgbClr val="00549D"/>
-                    </a:solidFill>
-                  </a:tcPr>
-                </a:tc>
-              </a:tr>
-              <a:tr h="502920">
-                <a:tc>
-                  <a:txBody>
-                    <a:bodyPr wrap="square"/>
-                    <a:lstStyle/>
-                    <a:p>
-                      <a:pPr algn="l"/>
-                      <a:r>
-                        <a:rPr sz="1350" b="0">
-                          <a:solidFill>
-                            <a:srgbClr val="0B0B0B"/>
-                          </a:solidFill>
-                          <a:latin typeface="Calibri"/>
-                          <a:ea typeface="Microsoft JhengHei"/>
-                          <a:cs typeface="Microsoft JhengHei"/>
-                        </a:rPr>
-                        <a:t>Nav2 DWB</a:t>
-                      </a:r>
-                    </a:p>
-                  </a:txBody>
-                  <a:tcPr marL="73152" marR="73152" marT="36576" marB="36576" anchor="ctr">
-                    <a:solidFill>
-                      <a:srgbClr val="FFFFFF"/>
-                    </a:solidFill>
-                  </a:tcPr>
-                </a:tc>
-                <a:tc>
-                  <a:txBody>
-                    <a:bodyPr wrap="square"/>
-                    <a:lstStyle/>
-                    <a:p>
-                      <a:pPr algn="ctr"/>
-                      <a:r>
-                        <a:rPr sz="1350" b="0">
-                          <a:solidFill>
-                            <a:srgbClr val="0B0B0B"/>
-                          </a:solidFill>
-                          <a:latin typeface="Calibri"/>
-                          <a:ea typeface="Microsoft JhengHei"/>
-                          <a:cs typeface="Microsoft JhengHei"/>
-                        </a:rPr>
-                        <a:t>4 / 7</a:t>
-                      </a:r>
-                    </a:p>
-                  </a:txBody>
-                  <a:tcPr marL="73152" marR="73152" marT="36576" marB="36576" anchor="ctr">
-                    <a:solidFill>
-                      <a:srgbClr val="FFFFFF"/>
-                    </a:solidFill>
-                  </a:tcPr>
-                </a:tc>
-                <a:tc>
-                  <a:txBody>
-                    <a:bodyPr wrap="square"/>
-                    <a:lstStyle/>
-                    <a:p>
-                      <a:pPr algn="ctr"/>
-                      <a:r>
-                        <a:rPr sz="1350" b="0">
-                          <a:solidFill>
-                            <a:srgbClr val="0B0B0B"/>
-                          </a:solidFill>
-                          <a:latin typeface="Calibri"/>
-                          <a:ea typeface="Microsoft JhengHei"/>
-                          <a:cs typeface="Microsoft JhengHei"/>
-                        </a:rPr>
-                        <a:t>0 / 7</a:t>
-                      </a:r>
-                    </a:p>
-                  </a:txBody>
-                  <a:tcPr marL="73152" marR="73152" marT="36576" marB="36576" anchor="ctr">
-                    <a:solidFill>
-                      <a:srgbClr val="FFFFFF"/>
-                    </a:solidFill>
-                  </a:tcPr>
-                </a:tc>
-                <a:tc>
-                  <a:txBody>
-                    <a:bodyPr wrap="square"/>
-                    <a:lstStyle/>
-                    <a:p>
-                      <a:pPr algn="ctr"/>
-                      <a:r>
-                        <a:rPr sz="1350" b="0">
-                          <a:solidFill>
-                            <a:srgbClr val="0B0B0B"/>
-                          </a:solidFill>
-                          <a:latin typeface="Calibri"/>
-                          <a:ea typeface="Microsoft JhengHei"/>
-                          <a:cs typeface="Microsoft JhengHei"/>
-                        </a:rPr>
-                        <a:t>1</a:t>
-                      </a:r>
-                    </a:p>
-                  </a:txBody>
-                  <a:tcPr marL="73152" marR="73152" marT="36576" marB="36576" anchor="ctr">
-                    <a:solidFill>
-                      <a:srgbClr val="FFFFFF"/>
-                    </a:solidFill>
-                  </a:tcPr>
-                </a:tc>
-                <a:tc>
-                  <a:txBody>
-                    <a:bodyPr wrap="square"/>
-                    <a:lstStyle/>
-                    <a:p>
-                      <a:pPr algn="l"/>
-                      <a:r>
-                        <a:rPr sz="1350" b="0">
-                          <a:solidFill>
-                            <a:srgbClr val="0B0B0B"/>
-                          </a:solidFill>
-                          <a:latin typeface="Calibri"/>
-                          <a:ea typeface="Microsoft JhengHei"/>
-                          <a:cs typeface="Microsoft JhengHei"/>
-                        </a:rPr>
-                        <a:t>最少碰撞</a:t>
-                      </a:r>
-                    </a:p>
-                  </a:txBody>
-                  <a:tcPr marL="73152" marR="73152" marT="36576" marB="36576" anchor="ctr">
-                    <a:solidFill>
-                      <a:srgbClr val="FFFFFF"/>
-                    </a:solidFill>
-                  </a:tcPr>
-                </a:tc>
-              </a:tr>
-              <a:tr h="502920">
-                <a:tc>
-                  <a:txBody>
-                    <a:bodyPr wrap="square"/>
-                    <a:lstStyle/>
-                    <a:p>
-                      <a:pPr algn="l"/>
-                      <a:r>
-                        <a:rPr sz="1350" b="0">
-                          <a:solidFill>
-                            <a:srgbClr val="0B0B0B"/>
-                          </a:solidFill>
-                          <a:latin typeface="Calibri"/>
-                          <a:ea typeface="Microsoft JhengHei"/>
-                          <a:cs typeface="Microsoft JhengHei"/>
-                        </a:rPr>
-                        <a:t>Nav2 RPP</a:t>
-                      </a:r>
-                    </a:p>
-                  </a:txBody>
-                  <a:tcPr marL="73152" marR="73152" marT="36576" marB="36576" anchor="ctr">
-                    <a:solidFill>
-                      <a:srgbClr val="F4F4F2"/>
-                    </a:solidFill>
-                  </a:tcPr>
-                </a:tc>
-                <a:tc>
-                  <a:txBody>
-                    <a:bodyPr wrap="square"/>
-                    <a:lstStyle/>
-                    <a:p>
-                      <a:pPr algn="ctr"/>
-                      <a:r>
-                        <a:rPr sz="1350" b="0">
-                          <a:solidFill>
-                            <a:srgbClr val="0B0B0B"/>
-                          </a:solidFill>
-                          <a:latin typeface="Calibri"/>
-                          <a:ea typeface="Microsoft JhengHei"/>
-                          <a:cs typeface="Microsoft JhengHei"/>
-                        </a:rPr>
-                        <a:t>3 / 7</a:t>
-                      </a:r>
-                    </a:p>
-                  </a:txBody>
-                  <a:tcPr marL="73152" marR="73152" marT="36576" marB="36576" anchor="ctr">
-                    <a:solidFill>
-                      <a:srgbClr val="F4F4F2"/>
-                    </a:solidFill>
-                  </a:tcPr>
-                </a:tc>
-                <a:tc>
-                  <a:txBody>
-                    <a:bodyPr wrap="square"/>
-                    <a:lstStyle/>
-                    <a:p>
-                      <a:pPr algn="ctr"/>
-                      <a:r>
-                        <a:rPr sz="1350" b="0">
-                          <a:solidFill>
-                            <a:srgbClr val="0B0B0B"/>
-                          </a:solidFill>
-                          <a:latin typeface="Calibri"/>
-                          <a:ea typeface="Microsoft JhengHei"/>
-                          <a:cs typeface="Microsoft JhengHei"/>
-                        </a:rPr>
-                        <a:t>1 / 7</a:t>
-                      </a:r>
-                    </a:p>
-                  </a:txBody>
-                  <a:tcPr marL="73152" marR="73152" marT="36576" marB="36576" anchor="ctr">
-                    <a:solidFill>
-                      <a:srgbClr val="F4F4F2"/>
-                    </a:solidFill>
-                  </a:tcPr>
-                </a:tc>
-                <a:tc>
-                  <a:txBody>
-                    <a:bodyPr wrap="square"/>
-                    <a:lstStyle/>
-                    <a:p>
-                      <a:pPr algn="ctr"/>
-                      <a:r>
-                        <a:rPr sz="1350" b="0">
-                          <a:solidFill>
-                            <a:srgbClr val="0B0B0B"/>
-                          </a:solidFill>
-                          <a:latin typeface="Calibri"/>
-                          <a:ea typeface="Microsoft JhengHei"/>
-                          <a:cs typeface="Microsoft JhengHei"/>
-                        </a:rPr>
-                        <a:t>9</a:t>
-                      </a:r>
-                    </a:p>
-                  </a:txBody>
-                  <a:tcPr marL="73152" marR="73152" marT="36576" marB="36576" anchor="ctr">
-                    <a:solidFill>
-                      <a:srgbClr val="F4F4F2"/>
-                    </a:solidFill>
-                  </a:tcPr>
-                </a:tc>
-                <a:tc>
-                  <a:txBody>
-                    <a:bodyPr wrap="square"/>
-                    <a:lstStyle/>
-                    <a:p>
-                      <a:pPr algn="l"/>
-                      <a:r>
-                        <a:rPr sz="1350" b="0">
-                          <a:solidFill>
-                            <a:srgbClr val="0B0B0B"/>
-                          </a:solidFill>
-                          <a:latin typeface="Calibri"/>
-                          <a:ea typeface="Microsoft JhengHei"/>
-                          <a:cs typeface="Microsoft JhengHei"/>
-                        </a:rPr>
-                        <a:t>完成主任務（誤差 4–7 cm）</a:t>
-                      </a:r>
-                    </a:p>
-                  </a:txBody>
-                  <a:tcPr marL="73152" marR="73152" marT="36576" marB="36576" anchor="ctr">
-                    <a:solidFill>
-                      <a:srgbClr val="F4F4F2"/>
-                    </a:solidFill>
-                  </a:tcPr>
-                </a:tc>
-              </a:tr>
-              <a:tr h="502920">
-                <a:tc>
-                  <a:txBody>
-                    <a:bodyPr wrap="square"/>
-                    <a:lstStyle/>
-                    <a:p>
-                      <a:pPr algn="l"/>
-                      <a:r>
-                        <a:rPr sz="1350" b="0">
-                          <a:solidFill>
-                            <a:srgbClr val="0B0B0B"/>
-                          </a:solidFill>
-                          <a:latin typeface="Calibri"/>
-                          <a:ea typeface="Microsoft JhengHei"/>
-                          <a:cs typeface="Microsoft JhengHei"/>
-                        </a:rPr>
-                        <a:t>強化學習（PPO）</a:t>
-                      </a:r>
-                    </a:p>
-                  </a:txBody>
-                  <a:tcPr marL="73152" marR="73152" marT="36576" marB="36576" anchor="ctr">
-                    <a:solidFill>
-                      <a:srgbClr val="FFFFFF"/>
-                    </a:solidFill>
-                  </a:tcPr>
-                </a:tc>
-                <a:tc>
-                  <a:txBody>
-                    <a:bodyPr wrap="square"/>
-                    <a:lstStyle/>
-                    <a:p>
-                      <a:pPr algn="ctr"/>
-                      <a:r>
-                        <a:rPr sz="1350" b="0">
-                          <a:solidFill>
-                            <a:srgbClr val="0B0B0B"/>
-                          </a:solidFill>
-                          <a:latin typeface="Calibri"/>
-                          <a:ea typeface="Microsoft JhengHei"/>
-                          <a:cs typeface="Microsoft JhengHei"/>
-                        </a:rPr>
-                        <a:t>3 / 7</a:t>
-                      </a:r>
-                    </a:p>
-                  </a:txBody>
-                  <a:tcPr marL="73152" marR="73152" marT="36576" marB="36576" anchor="ctr">
-                    <a:solidFill>
-                      <a:srgbClr val="FFFFFF"/>
-                    </a:solidFill>
-                  </a:tcPr>
-                </a:tc>
-                <a:tc>
-                  <a:txBody>
-                    <a:bodyPr wrap="square"/>
-                    <a:lstStyle/>
-                    <a:p>
-                      <a:pPr algn="ctr"/>
-                      <a:r>
-                        <a:rPr sz="1350" b="0">
-                          <a:solidFill>
-                            <a:srgbClr val="0B0B0B"/>
-                          </a:solidFill>
-                          <a:latin typeface="Calibri"/>
-                          <a:ea typeface="Microsoft JhengHei"/>
-                          <a:cs typeface="Microsoft JhengHei"/>
-                        </a:rPr>
-                        <a:t>3 / 7</a:t>
-                      </a:r>
-                    </a:p>
-                  </a:txBody>
-                  <a:tcPr marL="73152" marR="73152" marT="36576" marB="36576" anchor="ctr">
-                    <a:solidFill>
-                      <a:srgbClr val="FFFFFF"/>
-                    </a:solidFill>
-                  </a:tcPr>
-                </a:tc>
-                <a:tc>
-                  <a:txBody>
-                    <a:bodyPr wrap="square"/>
-                    <a:lstStyle/>
-                    <a:p>
-                      <a:pPr algn="ctr"/>
-                      <a:r>
-                        <a:rPr sz="1350" b="0">
-                          <a:solidFill>
-                            <a:srgbClr val="0B0B0B"/>
-                          </a:solidFill>
-                          <a:latin typeface="Calibri"/>
-                          <a:ea typeface="Microsoft JhengHei"/>
-                          <a:cs typeface="Microsoft JhengHei"/>
-                        </a:rPr>
-                        <a:t>34</a:t>
-                      </a:r>
-                    </a:p>
-                  </a:txBody>
-                  <a:tcPr marL="73152" marR="73152" marT="36576" marB="36576" anchor="ctr">
-                    <a:solidFill>
-                      <a:srgbClr val="FFFFFF"/>
-                    </a:solidFill>
-                  </a:tcPr>
-                </a:tc>
-                <a:tc>
-                  <a:txBody>
-                    <a:bodyPr wrap="square"/>
-                    <a:lstStyle/>
-                    <a:p>
-                      <a:pPr algn="l"/>
-                      <a:r>
-                        <a:rPr sz="1350" b="0">
-                          <a:solidFill>
-                            <a:srgbClr val="0B0B0B"/>
-                          </a:solidFill>
-                          <a:latin typeface="Calibri"/>
-                          <a:ea typeface="Microsoft JhengHei"/>
-                          <a:cs typeface="Microsoft JhengHei"/>
-                        </a:rPr>
-                        <a:t>最快，但窄通道易擦碰</a:t>
-                      </a:r>
-                    </a:p>
-                  </a:txBody>
-                  <a:tcPr marL="73152" marR="73152" marT="36576" marB="36576" anchor="ctr">
-                    <a:solidFill>
-                      <a:srgbClr val="FFFFFF"/>
-                    </a:solidFill>
-                  </a:tcPr>
-                </a:tc>
-              </a:tr>
-            </a:tbl>
-          </a:graphicData>
-        </a:graphic>
-      </p:graphicFrame>
-      <p:sp>
-        <p:nvSpPr>
-          <p:cNvPr id="11" name="TextBox 10"/>
-          <p:cNvSpPr txBox="1"/>
-          <p:nvPr/>
-        </p:nvSpPr>
-        <p:spPr>
-          <a:xfrm>
-            <a:off x="548640" y="4434840"/>
-            <a:ext cx="11091672" cy="384048"/>
-          </a:xfrm>
-          <a:prstGeom prst="rect">
-            <a:avLst/>
-          </a:prstGeom>
-          <a:noFill/>
-        </p:spPr>
-        <p:txBody>
-          <a:bodyPr wrap="square" anchor="t" lIns="36576" rIns="36576" tIns="18288" bIns="18288">
-            <a:spAutoFit/>
-          </a:bodyPr>
-          <a:lstStyle/>
-          <a:p>
-            <a:pPr algn="l">
-              <a:lnSpc>
-                <a:spcPct val="115000"/>
-              </a:lnSpc>
-              <a:spcAft>
-                <a:spcPts val="400"/>
-              </a:spcAft>
-            </a:pPr>
-            <a:r>
-              <a:rPr sz="1700" b="1">
-                <a:solidFill>
-                  <a:srgbClr val="0B0B0B"/>
-                </a:solidFill>
-                <a:latin typeface="Calibri"/>
-                <a:ea typeface="Microsoft JhengHei"/>
-                <a:cs typeface="Microsoft JhengHei"/>
-              </a:rPr>
-              <a:t>到達率偏低的原因</a:t>
-            </a:r>
-          </a:p>
-        </p:txBody>
-      </p:sp>
-      <p:sp>
-        <p:nvSpPr>
-          <p:cNvPr id="12" name="TextBox 11"/>
-          <p:cNvSpPr txBox="1"/>
-          <p:nvPr/>
-        </p:nvSpPr>
-        <p:spPr>
-          <a:xfrm>
-            <a:off x="841248" y="4846320"/>
-            <a:ext cx="10789920" cy="1371600"/>
-          </a:xfrm>
-          <a:prstGeom prst="rect">
-            <a:avLst/>
-          </a:prstGeom>
-          <a:noFill/>
-        </p:spPr>
-        <p:txBody>
-          <a:bodyPr wrap="square" anchor="t" lIns="36576" rIns="36576" tIns="18288" bIns="18288">
-            <a:spAutoFit/>
-          </a:bodyPr>
-          <a:lstStyle/>
-          <a:p>
-            <a:pPr algn="l">
-              <a:lnSpc>
-                <a:spcPct val="115000"/>
-              </a:lnSpc>
-              <a:spcAft>
-                <a:spcPts val="600"/>
-              </a:spcAft>
-            </a:pPr>
-            <a:r>
-              <a:rPr sz="1400" b="0">
-                <a:solidFill>
-                  <a:srgbClr val="0B0B0B"/>
-                </a:solidFill>
-                <a:latin typeface="Calibri"/>
-                <a:ea typeface="Microsoft JhengHei"/>
-                <a:cs typeface="Microsoft JhengHei"/>
-              </a:rPr>
-              <a:t>•  走得慢：S1 約 0.13 m/s，轉彎時更慢，大場地的長路段常在 150 秒內走不完</a:t>
-            </a:r>
-          </a:p>
-          <a:p>
-            <a:pPr algn="l">
-              <a:lnSpc>
-                <a:spcPct val="115000"/>
-              </a:lnSpc>
-              <a:spcAft>
-                <a:spcPts val="600"/>
-              </a:spcAft>
-            </a:pPr>
-            <a:r>
-              <a:rPr sz="1400" b="0">
-                <a:solidFill>
-                  <a:srgbClr val="0B0B0B"/>
-                </a:solidFill>
-                <a:latin typeface="Calibri"/>
-                <a:ea typeface="Microsoft JhengHei"/>
-                <a:cs typeface="Microsoft JhengHei"/>
-              </a:rPr>
-              <a:t>•  定位誤差會累積：長時間運行後 SLAM 誤差可達 1 m 以上</a:t>
-            </a:r>
-          </a:p>
-          <a:p>
-            <a:pPr algn="l">
-              <a:lnSpc>
-                <a:spcPct val="115000"/>
-              </a:lnSpc>
-              <a:spcAft>
-                <a:spcPts val="600"/>
-              </a:spcAft>
-            </a:pPr>
-            <a:r>
-              <a:rPr sz="1400" b="0">
-                <a:solidFill>
-                  <a:srgbClr val="0B0B0B"/>
-                </a:solidFill>
-                <a:latin typeface="Calibri"/>
-                <a:ea typeface="Microsoft JhengHei"/>
-                <a:cs typeface="Microsoft JhengHei"/>
-              </a:rPr>
-              <a:t>•  強化學習還沒針對窄通道訓練</a:t>
+              <a:t>左：調整前　右：調整後（Gazebo 量測，官方質量 625 g 時）。改成實機重量 920 g 並重調後：前進晃動約 2.5°、最大傾斜約 5°、前進約 0.11 m/s</a:t>
             </a:r>
           </a:p>
         </p:txBody>

--- a/docs/DOGZILLA_專案簡報.pptx
+++ b/docs/DOGZILLA_專案簡報.pptx
@@ -4959,7 +4959,7 @@
           <p:nvPr/>
         </p:nvPicPr>
         <p:blipFill>
-          <a:blip r:embed="rId2"/>
+          <a:blip r:embed="rId4"/>
           <a:stretch>
             <a:fillRect/>
           </a:stretch>
@@ -12682,7 +12682,7 @@
           <p:nvPr/>
         </p:nvPicPr>
         <p:blipFill>
-          <a:blip r:embed="rId3"/>
+          <a:blip r:embed="rId4"/>
           <a:stretch>
             <a:fillRect/>
           </a:stretch>
@@ -12736,7 +12736,7 @@
                 <a:ea typeface="Microsoft JhengHei"/>
                 <a:cs typeface="Microsoft JhengHei"/>
               </a:rPr>
-              <a:t>官方模型（站立姿勢，圖中 LiDAR 在官方位置）</a:t>
+              <a:t>模擬用模型（站立姿勢）：LiDAR 在採用的位置，支架為示意</a:t>
             </a:r>
           </a:p>
         </p:txBody>

--- a/docs/DOGZILLA_專案簡報.pptx
+++ b/docs/DOGZILLA_專案簡報.pptx
@@ -594,22 +594,22 @@
           <a:lstStyle/>
           <a:p>
             <a:r>
-              <a:t>左邊是目前的限制，右邊是對應的下一步。</a:t>
-            </a:r>
-          </a:p>
-          <a:p>
-            <a:r>
-              <a:t>最重要的是上實機。模擬裡的總重已經改成實機秤重，但重量在機身各處怎麼分布是推估的，速度和晃動也要用實機重新量。</a:t>
-            </a:r>
-          </a:p>
-          <a:p>
-            <a:r>
-              <a:t>第二是速度：現在為了不翻倒，速度指令上限設在每秒 15 公分，實際只有約 8 公分。轉彎時自動降速的設定是舊重量時加的，新重量下可以放寬，放寬後重新訓練應該能走快。</a:t>
-            </a:r>
-          </a:p>
-          <a:p>
-            <a:r>
-              <a:t>地面點過濾和安全濾波都可以直接搬到實機的樹莓派上用。</a:t>
+              <a:t>左邊是目前的限制，右邊是接下來要做的事，全部都只需要模擬。</a:t>
+            </a:r>
+          </a:p>
+          <a:p>
+            <a:r>
+              <a:t>訓練用的是一個簡化的平面環境，幾分鐘就能跑幾十萬步；裡面的隨機場景目前沒有 60 公分的窄門口和密集柱子，這是第一個要補的。</a:t>
+            </a:r>
+          </a:p>
+          <a:p>
+            <a:r>
+              <a:t>平面環境裡表現好，不代表放進 Gazebo 也好：機身會晃、定位有誤差、還會翻倒，所以每次都要放進 Gazebo 跑 7 點測試。</a:t>
+            </a:r>
+          </a:p>
+          <a:p>
+            <a:r>
+              <a:t>之前幾輪訓練的經驗都寫在技術文件裡，例如速度上限為什麼是每秒 15 公分。</a:t>
             </a:r>
           </a:p>
         </p:txBody>
@@ -1304,27 +1304,27 @@
           <a:lstStyle/>
           <a:p>
             <a:r>
-              <a:t>這是投影片第一頁的場景：機器狗從左邊出發，目標在右上角。</a:t>
-            </a:r>
-          </a:p>
-          <a:p>
-            <a:r>
-              <a:t>藍線是機器狗實際走過的路：先往上繞過長方塊，從中間穿過，再從下面繞過圓柱，最後到右上角。</a:t>
-            </a:r>
-          </a:p>
-          <a:p>
-            <a:r>
-              <a:t>這次用的是強化學習避障。約 108 秒到達，全程沒有擦碰，離障礙物最近 13 公分。</a:t>
-            </a:r>
-          </a:p>
-          <a:p>
-            <a:r>
-              <a:t>停下時離目標 26 公分：強化學習控制器的設定是進入目標 25 公分內就算到達，所以不是誤差大，而是到達範圍設得寬。</a:t>
-            </a:r>
-          </a:p>
-          <a:p>
-            <a:r>
-              <a:t>同樣的測試跑了兩次，另一次是 117 秒，結果一致。</a:t>
+              <a:t>這是新的預設測試場地，比投影片第一頁的場景難很多。</a:t>
+            </a:r>
+          </a:p>
+          <a:p>
+            <a:r>
+              <a:t>機器狗從左邊出發，要先往下繞過第一道牆、再往上繞過第二道牆，穿過只有 60 公分寬的門口，門後面還有一個死巷，第一個目標就在死巷的正後方。</a:t>
+            </a:r>
+          </a:p>
+          <a:p>
+            <a:r>
+              <a:t>圖上的數字是 7 個目標點的順序，走完一個接著走下一個，全部用模擬器的真實位置評分。</a:t>
+            </a:r>
+          </a:p>
+          <a:p>
+            <a:r>
+              <a:t>藍線是目前附的基準策略走的路：它只訓練了 10 萬步，卡在第一道牆的缺口前面，240 秒內走不出第一個房間。到達的兩個目標，是剛好就在起點旁邊的那兩個。</a:t>
+            </a:r>
+          </a:p>
+          <a:p>
+            <a:r>
+              <a:t>另外還有一個密集柱子的場地（clutter），21 根柱子交錯排列，沒有一條直線可以走。</a:t>
             </a:r>
           </a:p>
         </p:txBody>
@@ -1569,27 +1569,22 @@
           <a:lstStyle/>
           <a:p>
             <a:r>
-              <a:t>這是比較嚴格的測試：同一場地連續走 7 個目標點，每段限時 150 秒，用模擬器的真實位置評分。</a:t>
-            </a:r>
-          </a:p>
-          <a:p>
-            <a:r>
-              <a:t>「控制器回報完成」是導航程式自己認為到了；「真的到達」是實際離目標 35 公分以內。</a:t>
-            </a:r>
-          </a:p>
-          <a:p>
-            <a:r>
-              <a:t>強化學習跑了兩次，兩次都是 7 個目標全部到達，沒有擦碰，也沒有翻倒。</a:t>
-            </a:r>
-          </a:p>
-          <a:p>
-            <a:r>
-              <a:t>要誠實說明兩點。第一，進步主要來自模型變穩：改成實機重量、調整 LiDAR 位置和關節參數之後，舊的權重也能 7 個全到；新訓練的版本只快了一點。</a:t>
-            </a:r>
-          </a:p>
-          <a:p>
-            <a:r>
-              <a:t>第二，這只在一個場地驗證過，而且走得慢，實際約每秒 8 公分。傳統的 Nav2 方法這次沒有重新調整，所以表現和之前差不多。</a:t>
+              <a:t>這是目前的起點，不是成果。同一場地連續走 7 個目標點，用模擬器的真實位置評分。</a:t>
+            </a:r>
+          </a:p>
+          <a:p>
+            <a:r>
+              <a:t>強化學習這邊，附的只是一份訓練 10 萬步的基準策略。因為有安全保護，它不會撞牆，但常常卡在缺口或柱子前面，在時限內走不到。</a:t>
+            </a:r>
+          </a:p>
+          <a:p>
+            <a:r>
+              <a:t>傳統的 Nav2 方法在這個場地也過不了。</a:t>
+            </a:r>
+          </a:p>
+          <a:p>
+            <a:r>
+              <a:t>所以接下來的工作很明確：把強化學習練到能通過這兩個場地，7 個目標都到、不擦碰、不翻倒，而且重跑幾次都一樣。</a:t>
             </a:r>
           </a:p>
         </p:txBody>
@@ -5228,7 +5223,7 @@
                 <a:ea typeface="Microsoft JhengHei"/>
                 <a:cs typeface="Microsoft JhengHei"/>
               </a:rPr>
-              <a:t>避障測試結果</a:t>
+              <a:t>避障測試：目前的起點</a:t>
             </a:r>
           </a:p>
         </p:txBody>
@@ -5307,7 +5302,7 @@
                 <a:ea typeface="Microsoft JhengHei"/>
                 <a:cs typeface="Microsoft JhengHei"/>
               </a:rPr>
-              <a:t>連續走 7 個目標點：強化學習兩次都是 7 / 7 到達，沒有擦碰、沒有翻倒</a:t>
+              <a:t>連續走 7 個目標點：現有的方法都還過不了新場地，這是接下來的工作</a:t>
             </a:r>
           </a:p>
         </p:txBody>
@@ -5441,7 +5436,7 @@
                           <a:ea typeface="Microsoft JhengHei"/>
                           <a:cs typeface="Microsoft JhengHei"/>
                         </a:rPr>
-                        <a:t>避障方法</a:t>
+                        <a:t>場地 / 避障方法</a:t>
                       </a:r>
                     </a:p>
                   </a:txBody>
@@ -5568,7 +5563,7 @@
                           <a:ea typeface="Microsoft JhengHei"/>
                           <a:cs typeface="Microsoft JhengHei"/>
                         </a:rPr>
-                        <a:t>強化學習（PPO）</a:t>
+                        <a:t>窄通道：強化學習（基準）</a:t>
                       </a:r>
                     </a:p>
                   </a:txBody>
@@ -5593,7 +5588,7 @@
                           <a:ea typeface="Microsoft JhengHei"/>
                           <a:cs typeface="Microsoft JhengHei"/>
                         </a:rPr>
-                        <a:t>7 / 7</a:t>
+                        <a:t>2 / 7</a:t>
                       </a:r>
                     </a:p>
                   </a:txBody>
@@ -5618,7 +5613,7 @@
                           <a:ea typeface="Microsoft JhengHei"/>
                           <a:cs typeface="Microsoft JhengHei"/>
                         </a:rPr>
-                        <a:t>7 / 7</a:t>
+                        <a:t>2 / 7</a:t>
                       </a:r>
                     </a:p>
                   </a:txBody>
@@ -5668,7 +5663,7 @@
                           <a:ea typeface="Microsoft JhengHei"/>
                           <a:cs typeface="Microsoft JhengHei"/>
                         </a:rPr>
-                        <a:t>兩次結果相同，每段約 80 秒</a:t>
+                        <a:t>走不出第一個房間</a:t>
                       </a:r>
                     </a:p>
                   </a:txBody>
@@ -5695,32 +5690,7 @@
                           <a:ea typeface="Microsoft JhengHei"/>
                           <a:cs typeface="Microsoft JhengHei"/>
                         </a:rPr>
-                        <a:t>Nav2 RPP</a:t>
-                      </a:r>
-                    </a:p>
-                  </a:txBody>
-                  <a:tcPr marL="73152" marR="73152" marT="36576" marB="36576" anchor="ctr">
-                    <a:solidFill>
-                      <a:srgbClr val="F4F4F2"/>
-                    </a:solidFill>
-                  </a:tcPr>
-                </a:tc>
-                <a:tc>
-                  <a:txBody>
-                    <a:bodyPr wrap="square"/>
-                    <a:lstStyle/>
-                    <a:p>
-                      <a:pPr algn="ctr"/>
-                      <a:r>
-                        <a:rPr sz="1350" b="0">
-                          <a:solidFill>
-                            <a:srgbClr val="0B0B0B"/>
-                          </a:solidFill>
-                          <a:latin typeface="Calibri"/>
-                          <a:ea typeface="Microsoft JhengHei"/>
-                          <a:cs typeface="Microsoft JhengHei"/>
-                        </a:rPr>
-                        <a:t>3 / 7</a:t>
+                        <a:t>密集柱子：強化學習（基準）</a:t>
                       </a:r>
                     </a:p>
                   </a:txBody>
@@ -5770,7 +5740,32 @@
                           <a:ea typeface="Microsoft JhengHei"/>
                           <a:cs typeface="Microsoft JhengHei"/>
                         </a:rPr>
-                        <a:t>3</a:t>
+                        <a:t>1 / 7</a:t>
+                      </a:r>
+                    </a:p>
+                  </a:txBody>
+                  <a:tcPr marL="73152" marR="73152" marT="36576" marB="36576" anchor="ctr">
+                    <a:solidFill>
+                      <a:srgbClr val="F4F4F2"/>
+                    </a:solidFill>
+                  </a:tcPr>
+                </a:tc>
+                <a:tc>
+                  <a:txBody>
+                    <a:bodyPr wrap="square"/>
+                    <a:lstStyle/>
+                    <a:p>
+                      <a:pPr algn="ctr"/>
+                      <a:r>
+                        <a:rPr sz="1350" b="0">
+                          <a:solidFill>
+                            <a:srgbClr val="0B0B0B"/>
+                          </a:solidFill>
+                          <a:latin typeface="Calibri"/>
+                          <a:ea typeface="Microsoft JhengHei"/>
+                          <a:cs typeface="Microsoft JhengHei"/>
+                        </a:rPr>
+                        <a:t>0</a:t>
                       </a:r>
                     </a:p>
                   </a:txBody>
@@ -5795,7 +5790,7 @@
                           <a:ea typeface="Microsoft JhengHei"/>
                           <a:cs typeface="Microsoft JhengHei"/>
                         </a:rPr>
-                        <a:t>走走停停，定位誤差累積</a:t>
+                        <a:t>卡在柱子之間</a:t>
                       </a:r>
                     </a:p>
                   </a:txBody>
@@ -5822,7 +5817,7 @@
                           <a:ea typeface="Microsoft JhengHei"/>
                           <a:cs typeface="Microsoft JhengHei"/>
                         </a:rPr>
-                        <a:t>Nav2 DWB</a:t>
+                        <a:t>窄通道：Nav2 RPP</a:t>
                       </a:r>
                     </a:p>
                   </a:txBody>
@@ -5897,7 +5892,7 @@
                           <a:ea typeface="Microsoft JhengHei"/>
                           <a:cs typeface="Microsoft JhengHei"/>
                         </a:rPr>
-                        <a:t>6</a:t>
+                        <a:t>0</a:t>
                       </a:r>
                     </a:p>
                   </a:txBody>
@@ -5922,7 +5917,7 @@
                           <a:ea typeface="Microsoft JhengHei"/>
                           <a:cs typeface="Microsoft JhengHei"/>
                         </a:rPr>
-                        <a:t>同上；未針對新重量重調</a:t>
+                        <a:t>中途放棄，定位誤差大</a:t>
                       </a:r>
                     </a:p>
                   </a:txBody>
@@ -6020,7 +6015,7 @@
                 <a:ea typeface="Microsoft JhengHei"/>
                 <a:cs typeface="Microsoft JhengHei"/>
               </a:rPr>
-              <a:t>•  模型改成實機重量並重調後走路變穩：同一份舊的強化學習權重，從 3 / 7（且翻倒）變成 7 / 7</a:t>
+              <a:t>•  基準策略只訓練 10 萬步：有安全保護所以不會撞，但卡在缺口或柱子前，走不到目標</a:t>
             </a:r>
           </a:p>
           <a:p>
@@ -6041,7 +6036,7 @@
                 <a:ea typeface="Microsoft JhengHei"/>
                 <a:cs typeface="Microsoft JhengHei"/>
               </a:rPr>
-              <a:t>•  強化學習走得平順，定位誤差全程約 0.1 m；Nav2 走走停停，定位誤差累積到 1 m 以上</a:t>
+              <a:t>•  到達的幾段，都是目標剛好在出發點附近、不用穿過障礙物的路段</a:t>
             </a:r>
           </a:p>
           <a:p>
@@ -6062,7 +6057,7 @@
                 <a:ea typeface="Microsoft JhengHei"/>
                 <a:cs typeface="Microsoft JhengHei"/>
               </a:rPr>
-              <a:t>•  只在這一個場地驗證過；Nav2 各跑一次。強化學習實際速度約 0.08 m/s，還是慢</a:t>
+              <a:t>•  各為單次執行；每段限時 240 秒（窄通道）或 150 秒（密集柱子）</a:t>
             </a:r>
           </a:p>
         </p:txBody>
@@ -6312,7 +6307,7 @@
                 <a:ea typeface="Microsoft JhengHei"/>
                 <a:cs typeface="Microsoft JhengHei"/>
               </a:rPr>
-              <a:t>模擬已經把系統做通，接下來提高可靠度並搬到實機</a:t>
+              <a:t>模型與整條流程已經備好，接下來把避障練好（只需要模擬）</a:t>
             </a:r>
           </a:p>
         </p:txBody>
@@ -6488,7 +6483,7 @@
                 <a:ea typeface="Microsoft JhengHei"/>
                 <a:cs typeface="Microsoft JhengHei"/>
               </a:rPr>
-              <a:t>•  走得慢：實際約 0.08 m/s（再快，急停時會翻倒）</a:t>
+              <a:t>•  避障還過不了新場地（基準策略常卡住）</a:t>
             </a:r>
           </a:p>
           <a:p>
@@ -6509,7 +6504,7 @@
                 <a:ea typeface="Microsoft JhengHei"/>
                 <a:cs typeface="Microsoft JhengHei"/>
               </a:rPr>
-              <a:t>•  只在一個場地驗證過，測試次數少</a:t>
+              <a:t>•  走得慢：實際約 0.08 m/s（再快，急停時會翻倒）</a:t>
             </a:r>
           </a:p>
           <a:p>
@@ -6669,7 +6664,7 @@
                 <a:ea typeface="Microsoft JhengHei"/>
                 <a:cs typeface="Microsoft JhengHei"/>
               </a:rPr>
-              <a:t>•  部署到實機（樹莓派），重測速度與晃動</a:t>
+              <a:t>•  訓練久一點，並把窄門口、密集柱子加進訓練場景</a:t>
             </a:r>
           </a:p>
           <a:p>
@@ -6690,7 +6685,7 @@
                 <a:ea typeface="Microsoft JhengHei"/>
                 <a:cs typeface="Microsoft JhengHei"/>
               </a:rPr>
-              <a:t>•  放寬轉彎降速後重新訓練，讓它走快一點</a:t>
+              <a:t>•  調整獎勵，讓策略學會對準門口再通過</a:t>
             </a:r>
           </a:p>
           <a:p>
@@ -6711,7 +6706,7 @@
                 <a:ea typeface="Microsoft JhengHei"/>
                 <a:cs typeface="Microsoft JhengHei"/>
               </a:rPr>
-              <a:t>•  換場地、多跑幾次，確認避障的穩定性</a:t>
+              <a:t>•  每次都放進 Gazebo 跑 7 點測試，重跑確認</a:t>
             </a:r>
           </a:p>
           <a:p>
@@ -6732,7 +6727,7 @@
                 <a:ea typeface="Microsoft JhengHei"/>
                 <a:cs typeface="Microsoft JhengHei"/>
               </a:rPr>
-              <a:t>•  量實機的重量分布，回頭修正模型</a:t>
+              <a:t>•  放寬轉彎降速後重新訓練，讓它走快一點</a:t>
             </a:r>
           </a:p>
         </p:txBody>
@@ -14603,7 +14598,7 @@
                 <a:ea typeface="Microsoft JhengHei"/>
                 <a:cs typeface="Microsoft JhengHei"/>
               </a:rPr>
-              <a:t>主任務成果</a:t>
+              <a:t>測試場地：比投影片場景更難</a:t>
             </a:r>
           </a:p>
         </p:txBody>
@@ -14682,7 +14677,7 @@
                 <a:ea typeface="Microsoft JhengHei"/>
                 <a:cs typeface="Microsoft JhengHei"/>
               </a:rPr>
-              <a:t>在投影片的障礙物場景中，機器狗自己繞過障礙物走到右上角目標</a:t>
+              <a:t>蛇行的窄通道、0.6 m 的門口、門後的死巷；機器狗要連續走到 7 個目標點</a:t>
             </a:r>
           </a:p>
         </p:txBody>
@@ -14792,7 +14787,7 @@
         <p:spPr>
           <a:xfrm>
             <a:off x="548640" y="2148840"/>
-            <a:ext cx="6543040" cy="4206240"/>
+            <a:ext cx="6543040" cy="3998524"/>
           </a:xfrm>
           <a:prstGeom prst="rect">
             <a:avLst/>
@@ -14868,7 +14863,7 @@
                 <a:ea typeface="Microsoft JhengHei"/>
                 <a:cs typeface="Microsoft JhengHei"/>
               </a:rPr>
-              <a:t>26</a:t>
+              <a:t>0.6</a:t>
             </a:r>
             <a:r>
               <a:rPr sz="1600" b="1">
@@ -14879,7 +14874,7 @@
                 <a:ea typeface="Microsoft JhengHei"/>
                 <a:cs typeface="Microsoft JhengHei"/>
               </a:rPr>
-              <a:t>  cm</a:t>
+              <a:t>  m</a:t>
             </a:r>
           </a:p>
         </p:txBody>
@@ -14923,7 +14918,7 @@
                 <a:ea typeface="Microsoft JhengHei"/>
                 <a:cs typeface="Microsoft JhengHei"/>
               </a:rPr>
-              <a:t>停下時離目標（到達範圍設定為 25 cm）</a:t>
+              <a:t>最窄的門口（缺口 0.85 m）</a:t>
             </a:r>
           </a:p>
         </p:txBody>
@@ -14997,7 +14992,7 @@
                 <a:ea typeface="Microsoft JhengHei"/>
                 <a:cs typeface="Microsoft JhengHei"/>
               </a:rPr>
-              <a:t>108</a:t>
+              <a:t>12</a:t>
             </a:r>
             <a:r>
               <a:rPr sz="1600" b="1">
@@ -15008,7 +15003,7 @@
                 <a:ea typeface="Microsoft JhengHei"/>
                 <a:cs typeface="Microsoft JhengHei"/>
               </a:rPr>
-              <a:t>  s</a:t>
+              <a:t>  m</a:t>
             </a:r>
           </a:p>
         </p:txBody>
@@ -15052,7 +15047,7 @@
                 <a:ea typeface="Microsoft JhengHei"/>
                 <a:cs typeface="Microsoft JhengHei"/>
               </a:rPr>
-              <a:t>到達時間</a:t>
+              <a:t>第 1 段要蛇行走的距離</a:t>
             </a:r>
           </a:p>
         </p:txBody>
@@ -15126,7 +15121,7 @@
                 <a:ea typeface="Microsoft JhengHei"/>
                 <a:cs typeface="Microsoft JhengHei"/>
               </a:rPr>
-              <a:t>0</a:t>
+              <a:t>2</a:t>
             </a:r>
             <a:r>
               <a:rPr sz="1600" b="1">
@@ -15137,7 +15132,7 @@
                 <a:ea typeface="Microsoft JhengHei"/>
                 <a:cs typeface="Microsoft JhengHei"/>
               </a:rPr>
-              <a:t>  次</a:t>
+              <a:t>  / 7</a:t>
             </a:r>
           </a:p>
         </p:txBody>
@@ -15181,7 +15176,7 @@
                 <a:ea typeface="Microsoft JhengHei"/>
                 <a:cs typeface="Microsoft JhengHei"/>
               </a:rPr>
-              <a:t>擦碰（離障礙物最近 0.13 m）</a:t>
+              <a:t>目前基準策略到達的目標數</a:t>
             </a:r>
           </a:p>
         </p:txBody>
@@ -15225,7 +15220,7 @@
                 <a:ea typeface="Microsoft JhengHei"/>
                 <a:cs typeface="Microsoft JhengHei"/>
               </a:rPr>
-              <a:t>使用強化學習（PPO）避障；模擬器記錄的真實位置。另一次執行為 117 s</a:t>
+              <a:t>藍線：基準策略（只訓練 10 萬步）走過的路徑，卡在第一道牆的缺口前</a:t>
             </a:r>
           </a:p>
         </p:txBody>

--- a/docs/DOGZILLA_專案簡報.pptx
+++ b/docs/DOGZILLA_專案簡報.pptx
@@ -1309,7 +1309,7 @@
           </a:p>
           <a:p>
             <a:r>
-              <a:t>機器狗從左邊出發，要先往下繞過第一道牆、再往上繞過第二道牆，穿過只有 60 公分寬的門口，門後面還有一個死巷，第一個目標就在死巷的正後方。</a:t>
+              <a:t>機器狗從左邊出發，要先往下繞過第一道牆、再往上繞過第二道牆（牆和圍牆之間的缺口寬 1.2 公尺），穿過只有 60 公分寬的門口，門後面還有一個死巷，第一個目標就在死巷的正後方。</a:t>
             </a:r>
           </a:p>
           <a:p>
@@ -1319,7 +1319,7 @@
           </a:p>
           <a:p>
             <a:r>
-              <a:t>藍線是目前附的基準策略走的路：它只訓練了 10 萬步，卡在第一道牆的缺口前面，240 秒內走不出第一個房間。到達的兩個目標，是剛好就在起點旁邊的那兩個。</a:t>
+              <a:t>藍線是目前附的基準策略走的路：它只訓練了 10 萬步，在第一個缺口前猶豫了很久才過去，之後一直停在 60 公分的門口前面過不去。7 個目標到了 3 個，都是門口這一側的；門後面的 3 個一個都沒到。</a:t>
             </a:r>
           </a:p>
           <a:p>
@@ -5588,7 +5588,7 @@
                           <a:ea typeface="Microsoft JhengHei"/>
                           <a:cs typeface="Microsoft JhengHei"/>
                         </a:rPr>
-                        <a:t>2 / 7</a:t>
+                        <a:t>3 / 7</a:t>
                       </a:r>
                     </a:p>
                   </a:txBody>
@@ -5613,7 +5613,7 @@
                           <a:ea typeface="Microsoft JhengHei"/>
                           <a:cs typeface="Microsoft JhengHei"/>
                         </a:rPr>
-                        <a:t>2 / 7</a:t>
+                        <a:t>3 / 7</a:t>
                       </a:r>
                     </a:p>
                   </a:txBody>
@@ -5663,7 +5663,7 @@
                           <a:ea typeface="Microsoft JhengHei"/>
                           <a:cs typeface="Microsoft JhengHei"/>
                         </a:rPr>
-                        <a:t>走不出第一個房間</a:t>
+                        <a:t>過不了 0.6 m 的門口</a:t>
                       </a:r>
                     </a:p>
                   </a:txBody>
@@ -5842,7 +5842,7 @@
                           <a:ea typeface="Microsoft JhengHei"/>
                           <a:cs typeface="Microsoft JhengHei"/>
                         </a:rPr>
-                        <a:t>1 / 7</a:t>
+                        <a:t>2 / 7</a:t>
                       </a:r>
                     </a:p>
                   </a:txBody>
@@ -5892,7 +5892,7 @@
                           <a:ea typeface="Microsoft JhengHei"/>
                           <a:cs typeface="Microsoft JhengHei"/>
                         </a:rPr>
-                        <a:t>0</a:t>
+                        <a:t>2</a:t>
                       </a:r>
                     </a:p>
                   </a:txBody>
@@ -6015,7 +6015,7 @@
                 <a:ea typeface="Microsoft JhengHei"/>
                 <a:cs typeface="Microsoft JhengHei"/>
               </a:rPr>
-              <a:t>•  基準策略只訓練 10 萬步：有安全保護所以不會撞，但卡在缺口或柱子前，走不到目標</a:t>
+              <a:t>•  基準策略只訓練 10 萬步：有安全保護所以不會撞，但卡在門口或柱子前，走不到目標</a:t>
             </a:r>
           </a:p>
           <a:p>
@@ -6036,7 +6036,7 @@
                 <a:ea typeface="Microsoft JhengHei"/>
                 <a:cs typeface="Microsoft JhengHei"/>
               </a:rPr>
-              <a:t>•  到達的幾段，都是目標剛好在出發點附近、不用穿過障礙物的路段</a:t>
+              <a:t>•  窄通道到達的 3 段都在門口這一側；門後的 3 個目標都沒到</a:t>
             </a:r>
           </a:p>
           <a:p>
@@ -6483,7 +6483,7 @@
                 <a:ea typeface="Microsoft JhengHei"/>
                 <a:cs typeface="Microsoft JhengHei"/>
               </a:rPr>
-              <a:t>•  避障還過不了新場地（基準策略常卡住）</a:t>
+              <a:t>•  避障還過不了新場地（卡在窄門口、柱子之間）</a:t>
             </a:r>
           </a:p>
           <a:p>
@@ -14677,7 +14677,7 @@
                 <a:ea typeface="Microsoft JhengHei"/>
                 <a:cs typeface="Microsoft JhengHei"/>
               </a:rPr>
-              <a:t>蛇行的窄通道、0.6 m 的門口、門後的死巷；機器狗要連續走到 7 個目標點</a:t>
+              <a:t>蛇行繞過兩道長牆、穿過 0.6 m 的門口、門後還有死巷；機器狗要連續走到 7 個目標點</a:t>
             </a:r>
           </a:p>
         </p:txBody>
@@ -14918,7 +14918,7 @@
                 <a:ea typeface="Microsoft JhengHei"/>
                 <a:cs typeface="Microsoft JhengHei"/>
               </a:rPr>
-              <a:t>最窄的門口（缺口 0.85 m）</a:t>
+              <a:t>最窄的門口（長牆旁的缺口 1.2 m）</a:t>
             </a:r>
           </a:p>
         </p:txBody>
@@ -14992,7 +14992,7 @@
                 <a:ea typeface="Microsoft JhengHei"/>
                 <a:cs typeface="Microsoft JhengHei"/>
               </a:rPr>
-              <a:t>12</a:t>
+              <a:t>11</a:t>
             </a:r>
             <a:r>
               <a:rPr sz="1600" b="1">
@@ -15121,7 +15121,7 @@
                 <a:ea typeface="Microsoft JhengHei"/>
                 <a:cs typeface="Microsoft JhengHei"/>
               </a:rPr>
-              <a:t>2</a:t>
+              <a:t>3</a:t>
             </a:r>
             <a:r>
               <a:rPr sz="1600" b="1">
@@ -15220,7 +15220,7 @@
                 <a:ea typeface="Microsoft JhengHei"/>
                 <a:cs typeface="Microsoft JhengHei"/>
               </a:rPr>
-              <a:t>藍線：基準策略（只訓練 10 萬步）走過的路徑，卡在第一道牆的缺口前</a:t>
+              <a:t>藍線：基準策略（只訓練 10 萬步）走過的路徑，始終過不了 0.6 m 的門口</a:t>
             </a:r>
           </a:p>
         </p:txBody>

--- a/docs/DOGZILLA_專案簡報.pptx
+++ b/docs/DOGZILLA_專案簡報.pptx
@@ -1319,12 +1319,12 @@
           </a:p>
           <a:p>
             <a:r>
-              <a:t>藍線是目前附的基準策略走的路：它只訓練了 10 萬步，在第一個缺口前猶豫了很久才過去，之後一直停在 60 公分的門口前面過不去。7 個目標到了 3 個，都是門口這一側的；門後面的 3 個一個都沒到。</a:t>
-            </a:r>
-          </a:p>
-          <a:p>
-            <a:r>
-              <a:t>另外還有一個密集柱子的場地（clutter），21 根柱子交錯排列，沒有一條直線可以走。</a:t>
+              <a:t>另外還有兩個場地：一個是 21 根柱子交錯排列的密集障礙物場地；一個是照一篇四足機器人路徑規劃論文的地圖建的，10 公尺見方，有 16 塊障礙物和論文裡提到的 L 形陷阱。</a:t>
+            </a:r>
+          </a:p>
+          <a:p>
+            <a:r>
+              <a:t>場地都定義在同一個檔案裡，要加新場地只要加一段定義、跑一個指令。</a:t>
             </a:r>
           </a:p>
         </p:txBody>
@@ -1569,22 +1569,22 @@
           <a:lstStyle/>
           <a:p>
             <a:r>
-              <a:t>這是目前的起點，不是成果。同一場地連續走 7 個目標點，用模擬器的真實位置評分。</a:t>
-            </a:r>
-          </a:p>
-          <a:p>
-            <a:r>
-              <a:t>強化學習這邊，附的只是一份訓練 10 萬步的基準策略。因為有安全保護，它不會撞牆，但常常卡在缺口或柱子前面，在時限內走不到。</a:t>
-            </a:r>
-          </a:p>
-          <a:p>
-            <a:r>
-              <a:t>傳統的 Nav2 方法在這個場地也過不了。</a:t>
-            </a:r>
-          </a:p>
-          <a:p>
-            <a:r>
-              <a:t>所以接下來的工作很明確：把強化學習練到能通過這兩個場地，7 個目標都到、不擦碰、不翻倒，而且重跑幾次都一樣。</a:t>
+              <a:t>這頁是目前的狀況，不是成果。同一場地連續走 7 個目標點，用模擬器的真實位置評分。</a:t>
+            </a:r>
+          </a:p>
+          <a:p>
+            <a:r>
+              <a:t>「控制器回報完成」是導航程式自己認為到了；「真的到達」是實際離目標 35 公分以內。兩者的落差來自定位誤差。</a:t>
+            </a:r>
+          </a:p>
+          <a:p>
+            <a:r>
+              <a:t>傳統的 Nav2 方法在這隻機器狗的步態下走不好：走得慢、走走停停，定位誤差越走越大。</a:t>
+            </a:r>
+          </a:p>
+          <a:p>
+            <a:r>
+              <a:t>強化學習這邊，環境和程式都備好了，但沒有附訓練過的策略。訓練出能通過這些場地的策略，就是接下來的工作。</a:t>
             </a:r>
           </a:p>
         </p:txBody>
@@ -5223,7 +5223,7 @@
                 <a:ea typeface="Microsoft JhengHei"/>
                 <a:cs typeface="Microsoft JhengHei"/>
               </a:rPr>
-              <a:t>避障測試：目前的起點</a:t>
+              <a:t>避障測試：目前的狀況</a:t>
             </a:r>
           </a:p>
         </p:txBody>
@@ -5302,7 +5302,7 @@
                 <a:ea typeface="Microsoft JhengHei"/>
                 <a:cs typeface="Microsoft JhengHei"/>
               </a:rPr>
-              <a:t>連續走 7 個目標點：現有的方法都還過不了新場地，這是接下來的工作</a:t>
+              <a:t>環境與評分程式已備好；傳統方法走不好，強化學習的策略還沒有訓練</a:t>
             </a:r>
           </a:p>
         </p:txBody>
@@ -5563,260 +5563,6 @@
                           <a:ea typeface="Microsoft JhengHei"/>
                           <a:cs typeface="Microsoft JhengHei"/>
                         </a:rPr>
-                        <a:t>窄通道：強化學習（基準）</a:t>
-                      </a:r>
-                    </a:p>
-                  </a:txBody>
-                  <a:tcPr marL="73152" marR="73152" marT="36576" marB="36576" anchor="ctr">
-                    <a:solidFill>
-                      <a:srgbClr val="FFFFFF"/>
-                    </a:solidFill>
-                  </a:tcPr>
-                </a:tc>
-                <a:tc>
-                  <a:txBody>
-                    <a:bodyPr wrap="square"/>
-                    <a:lstStyle/>
-                    <a:p>
-                      <a:pPr algn="ctr"/>
-                      <a:r>
-                        <a:rPr sz="1350" b="0">
-                          <a:solidFill>
-                            <a:srgbClr val="0B0B0B"/>
-                          </a:solidFill>
-                          <a:latin typeface="Calibri"/>
-                          <a:ea typeface="Microsoft JhengHei"/>
-                          <a:cs typeface="Microsoft JhengHei"/>
-                        </a:rPr>
-                        <a:t>3 / 7</a:t>
-                      </a:r>
-                    </a:p>
-                  </a:txBody>
-                  <a:tcPr marL="73152" marR="73152" marT="36576" marB="36576" anchor="ctr">
-                    <a:solidFill>
-                      <a:srgbClr val="FFFFFF"/>
-                    </a:solidFill>
-                  </a:tcPr>
-                </a:tc>
-                <a:tc>
-                  <a:txBody>
-                    <a:bodyPr wrap="square"/>
-                    <a:lstStyle/>
-                    <a:p>
-                      <a:pPr algn="ctr"/>
-                      <a:r>
-                        <a:rPr sz="1350" b="0">
-                          <a:solidFill>
-                            <a:srgbClr val="0B0B0B"/>
-                          </a:solidFill>
-                          <a:latin typeface="Calibri"/>
-                          <a:ea typeface="Microsoft JhengHei"/>
-                          <a:cs typeface="Microsoft JhengHei"/>
-                        </a:rPr>
-                        <a:t>3 / 7</a:t>
-                      </a:r>
-                    </a:p>
-                  </a:txBody>
-                  <a:tcPr marL="73152" marR="73152" marT="36576" marB="36576" anchor="ctr">
-                    <a:solidFill>
-                      <a:srgbClr val="FFFFFF"/>
-                    </a:solidFill>
-                  </a:tcPr>
-                </a:tc>
-                <a:tc>
-                  <a:txBody>
-                    <a:bodyPr wrap="square"/>
-                    <a:lstStyle/>
-                    <a:p>
-                      <a:pPr algn="ctr"/>
-                      <a:r>
-                        <a:rPr sz="1350" b="0">
-                          <a:solidFill>
-                            <a:srgbClr val="0B0B0B"/>
-                          </a:solidFill>
-                          <a:latin typeface="Calibri"/>
-                          <a:ea typeface="Microsoft JhengHei"/>
-                          <a:cs typeface="Microsoft JhengHei"/>
-                        </a:rPr>
-                        <a:t>0</a:t>
-                      </a:r>
-                    </a:p>
-                  </a:txBody>
-                  <a:tcPr marL="73152" marR="73152" marT="36576" marB="36576" anchor="ctr">
-                    <a:solidFill>
-                      <a:srgbClr val="FFFFFF"/>
-                    </a:solidFill>
-                  </a:tcPr>
-                </a:tc>
-                <a:tc>
-                  <a:txBody>
-                    <a:bodyPr wrap="square"/>
-                    <a:lstStyle/>
-                    <a:p>
-                      <a:pPr algn="l"/>
-                      <a:r>
-                        <a:rPr sz="1350" b="0">
-                          <a:solidFill>
-                            <a:srgbClr val="0B0B0B"/>
-                          </a:solidFill>
-                          <a:latin typeface="Calibri"/>
-                          <a:ea typeface="Microsoft JhengHei"/>
-                          <a:cs typeface="Microsoft JhengHei"/>
-                        </a:rPr>
-                        <a:t>過不了 0.6 m 的門口</a:t>
-                      </a:r>
-                    </a:p>
-                  </a:txBody>
-                  <a:tcPr marL="73152" marR="73152" marT="36576" marB="36576" anchor="ctr">
-                    <a:solidFill>
-                      <a:srgbClr val="FFFFFF"/>
-                    </a:solidFill>
-                  </a:tcPr>
-                </a:tc>
-              </a:tr>
-              <a:tr h="502920">
-                <a:tc>
-                  <a:txBody>
-                    <a:bodyPr wrap="square"/>
-                    <a:lstStyle/>
-                    <a:p>
-                      <a:pPr algn="l"/>
-                      <a:r>
-                        <a:rPr sz="1350" b="0">
-                          <a:solidFill>
-                            <a:srgbClr val="0B0B0B"/>
-                          </a:solidFill>
-                          <a:latin typeface="Calibri"/>
-                          <a:ea typeface="Microsoft JhengHei"/>
-                          <a:cs typeface="Microsoft JhengHei"/>
-                        </a:rPr>
-                        <a:t>密集柱子：強化學習（基準）</a:t>
-                      </a:r>
-                    </a:p>
-                  </a:txBody>
-                  <a:tcPr marL="73152" marR="73152" marT="36576" marB="36576" anchor="ctr">
-                    <a:solidFill>
-                      <a:srgbClr val="F4F4F2"/>
-                    </a:solidFill>
-                  </a:tcPr>
-                </a:tc>
-                <a:tc>
-                  <a:txBody>
-                    <a:bodyPr wrap="square"/>
-                    <a:lstStyle/>
-                    <a:p>
-                      <a:pPr algn="ctr"/>
-                      <a:r>
-                        <a:rPr sz="1350" b="0">
-                          <a:solidFill>
-                            <a:srgbClr val="0B0B0B"/>
-                          </a:solidFill>
-                          <a:latin typeface="Calibri"/>
-                          <a:ea typeface="Microsoft JhengHei"/>
-                          <a:cs typeface="Microsoft JhengHei"/>
-                        </a:rPr>
-                        <a:t>1 / 7</a:t>
-                      </a:r>
-                    </a:p>
-                  </a:txBody>
-                  <a:tcPr marL="73152" marR="73152" marT="36576" marB="36576" anchor="ctr">
-                    <a:solidFill>
-                      <a:srgbClr val="F4F4F2"/>
-                    </a:solidFill>
-                  </a:tcPr>
-                </a:tc>
-                <a:tc>
-                  <a:txBody>
-                    <a:bodyPr wrap="square"/>
-                    <a:lstStyle/>
-                    <a:p>
-                      <a:pPr algn="ctr"/>
-                      <a:r>
-                        <a:rPr sz="1350" b="0">
-                          <a:solidFill>
-                            <a:srgbClr val="0B0B0B"/>
-                          </a:solidFill>
-                          <a:latin typeface="Calibri"/>
-                          <a:ea typeface="Microsoft JhengHei"/>
-                          <a:cs typeface="Microsoft JhengHei"/>
-                        </a:rPr>
-                        <a:t>1 / 7</a:t>
-                      </a:r>
-                    </a:p>
-                  </a:txBody>
-                  <a:tcPr marL="73152" marR="73152" marT="36576" marB="36576" anchor="ctr">
-                    <a:solidFill>
-                      <a:srgbClr val="F4F4F2"/>
-                    </a:solidFill>
-                  </a:tcPr>
-                </a:tc>
-                <a:tc>
-                  <a:txBody>
-                    <a:bodyPr wrap="square"/>
-                    <a:lstStyle/>
-                    <a:p>
-                      <a:pPr algn="ctr"/>
-                      <a:r>
-                        <a:rPr sz="1350" b="0">
-                          <a:solidFill>
-                            <a:srgbClr val="0B0B0B"/>
-                          </a:solidFill>
-                          <a:latin typeface="Calibri"/>
-                          <a:ea typeface="Microsoft JhengHei"/>
-                          <a:cs typeface="Microsoft JhengHei"/>
-                        </a:rPr>
-                        <a:t>0</a:t>
-                      </a:r>
-                    </a:p>
-                  </a:txBody>
-                  <a:tcPr marL="73152" marR="73152" marT="36576" marB="36576" anchor="ctr">
-                    <a:solidFill>
-                      <a:srgbClr val="F4F4F2"/>
-                    </a:solidFill>
-                  </a:tcPr>
-                </a:tc>
-                <a:tc>
-                  <a:txBody>
-                    <a:bodyPr wrap="square"/>
-                    <a:lstStyle/>
-                    <a:p>
-                      <a:pPr algn="l"/>
-                      <a:r>
-                        <a:rPr sz="1350" b="0">
-                          <a:solidFill>
-                            <a:srgbClr val="0B0B0B"/>
-                          </a:solidFill>
-                          <a:latin typeface="Calibri"/>
-                          <a:ea typeface="Microsoft JhengHei"/>
-                          <a:cs typeface="Microsoft JhengHei"/>
-                        </a:rPr>
-                        <a:t>卡在柱子之間</a:t>
-                      </a:r>
-                    </a:p>
-                  </a:txBody>
-                  <a:tcPr marL="73152" marR="73152" marT="36576" marB="36576" anchor="ctr">
-                    <a:solidFill>
-                      <a:srgbClr val="F4F4F2"/>
-                    </a:solidFill>
-                  </a:tcPr>
-                </a:tc>
-              </a:tr>
-              <a:tr h="502920">
-                <a:tc>
-                  <a:txBody>
-                    <a:bodyPr wrap="square"/>
-                    <a:lstStyle/>
-                    <a:p>
-                      <a:pPr algn="l"/>
-                      <a:r>
-                        <a:rPr sz="1350" b="0">
-                          <a:solidFill>
-                            <a:srgbClr val="0B0B0B"/>
-                          </a:solidFill>
-                          <a:latin typeface="Calibri"/>
-                          <a:ea typeface="Microsoft JhengHei"/>
-                          <a:cs typeface="Microsoft JhengHei"/>
-                        </a:rPr>
                         <a:t>窄通道：Nav2 RPP</a:t>
                       </a:r>
                     </a:p>
@@ -5928,6 +5674,260 @@
                   </a:tcPr>
                 </a:tc>
               </a:tr>
+              <a:tr h="502920">
+                <a:tc>
+                  <a:txBody>
+                    <a:bodyPr wrap="square"/>
+                    <a:lstStyle/>
+                    <a:p>
+                      <a:pPr algn="l"/>
+                      <a:r>
+                        <a:rPr sz="1350" b="0">
+                          <a:solidFill>
+                            <a:srgbClr val="0B0B0B"/>
+                          </a:solidFill>
+                          <a:latin typeface="Calibri"/>
+                          <a:ea typeface="Microsoft JhengHei"/>
+                          <a:cs typeface="Microsoft JhengHei"/>
+                        </a:rPr>
+                        <a:t>投影片場景：Nav2 RPP</a:t>
+                      </a:r>
+                    </a:p>
+                  </a:txBody>
+                  <a:tcPr marL="73152" marR="73152" marT="36576" marB="36576" anchor="ctr">
+                    <a:solidFill>
+                      <a:srgbClr val="F4F4F2"/>
+                    </a:solidFill>
+                  </a:tcPr>
+                </a:tc>
+                <a:tc>
+                  <a:txBody>
+                    <a:bodyPr wrap="square"/>
+                    <a:lstStyle/>
+                    <a:p>
+                      <a:pPr algn="ctr"/>
+                      <a:r>
+                        <a:rPr sz="1350" b="0">
+                          <a:solidFill>
+                            <a:srgbClr val="0B0B0B"/>
+                          </a:solidFill>
+                          <a:latin typeface="Calibri"/>
+                          <a:ea typeface="Microsoft JhengHei"/>
+                          <a:cs typeface="Microsoft JhengHei"/>
+                        </a:rPr>
+                        <a:t>3 / 7</a:t>
+                      </a:r>
+                    </a:p>
+                  </a:txBody>
+                  <a:tcPr marL="73152" marR="73152" marT="36576" marB="36576" anchor="ctr">
+                    <a:solidFill>
+                      <a:srgbClr val="F4F4F2"/>
+                    </a:solidFill>
+                  </a:tcPr>
+                </a:tc>
+                <a:tc>
+                  <a:txBody>
+                    <a:bodyPr wrap="square"/>
+                    <a:lstStyle/>
+                    <a:p>
+                      <a:pPr algn="ctr"/>
+                      <a:r>
+                        <a:rPr sz="1350" b="0">
+                          <a:solidFill>
+                            <a:srgbClr val="0B0B0B"/>
+                          </a:solidFill>
+                          <a:latin typeface="Calibri"/>
+                          <a:ea typeface="Microsoft JhengHei"/>
+                          <a:cs typeface="Microsoft JhengHei"/>
+                        </a:rPr>
+                        <a:t>1 / 7</a:t>
+                      </a:r>
+                    </a:p>
+                  </a:txBody>
+                  <a:tcPr marL="73152" marR="73152" marT="36576" marB="36576" anchor="ctr">
+                    <a:solidFill>
+                      <a:srgbClr val="F4F4F2"/>
+                    </a:solidFill>
+                  </a:tcPr>
+                </a:tc>
+                <a:tc>
+                  <a:txBody>
+                    <a:bodyPr wrap="square"/>
+                    <a:lstStyle/>
+                    <a:p>
+                      <a:pPr algn="ctr"/>
+                      <a:r>
+                        <a:rPr sz="1350" b="0">
+                          <a:solidFill>
+                            <a:srgbClr val="0B0B0B"/>
+                          </a:solidFill>
+                          <a:latin typeface="Calibri"/>
+                          <a:ea typeface="Microsoft JhengHei"/>
+                          <a:cs typeface="Microsoft JhengHei"/>
+                        </a:rPr>
+                        <a:t>3</a:t>
+                      </a:r>
+                    </a:p>
+                  </a:txBody>
+                  <a:tcPr marL="73152" marR="73152" marT="36576" marB="36576" anchor="ctr">
+                    <a:solidFill>
+                      <a:srgbClr val="F4F4F2"/>
+                    </a:solidFill>
+                  </a:tcPr>
+                </a:tc>
+                <a:tc>
+                  <a:txBody>
+                    <a:bodyPr wrap="square"/>
+                    <a:lstStyle/>
+                    <a:p>
+                      <a:pPr algn="l"/>
+                      <a:r>
+                        <a:rPr sz="1350" b="0">
+                          <a:solidFill>
+                            <a:srgbClr val="0B0B0B"/>
+                          </a:solidFill>
+                          <a:latin typeface="Calibri"/>
+                          <a:ea typeface="Microsoft JhengHei"/>
+                          <a:cs typeface="Microsoft JhengHei"/>
+                        </a:rPr>
+                        <a:t>走走停停</a:t>
+                      </a:r>
+                    </a:p>
+                  </a:txBody>
+                  <a:tcPr marL="73152" marR="73152" marT="36576" marB="36576" anchor="ctr">
+                    <a:solidFill>
+                      <a:srgbClr val="F4F4F2"/>
+                    </a:solidFill>
+                  </a:tcPr>
+                </a:tc>
+              </a:tr>
+              <a:tr h="502920">
+                <a:tc>
+                  <a:txBody>
+                    <a:bodyPr wrap="square"/>
+                    <a:lstStyle/>
+                    <a:p>
+                      <a:pPr algn="l"/>
+                      <a:r>
+                        <a:rPr sz="1350" b="0">
+                          <a:solidFill>
+                            <a:srgbClr val="0B0B0B"/>
+                          </a:solidFill>
+                          <a:latin typeface="Calibri"/>
+                          <a:ea typeface="Microsoft JhengHei"/>
+                          <a:cs typeface="Microsoft JhengHei"/>
+                        </a:rPr>
+                        <a:t>投影片場景：Nav2 DWB</a:t>
+                      </a:r>
+                    </a:p>
+                  </a:txBody>
+                  <a:tcPr marL="73152" marR="73152" marT="36576" marB="36576" anchor="ctr">
+                    <a:solidFill>
+                      <a:srgbClr val="FFFFFF"/>
+                    </a:solidFill>
+                  </a:tcPr>
+                </a:tc>
+                <a:tc>
+                  <a:txBody>
+                    <a:bodyPr wrap="square"/>
+                    <a:lstStyle/>
+                    <a:p>
+                      <a:pPr algn="ctr"/>
+                      <a:r>
+                        <a:rPr sz="1350" b="0">
+                          <a:solidFill>
+                            <a:srgbClr val="0B0B0B"/>
+                          </a:solidFill>
+                          <a:latin typeface="Calibri"/>
+                          <a:ea typeface="Microsoft JhengHei"/>
+                          <a:cs typeface="Microsoft JhengHei"/>
+                        </a:rPr>
+                        <a:t>1 / 7</a:t>
+                      </a:r>
+                    </a:p>
+                  </a:txBody>
+                  <a:tcPr marL="73152" marR="73152" marT="36576" marB="36576" anchor="ctr">
+                    <a:solidFill>
+                      <a:srgbClr val="FFFFFF"/>
+                    </a:solidFill>
+                  </a:tcPr>
+                </a:tc>
+                <a:tc>
+                  <a:txBody>
+                    <a:bodyPr wrap="square"/>
+                    <a:lstStyle/>
+                    <a:p>
+                      <a:pPr algn="ctr"/>
+                      <a:r>
+                        <a:rPr sz="1350" b="0">
+                          <a:solidFill>
+                            <a:srgbClr val="0B0B0B"/>
+                          </a:solidFill>
+                          <a:latin typeface="Calibri"/>
+                          <a:ea typeface="Microsoft JhengHei"/>
+                          <a:cs typeface="Microsoft JhengHei"/>
+                        </a:rPr>
+                        <a:t>0 / 7</a:t>
+                      </a:r>
+                    </a:p>
+                  </a:txBody>
+                  <a:tcPr marL="73152" marR="73152" marT="36576" marB="36576" anchor="ctr">
+                    <a:solidFill>
+                      <a:srgbClr val="FFFFFF"/>
+                    </a:solidFill>
+                  </a:tcPr>
+                </a:tc>
+                <a:tc>
+                  <a:txBody>
+                    <a:bodyPr wrap="square"/>
+                    <a:lstStyle/>
+                    <a:p>
+                      <a:pPr algn="ctr"/>
+                      <a:r>
+                        <a:rPr sz="1350" b="0">
+                          <a:solidFill>
+                            <a:srgbClr val="0B0B0B"/>
+                          </a:solidFill>
+                          <a:latin typeface="Calibri"/>
+                          <a:ea typeface="Microsoft JhengHei"/>
+                          <a:cs typeface="Microsoft JhengHei"/>
+                        </a:rPr>
+                        <a:t>6</a:t>
+                      </a:r>
+                    </a:p>
+                  </a:txBody>
+                  <a:tcPr marL="73152" marR="73152" marT="36576" marB="36576" anchor="ctr">
+                    <a:solidFill>
+                      <a:srgbClr val="FFFFFF"/>
+                    </a:solidFill>
+                  </a:tcPr>
+                </a:tc>
+                <a:tc>
+                  <a:txBody>
+                    <a:bodyPr wrap="square"/>
+                    <a:lstStyle/>
+                    <a:p>
+                      <a:pPr algn="l"/>
+                      <a:r>
+                        <a:rPr sz="1350" b="0">
+                          <a:solidFill>
+                            <a:srgbClr val="0B0B0B"/>
+                          </a:solidFill>
+                          <a:latin typeface="Calibri"/>
+                          <a:ea typeface="Microsoft JhengHei"/>
+                          <a:cs typeface="Microsoft JhengHei"/>
+                        </a:rPr>
+                        <a:t>同上</a:t>
+                      </a:r>
+                    </a:p>
+                  </a:txBody>
+                  <a:tcPr marL="73152" marR="73152" marT="36576" marB="36576" anchor="ctr">
+                    <a:solidFill>
+                      <a:srgbClr val="FFFFFF"/>
+                    </a:solidFill>
+                  </a:tcPr>
+                </a:tc>
+              </a:tr>
             </a:tbl>
           </a:graphicData>
         </a:graphic>
@@ -6015,7 +6015,7 @@
                 <a:ea typeface="Microsoft JhengHei"/>
                 <a:cs typeface="Microsoft JhengHei"/>
               </a:rPr>
-              <a:t>•  基準策略只訓練 10 萬步：有安全保護所以不會撞，但卡在門口或柱子前，走不到目標</a:t>
+              <a:t>•  傳統方法（Nav2）在這種步態下走得慢、走走停停，定位誤差累積到 1 m 以上</a:t>
             </a:r>
           </a:p>
           <a:p>
@@ -6036,7 +6036,7 @@
                 <a:ea typeface="Microsoft JhengHei"/>
                 <a:cs typeface="Microsoft JhengHei"/>
               </a:rPr>
-              <a:t>•  窄通道到達的 3 段都在門口這一側；門後的 3 個目標都沒到</a:t>
+              <a:t>•  強化學習：訓練環境、訓練程式、部署節點都有，但沒有附訓練過的策略</a:t>
             </a:r>
           </a:p>
           <a:p>
@@ -6057,7 +6057,7 @@
                 <a:ea typeface="Microsoft JhengHei"/>
                 <a:cs typeface="Microsoft JhengHei"/>
               </a:rPr>
-              <a:t>•  各為單次執行；每段限時 240 秒（窄通道）或 150 秒（密集柱子）</a:t>
+              <a:t>•  各為單次執行；用模擬器的真實位置評分</a:t>
             </a:r>
           </a:p>
         </p:txBody>
@@ -6483,7 +6483,7 @@
                 <a:ea typeface="Microsoft JhengHei"/>
                 <a:cs typeface="Microsoft JhengHei"/>
               </a:rPr>
-              <a:t>•  避障還過不了新場地（卡在窄門口、柱子之間）</a:t>
+              <a:t>•  強化學習的避障策略還沒有訓練</a:t>
             </a:r>
           </a:p>
           <a:p>
@@ -6664,7 +6664,7 @@
                 <a:ea typeface="Microsoft JhengHei"/>
                 <a:cs typeface="Microsoft JhengHei"/>
               </a:rPr>
-              <a:t>•  訓練久一點，並把窄門口、密集柱子加進訓練場景</a:t>
+              <a:t>•  訓練避障策略（加入窄門口、柱子的場景）</a:t>
             </a:r>
           </a:p>
           <a:p>
@@ -14677,7 +14677,7 @@
                 <a:ea typeface="Microsoft JhengHei"/>
                 <a:cs typeface="Microsoft JhengHei"/>
               </a:rPr>
-              <a:t>蛇行繞過兩道長牆、穿過 0.6 m 的門口、門後還有死巷；機器狗要連續走到 7 個目標點</a:t>
+              <a:t>預設場地：蛇行繞過兩道長牆、穿過 0.6 m 的門口、門後還有死巷；連續走 7 個目標點</a:t>
             </a:r>
           </a:p>
         </p:txBody>
@@ -15132,7 +15132,7 @@
                 <a:ea typeface="Microsoft JhengHei"/>
                 <a:cs typeface="Microsoft JhengHei"/>
               </a:rPr>
-              <a:t>  / 7</a:t>
+              <a:t>  個</a:t>
             </a:r>
           </a:p>
         </p:txBody>
@@ -15176,7 +15176,7 @@
                 <a:ea typeface="Microsoft JhengHei"/>
                 <a:cs typeface="Microsoft JhengHei"/>
               </a:rPr>
-              <a:t>目前基準策略到達的目標數</a:t>
+              <a:t>新場地：窄通道、密集柱子、論文地圖</a:t>
             </a:r>
           </a:p>
         </p:txBody>
@@ -15220,7 +15220,7 @@
                 <a:ea typeface="Microsoft JhengHei"/>
                 <a:cs typeface="Microsoft JhengHei"/>
               </a:rPr>
-              <a:t>藍線：基準策略（只訓練 10 萬步）走過的路徑，始終過不了 0.6 m 的門口</a:t>
+              <a:t>圖為預設場地 corridor；另有 clutter（21 根柱子）與照論文 Fig. 4 建的 10 m × 10 m 地圖</a:t>
             </a:r>
           </a:p>
         </p:txBody>

--- a/docs/DOGZILLA_專案簡報.pptx
+++ b/docs/DOGZILLA_專案簡報.pptx
@@ -1319,6 +1319,11 @@
           </a:p>
           <a:p>
             <a:r>
+              <a:t>藍線是目前附的初期策略走的路：只訓練了 10 萬步，走得不穩，在第一個缺口前猶豫很久，之後一直卡在 60 公分的門口前過不去，7 個目標只到 3 個。</a:t>
+            </a:r>
+          </a:p>
+          <a:p>
+            <a:r>
               <a:t>另外還有兩個場地：一個是 21 根柱子交錯排列的密集障礙物場地；一個是照一篇四足機器人路徑規劃論文的地圖建的，10 公尺見方，有 16 塊障礙物和論文裡提到的 L 形陷阱。</a:t>
             </a:r>
           </a:p>
@@ -1584,7 +1589,7 @@
           </a:p>
           <a:p>
             <a:r>
-              <a:t>強化學習這邊，環境和程式都備好了，但沒有附訓練過的策略。訓練出能通過這些場地的策略，就是接下來的工作。</a:t>
+              <a:t>強化學習這邊，附的是只訓練 10 萬步的初期策略。因為有安全保護，它不會撞牆，但走得不穩，常卡在牆角或門口前。把它練到能通過這些場地，就是接下來的工作。</a:t>
             </a:r>
           </a:p>
         </p:txBody>
@@ -5302,7 +5307,7 @@
                 <a:ea typeface="Microsoft JhengHei"/>
                 <a:cs typeface="Microsoft JhengHei"/>
               </a:rPr>
-              <a:t>環境與評分程式已備好；傳統方法走不好，強化學習的策略還沒有訓練</a:t>
+              <a:t>環境與評分程式已備好；強化學習只有初期版本，走不穩、會卡在牆角，是接下來的工作</a:t>
             </a:r>
           </a:p>
         </p:txBody>
@@ -5563,6 +5568,260 @@
                           <a:ea typeface="Microsoft JhengHei"/>
                           <a:cs typeface="Microsoft JhengHei"/>
                         </a:rPr>
+                        <a:t>窄通道：強化學習（初期）</a:t>
+                      </a:r>
+                    </a:p>
+                  </a:txBody>
+                  <a:tcPr marL="73152" marR="73152" marT="36576" marB="36576" anchor="ctr">
+                    <a:solidFill>
+                      <a:srgbClr val="FFFFFF"/>
+                    </a:solidFill>
+                  </a:tcPr>
+                </a:tc>
+                <a:tc>
+                  <a:txBody>
+                    <a:bodyPr wrap="square"/>
+                    <a:lstStyle/>
+                    <a:p>
+                      <a:pPr algn="ctr"/>
+                      <a:r>
+                        <a:rPr sz="1350" b="0">
+                          <a:solidFill>
+                            <a:srgbClr val="0B0B0B"/>
+                          </a:solidFill>
+                          <a:latin typeface="Calibri"/>
+                          <a:ea typeface="Microsoft JhengHei"/>
+                          <a:cs typeface="Microsoft JhengHei"/>
+                        </a:rPr>
+                        <a:t>3 / 7</a:t>
+                      </a:r>
+                    </a:p>
+                  </a:txBody>
+                  <a:tcPr marL="73152" marR="73152" marT="36576" marB="36576" anchor="ctr">
+                    <a:solidFill>
+                      <a:srgbClr val="FFFFFF"/>
+                    </a:solidFill>
+                  </a:tcPr>
+                </a:tc>
+                <a:tc>
+                  <a:txBody>
+                    <a:bodyPr wrap="square"/>
+                    <a:lstStyle/>
+                    <a:p>
+                      <a:pPr algn="ctr"/>
+                      <a:r>
+                        <a:rPr sz="1350" b="0">
+                          <a:solidFill>
+                            <a:srgbClr val="0B0B0B"/>
+                          </a:solidFill>
+                          <a:latin typeface="Calibri"/>
+                          <a:ea typeface="Microsoft JhengHei"/>
+                          <a:cs typeface="Microsoft JhengHei"/>
+                        </a:rPr>
+                        <a:t>3 / 7</a:t>
+                      </a:r>
+                    </a:p>
+                  </a:txBody>
+                  <a:tcPr marL="73152" marR="73152" marT="36576" marB="36576" anchor="ctr">
+                    <a:solidFill>
+                      <a:srgbClr val="FFFFFF"/>
+                    </a:solidFill>
+                  </a:tcPr>
+                </a:tc>
+                <a:tc>
+                  <a:txBody>
+                    <a:bodyPr wrap="square"/>
+                    <a:lstStyle/>
+                    <a:p>
+                      <a:pPr algn="ctr"/>
+                      <a:r>
+                        <a:rPr sz="1350" b="0">
+                          <a:solidFill>
+                            <a:srgbClr val="0B0B0B"/>
+                          </a:solidFill>
+                          <a:latin typeface="Calibri"/>
+                          <a:ea typeface="Microsoft JhengHei"/>
+                          <a:cs typeface="Microsoft JhengHei"/>
+                        </a:rPr>
+                        <a:t>0</a:t>
+                      </a:r>
+                    </a:p>
+                  </a:txBody>
+                  <a:tcPr marL="73152" marR="73152" marT="36576" marB="36576" anchor="ctr">
+                    <a:solidFill>
+                      <a:srgbClr val="FFFFFF"/>
+                    </a:solidFill>
+                  </a:tcPr>
+                </a:tc>
+                <a:tc>
+                  <a:txBody>
+                    <a:bodyPr wrap="square"/>
+                    <a:lstStyle/>
+                    <a:p>
+                      <a:pPr algn="l"/>
+                      <a:r>
+                        <a:rPr sz="1350" b="0">
+                          <a:solidFill>
+                            <a:srgbClr val="0B0B0B"/>
+                          </a:solidFill>
+                          <a:latin typeface="Calibri"/>
+                          <a:ea typeface="Microsoft JhengHei"/>
+                          <a:cs typeface="Microsoft JhengHei"/>
+                        </a:rPr>
+                        <a:t>過不了 0.6 m 的門口</a:t>
+                      </a:r>
+                    </a:p>
+                  </a:txBody>
+                  <a:tcPr marL="73152" marR="73152" marT="36576" marB="36576" anchor="ctr">
+                    <a:solidFill>
+                      <a:srgbClr val="FFFFFF"/>
+                    </a:solidFill>
+                  </a:tcPr>
+                </a:tc>
+              </a:tr>
+              <a:tr h="502920">
+                <a:tc>
+                  <a:txBody>
+                    <a:bodyPr wrap="square"/>
+                    <a:lstStyle/>
+                    <a:p>
+                      <a:pPr algn="l"/>
+                      <a:r>
+                        <a:rPr sz="1350" b="0">
+                          <a:solidFill>
+                            <a:srgbClr val="0B0B0B"/>
+                          </a:solidFill>
+                          <a:latin typeface="Calibri"/>
+                          <a:ea typeface="Microsoft JhengHei"/>
+                          <a:cs typeface="Microsoft JhengHei"/>
+                        </a:rPr>
+                        <a:t>密集柱子：強化學習（初期）</a:t>
+                      </a:r>
+                    </a:p>
+                  </a:txBody>
+                  <a:tcPr marL="73152" marR="73152" marT="36576" marB="36576" anchor="ctr">
+                    <a:solidFill>
+                      <a:srgbClr val="F4F4F2"/>
+                    </a:solidFill>
+                  </a:tcPr>
+                </a:tc>
+                <a:tc>
+                  <a:txBody>
+                    <a:bodyPr wrap="square"/>
+                    <a:lstStyle/>
+                    <a:p>
+                      <a:pPr algn="ctr"/>
+                      <a:r>
+                        <a:rPr sz="1350" b="0">
+                          <a:solidFill>
+                            <a:srgbClr val="0B0B0B"/>
+                          </a:solidFill>
+                          <a:latin typeface="Calibri"/>
+                          <a:ea typeface="Microsoft JhengHei"/>
+                          <a:cs typeface="Microsoft JhengHei"/>
+                        </a:rPr>
+                        <a:t>1 / 7</a:t>
+                      </a:r>
+                    </a:p>
+                  </a:txBody>
+                  <a:tcPr marL="73152" marR="73152" marT="36576" marB="36576" anchor="ctr">
+                    <a:solidFill>
+                      <a:srgbClr val="F4F4F2"/>
+                    </a:solidFill>
+                  </a:tcPr>
+                </a:tc>
+                <a:tc>
+                  <a:txBody>
+                    <a:bodyPr wrap="square"/>
+                    <a:lstStyle/>
+                    <a:p>
+                      <a:pPr algn="ctr"/>
+                      <a:r>
+                        <a:rPr sz="1350" b="0">
+                          <a:solidFill>
+                            <a:srgbClr val="0B0B0B"/>
+                          </a:solidFill>
+                          <a:latin typeface="Calibri"/>
+                          <a:ea typeface="Microsoft JhengHei"/>
+                          <a:cs typeface="Microsoft JhengHei"/>
+                        </a:rPr>
+                        <a:t>1 / 7</a:t>
+                      </a:r>
+                    </a:p>
+                  </a:txBody>
+                  <a:tcPr marL="73152" marR="73152" marT="36576" marB="36576" anchor="ctr">
+                    <a:solidFill>
+                      <a:srgbClr val="F4F4F2"/>
+                    </a:solidFill>
+                  </a:tcPr>
+                </a:tc>
+                <a:tc>
+                  <a:txBody>
+                    <a:bodyPr wrap="square"/>
+                    <a:lstStyle/>
+                    <a:p>
+                      <a:pPr algn="ctr"/>
+                      <a:r>
+                        <a:rPr sz="1350" b="0">
+                          <a:solidFill>
+                            <a:srgbClr val="0B0B0B"/>
+                          </a:solidFill>
+                          <a:latin typeface="Calibri"/>
+                          <a:ea typeface="Microsoft JhengHei"/>
+                          <a:cs typeface="Microsoft JhengHei"/>
+                        </a:rPr>
+                        <a:t>0</a:t>
+                      </a:r>
+                    </a:p>
+                  </a:txBody>
+                  <a:tcPr marL="73152" marR="73152" marT="36576" marB="36576" anchor="ctr">
+                    <a:solidFill>
+                      <a:srgbClr val="F4F4F2"/>
+                    </a:solidFill>
+                  </a:tcPr>
+                </a:tc>
+                <a:tc>
+                  <a:txBody>
+                    <a:bodyPr wrap="square"/>
+                    <a:lstStyle/>
+                    <a:p>
+                      <a:pPr algn="l"/>
+                      <a:r>
+                        <a:rPr sz="1350" b="0">
+                          <a:solidFill>
+                            <a:srgbClr val="0B0B0B"/>
+                          </a:solidFill>
+                          <a:latin typeface="Calibri"/>
+                          <a:ea typeface="Microsoft JhengHei"/>
+                          <a:cs typeface="Microsoft JhengHei"/>
+                        </a:rPr>
+                        <a:t>卡在柱子之間</a:t>
+                      </a:r>
+                    </a:p>
+                  </a:txBody>
+                  <a:tcPr marL="73152" marR="73152" marT="36576" marB="36576" anchor="ctr">
+                    <a:solidFill>
+                      <a:srgbClr val="F4F4F2"/>
+                    </a:solidFill>
+                  </a:tcPr>
+                </a:tc>
+              </a:tr>
+              <a:tr h="502920">
+                <a:tc>
+                  <a:txBody>
+                    <a:bodyPr wrap="square"/>
+                    <a:lstStyle/>
+                    <a:p>
+                      <a:pPr algn="l"/>
+                      <a:r>
+                        <a:rPr sz="1350" b="0">
+                          <a:solidFill>
+                            <a:srgbClr val="0B0B0B"/>
+                          </a:solidFill>
+                          <a:latin typeface="Calibri"/>
+                          <a:ea typeface="Microsoft JhengHei"/>
+                          <a:cs typeface="Microsoft JhengHei"/>
+                        </a:rPr>
                         <a:t>窄通道：Nav2 RPP</a:t>
                       </a:r>
                     </a:p>
@@ -5674,260 +5933,6 @@
                   </a:tcPr>
                 </a:tc>
               </a:tr>
-              <a:tr h="502920">
-                <a:tc>
-                  <a:txBody>
-                    <a:bodyPr wrap="square"/>
-                    <a:lstStyle/>
-                    <a:p>
-                      <a:pPr algn="l"/>
-                      <a:r>
-                        <a:rPr sz="1350" b="0">
-                          <a:solidFill>
-                            <a:srgbClr val="0B0B0B"/>
-                          </a:solidFill>
-                          <a:latin typeface="Calibri"/>
-                          <a:ea typeface="Microsoft JhengHei"/>
-                          <a:cs typeface="Microsoft JhengHei"/>
-                        </a:rPr>
-                        <a:t>投影片場景：Nav2 RPP</a:t>
-                      </a:r>
-                    </a:p>
-                  </a:txBody>
-                  <a:tcPr marL="73152" marR="73152" marT="36576" marB="36576" anchor="ctr">
-                    <a:solidFill>
-                      <a:srgbClr val="F4F4F2"/>
-                    </a:solidFill>
-                  </a:tcPr>
-                </a:tc>
-                <a:tc>
-                  <a:txBody>
-                    <a:bodyPr wrap="square"/>
-                    <a:lstStyle/>
-                    <a:p>
-                      <a:pPr algn="ctr"/>
-                      <a:r>
-                        <a:rPr sz="1350" b="0">
-                          <a:solidFill>
-                            <a:srgbClr val="0B0B0B"/>
-                          </a:solidFill>
-                          <a:latin typeface="Calibri"/>
-                          <a:ea typeface="Microsoft JhengHei"/>
-                          <a:cs typeface="Microsoft JhengHei"/>
-                        </a:rPr>
-                        <a:t>3 / 7</a:t>
-                      </a:r>
-                    </a:p>
-                  </a:txBody>
-                  <a:tcPr marL="73152" marR="73152" marT="36576" marB="36576" anchor="ctr">
-                    <a:solidFill>
-                      <a:srgbClr val="F4F4F2"/>
-                    </a:solidFill>
-                  </a:tcPr>
-                </a:tc>
-                <a:tc>
-                  <a:txBody>
-                    <a:bodyPr wrap="square"/>
-                    <a:lstStyle/>
-                    <a:p>
-                      <a:pPr algn="ctr"/>
-                      <a:r>
-                        <a:rPr sz="1350" b="0">
-                          <a:solidFill>
-                            <a:srgbClr val="0B0B0B"/>
-                          </a:solidFill>
-                          <a:latin typeface="Calibri"/>
-                          <a:ea typeface="Microsoft JhengHei"/>
-                          <a:cs typeface="Microsoft JhengHei"/>
-                        </a:rPr>
-                        <a:t>1 / 7</a:t>
-                      </a:r>
-                    </a:p>
-                  </a:txBody>
-                  <a:tcPr marL="73152" marR="73152" marT="36576" marB="36576" anchor="ctr">
-                    <a:solidFill>
-                      <a:srgbClr val="F4F4F2"/>
-                    </a:solidFill>
-                  </a:tcPr>
-                </a:tc>
-                <a:tc>
-                  <a:txBody>
-                    <a:bodyPr wrap="square"/>
-                    <a:lstStyle/>
-                    <a:p>
-                      <a:pPr algn="ctr"/>
-                      <a:r>
-                        <a:rPr sz="1350" b="0">
-                          <a:solidFill>
-                            <a:srgbClr val="0B0B0B"/>
-                          </a:solidFill>
-                          <a:latin typeface="Calibri"/>
-                          <a:ea typeface="Microsoft JhengHei"/>
-                          <a:cs typeface="Microsoft JhengHei"/>
-                        </a:rPr>
-                        <a:t>3</a:t>
-                      </a:r>
-                    </a:p>
-                  </a:txBody>
-                  <a:tcPr marL="73152" marR="73152" marT="36576" marB="36576" anchor="ctr">
-                    <a:solidFill>
-                      <a:srgbClr val="F4F4F2"/>
-                    </a:solidFill>
-                  </a:tcPr>
-                </a:tc>
-                <a:tc>
-                  <a:txBody>
-                    <a:bodyPr wrap="square"/>
-                    <a:lstStyle/>
-                    <a:p>
-                      <a:pPr algn="l"/>
-                      <a:r>
-                        <a:rPr sz="1350" b="0">
-                          <a:solidFill>
-                            <a:srgbClr val="0B0B0B"/>
-                          </a:solidFill>
-                          <a:latin typeface="Calibri"/>
-                          <a:ea typeface="Microsoft JhengHei"/>
-                          <a:cs typeface="Microsoft JhengHei"/>
-                        </a:rPr>
-                        <a:t>走走停停</a:t>
-                      </a:r>
-                    </a:p>
-                  </a:txBody>
-                  <a:tcPr marL="73152" marR="73152" marT="36576" marB="36576" anchor="ctr">
-                    <a:solidFill>
-                      <a:srgbClr val="F4F4F2"/>
-                    </a:solidFill>
-                  </a:tcPr>
-                </a:tc>
-              </a:tr>
-              <a:tr h="502920">
-                <a:tc>
-                  <a:txBody>
-                    <a:bodyPr wrap="square"/>
-                    <a:lstStyle/>
-                    <a:p>
-                      <a:pPr algn="l"/>
-                      <a:r>
-                        <a:rPr sz="1350" b="0">
-                          <a:solidFill>
-                            <a:srgbClr val="0B0B0B"/>
-                          </a:solidFill>
-                          <a:latin typeface="Calibri"/>
-                          <a:ea typeface="Microsoft JhengHei"/>
-                          <a:cs typeface="Microsoft JhengHei"/>
-                        </a:rPr>
-                        <a:t>投影片場景：Nav2 DWB</a:t>
-                      </a:r>
-                    </a:p>
-                  </a:txBody>
-                  <a:tcPr marL="73152" marR="73152" marT="36576" marB="36576" anchor="ctr">
-                    <a:solidFill>
-                      <a:srgbClr val="FFFFFF"/>
-                    </a:solidFill>
-                  </a:tcPr>
-                </a:tc>
-                <a:tc>
-                  <a:txBody>
-                    <a:bodyPr wrap="square"/>
-                    <a:lstStyle/>
-                    <a:p>
-                      <a:pPr algn="ctr"/>
-                      <a:r>
-                        <a:rPr sz="1350" b="0">
-                          <a:solidFill>
-                            <a:srgbClr val="0B0B0B"/>
-                          </a:solidFill>
-                          <a:latin typeface="Calibri"/>
-                          <a:ea typeface="Microsoft JhengHei"/>
-                          <a:cs typeface="Microsoft JhengHei"/>
-                        </a:rPr>
-                        <a:t>1 / 7</a:t>
-                      </a:r>
-                    </a:p>
-                  </a:txBody>
-                  <a:tcPr marL="73152" marR="73152" marT="36576" marB="36576" anchor="ctr">
-                    <a:solidFill>
-                      <a:srgbClr val="FFFFFF"/>
-                    </a:solidFill>
-                  </a:tcPr>
-                </a:tc>
-                <a:tc>
-                  <a:txBody>
-                    <a:bodyPr wrap="square"/>
-                    <a:lstStyle/>
-                    <a:p>
-                      <a:pPr algn="ctr"/>
-                      <a:r>
-                        <a:rPr sz="1350" b="0">
-                          <a:solidFill>
-                            <a:srgbClr val="0B0B0B"/>
-                          </a:solidFill>
-                          <a:latin typeface="Calibri"/>
-                          <a:ea typeface="Microsoft JhengHei"/>
-                          <a:cs typeface="Microsoft JhengHei"/>
-                        </a:rPr>
-                        <a:t>0 / 7</a:t>
-                      </a:r>
-                    </a:p>
-                  </a:txBody>
-                  <a:tcPr marL="73152" marR="73152" marT="36576" marB="36576" anchor="ctr">
-                    <a:solidFill>
-                      <a:srgbClr val="FFFFFF"/>
-                    </a:solidFill>
-                  </a:tcPr>
-                </a:tc>
-                <a:tc>
-                  <a:txBody>
-                    <a:bodyPr wrap="square"/>
-                    <a:lstStyle/>
-                    <a:p>
-                      <a:pPr algn="ctr"/>
-                      <a:r>
-                        <a:rPr sz="1350" b="0">
-                          <a:solidFill>
-                            <a:srgbClr val="0B0B0B"/>
-                          </a:solidFill>
-                          <a:latin typeface="Calibri"/>
-                          <a:ea typeface="Microsoft JhengHei"/>
-                          <a:cs typeface="Microsoft JhengHei"/>
-                        </a:rPr>
-                        <a:t>6</a:t>
-                      </a:r>
-                    </a:p>
-                  </a:txBody>
-                  <a:tcPr marL="73152" marR="73152" marT="36576" marB="36576" anchor="ctr">
-                    <a:solidFill>
-                      <a:srgbClr val="FFFFFF"/>
-                    </a:solidFill>
-                  </a:tcPr>
-                </a:tc>
-                <a:tc>
-                  <a:txBody>
-                    <a:bodyPr wrap="square"/>
-                    <a:lstStyle/>
-                    <a:p>
-                      <a:pPr algn="l"/>
-                      <a:r>
-                        <a:rPr sz="1350" b="0">
-                          <a:solidFill>
-                            <a:srgbClr val="0B0B0B"/>
-                          </a:solidFill>
-                          <a:latin typeface="Calibri"/>
-                          <a:ea typeface="Microsoft JhengHei"/>
-                          <a:cs typeface="Microsoft JhengHei"/>
-                        </a:rPr>
-                        <a:t>同上</a:t>
-                      </a:r>
-                    </a:p>
-                  </a:txBody>
-                  <a:tcPr marL="73152" marR="73152" marT="36576" marB="36576" anchor="ctr">
-                    <a:solidFill>
-                      <a:srgbClr val="FFFFFF"/>
-                    </a:solidFill>
-                  </a:tcPr>
-                </a:tc>
-              </a:tr>
             </a:tbl>
           </a:graphicData>
         </a:graphic>
@@ -6036,7 +6041,7 @@
                 <a:ea typeface="Microsoft JhengHei"/>
                 <a:cs typeface="Microsoft JhengHei"/>
               </a:rPr>
-              <a:t>•  強化學習：訓練環境、訓練程式、部署節點都有，但沒有附訓練過的策略</a:t>
+              <a:t>•  強化學習的初期策略只訓練 10 萬步：不會撞牆，但走不穩、卡在牆角或門口前</a:t>
             </a:r>
           </a:p>
           <a:p>
@@ -6483,7 +6488,7 @@
                 <a:ea typeface="Microsoft JhengHei"/>
                 <a:cs typeface="Microsoft JhengHei"/>
               </a:rPr>
-              <a:t>•  強化學習的避障策略還沒有訓練</a:t>
+              <a:t>•  強化學習只有初期版本：走不穩、會卡在牆角</a:t>
             </a:r>
           </a:p>
           <a:p>
@@ -15132,7 +15137,7 @@
                 <a:ea typeface="Microsoft JhengHei"/>
                 <a:cs typeface="Microsoft JhengHei"/>
               </a:rPr>
-              <a:t>  個</a:t>
+              <a:t>  / 7</a:t>
             </a:r>
           </a:p>
         </p:txBody>
@@ -15176,7 +15181,7 @@
                 <a:ea typeface="Microsoft JhengHei"/>
                 <a:cs typeface="Microsoft JhengHei"/>
               </a:rPr>
-              <a:t>新場地：窄通道、密集柱子、論文地圖</a:t>
+              <a:t>初期的強化學習策略到達的目標數</a:t>
             </a:r>
           </a:p>
         </p:txBody>
@@ -15220,7 +15225,7 @@
                 <a:ea typeface="Microsoft JhengHei"/>
                 <a:cs typeface="Microsoft JhengHei"/>
               </a:rPr>
-              <a:t>圖為預設場地 corridor；另有 clutter（21 根柱子）與照論文 Fig. 4 建的 10 m × 10 m 地圖</a:t>
+              <a:t>藍線：初期策略（只訓練 10 萬步）走過的路徑，卡在 0.6 m 的門口前。另有密集柱子與論文地圖兩個場地</a:t>
             </a:r>
           </a:p>
         </p:txBody>

--- a/docs/DOGZILLA_專案簡報.pptx
+++ b/docs/DOGZILLA_專案簡報.pptx
@@ -519,7 +519,7 @@
           </a:p>
           <a:p>
             <a:r>
-              <a:t>一句話重點：整套系統已經在電腦模擬裡建好並測試過，接下來要搬到實機。</a:t>
+              <a:t>一句話重點：機器狗模型和整套模擬環境已經建好；強化學習的避障還沒練好，交給分組 Project 完成。</a:t>
             </a:r>
           </a:p>
           <a:p>
@@ -594,7 +594,7 @@
           <a:lstStyle/>
           <a:p>
             <a:r>
-              <a:t>左邊是目前的限制，右邊是接下來要做的事，全部都只需要模擬。</a:t>
+              <a:t>左邊是目前的限制，右邊是分組 Project 要做的事，全部都只需要模擬。</a:t>
             </a:r>
           </a:p>
           <a:p>
@@ -1319,7 +1319,7 @@
           </a:p>
           <a:p>
             <a:r>
-              <a:t>藍線是目前附的初期策略走的路：只訓練了 10 萬步，走得不穩，在第一個缺口前猶豫很久，之後一直卡在 60 公分的門口前過不去，7 個目標只到 3 個。</a:t>
+              <a:t>藍線是目前附的策略走的路：只訓練了 10 萬步，走得不穩，在第一個缺口前猶豫很久，之後一直卡在 60 公分的門口前過不去，7 個目標只到 3 個。</a:t>
             </a:r>
           </a:p>
           <a:p>
@@ -1589,7 +1589,7 @@
           </a:p>
           <a:p>
             <a:r>
-              <a:t>強化學習這邊，附的是只訓練 10 萬步的初期策略。因為有安全保護，它不會撞牆，但走得不穩，常卡在牆角或門口前。把它練到能通過這些場地，就是接下來的工作。</a:t>
+              <a:t>強化學習這邊，附的策略只訓練了 10 萬步。因為有安全保護，它不會撞牆，但走得不穩，常卡在牆角或門口前。把它練到能通過這些場地，就是分組 Project 要完成的工作。</a:t>
             </a:r>
           </a:p>
         </p:txBody>
@@ -5307,7 +5307,7 @@
                 <a:ea typeface="Microsoft JhengHei"/>
                 <a:cs typeface="Microsoft JhengHei"/>
               </a:rPr>
-              <a:t>環境與評分程式已備好；強化學習只有初期版本，走不穩、會卡在牆角，是接下來的工作</a:t>
+              <a:t>環境與評分程式已備好；強化學習還沒練好，走不穩、會卡在牆角，交給分組 Project 完成</a:t>
             </a:r>
           </a:p>
         </p:txBody>
@@ -5568,7 +5568,7 @@
                           <a:ea typeface="Microsoft JhengHei"/>
                           <a:cs typeface="Microsoft JhengHei"/>
                         </a:rPr>
-                        <a:t>窄通道：強化學習（初期）</a:t>
+                        <a:t>窄通道：強化學習（目前）</a:t>
                       </a:r>
                     </a:p>
                   </a:txBody>
@@ -5695,7 +5695,7 @@
                           <a:ea typeface="Microsoft JhengHei"/>
                           <a:cs typeface="Microsoft JhengHei"/>
                         </a:rPr>
-                        <a:t>密集柱子：強化學習（初期）</a:t>
+                        <a:t>密集柱子：強化學習（目前）</a:t>
                       </a:r>
                     </a:p>
                   </a:txBody>
@@ -6041,7 +6041,7 @@
                 <a:ea typeface="Microsoft JhengHei"/>
                 <a:cs typeface="Microsoft JhengHei"/>
               </a:rPr>
-              <a:t>•  強化學習的初期策略只訓練 10 萬步：不會撞牆，但走不穩、卡在牆角或門口前</a:t>
+              <a:t>•  目前的強化學習策略只訓練 10 萬步：不會撞牆，但走不穩、卡在牆角或門口前</a:t>
             </a:r>
           </a:p>
           <a:p>
@@ -6312,7 +6312,7 @@
                 <a:ea typeface="Microsoft JhengHei"/>
                 <a:cs typeface="Microsoft JhengHei"/>
               </a:rPr>
-              <a:t>模型與整條流程已經備好，接下來把避障練好（只需要模擬）</a:t>
+              <a:t>模型與環境已經備好，避障交給分組 Project 完成（只需要模擬）</a:t>
             </a:r>
           </a:p>
         </p:txBody>
@@ -6488,7 +6488,7 @@
                 <a:ea typeface="Microsoft JhengHei"/>
                 <a:cs typeface="Microsoft JhengHei"/>
               </a:rPr>
-              <a:t>•  強化學習只有初期版本：走不穩、會卡在牆角</a:t>
+              <a:t>•  強化學習還沒練好：走不穩、會卡在牆角</a:t>
             </a:r>
           </a:p>
           <a:p>
@@ -6625,7 +6625,7 @@
                 <a:ea typeface="Microsoft JhengHei"/>
                 <a:cs typeface="Microsoft JhengHei"/>
               </a:rPr>
-              <a:t>下一步</a:t>
+              <a:t>分組 Project 要做的事</a:t>
             </a:r>
           </a:p>
         </p:txBody>
@@ -15181,7 +15181,7 @@
                 <a:ea typeface="Microsoft JhengHei"/>
                 <a:cs typeface="Microsoft JhengHei"/>
               </a:rPr>
-              <a:t>初期的強化學習策略到達的目標數</a:t>
+              <a:t>目前的強化學習策略到達的目標數</a:t>
             </a:r>
           </a:p>
         </p:txBody>
@@ -15225,7 +15225,7 @@
                 <a:ea typeface="Microsoft JhengHei"/>
                 <a:cs typeface="Microsoft JhengHei"/>
               </a:rPr>
-              <a:t>藍線：初期策略（只訓練 10 萬步）走過的路徑，卡在 0.6 m 的門口前。另有密集柱子與論文地圖兩個場地</a:t>
+              <a:t>藍線：目前的策略（只訓練 10 萬步）走過的路徑，卡在 0.6 m 的門口前。另有密集柱子與論文地圖兩個場地</a:t>
             </a:r>
           </a:p>
         </p:txBody>

--- a/docs/DOGZILLA_專案簡報.pptx
+++ b/docs/DOGZILLA_專案簡報.pptx
@@ -1304,7 +1304,12 @@
           <a:lstStyle/>
           <a:p>
             <a:r>
-              <a:t>這是新的預設測試場地，比投影片第一頁的場景難很多。</a:t>
+              <a:t>測試場景一共四個。場景 1 是投影片第一頁的原始場景，最簡單；場景 2 是長牆，也是預設場景，就是這張圖；場景 3 是照一篇論文的地圖建的；場景 4 是密集的柱子。</a:t>
+            </a:r>
+          </a:p>
+          <a:p>
+            <a:r>
+              <a:t>先看圖上的場景 2，它比場景 1 難很多。</a:t>
             </a:r>
           </a:p>
           <a:p>
@@ -1324,7 +1329,7 @@
           </a:p>
           <a:p>
             <a:r>
-              <a:t>另外還有兩個場地：一個是 21 根柱子交錯排列的密集障礙物場地；一個是照一篇四足機器人路徑規劃論文的地圖建的，10 公尺見方，有 16 塊障礙物和論文裡提到的 L 形陷阱。</a:t>
+              <a:t>場景 3 是照一篇四足機器人路徑規劃論文的地圖建的，10 公尺見方，有 16 塊障礙物和論文裡提到的 L 形陷阱；場景 4 是 21 根柱子交錯排列的密集障礙物場地。</a:t>
             </a:r>
           </a:p>
           <a:p>
@@ -5441,7 +5446,7 @@
                           <a:ea typeface="Microsoft JhengHei"/>
                           <a:cs typeface="Microsoft JhengHei"/>
                         </a:rPr>
-                        <a:t>場地 / 避障方法</a:t>
+                        <a:t>場景 / 避障方法</a:t>
                       </a:r>
                     </a:p>
                   </a:txBody>
@@ -5568,7 +5573,7 @@
                           <a:ea typeface="Microsoft JhengHei"/>
                           <a:cs typeface="Microsoft JhengHei"/>
                         </a:rPr>
-                        <a:t>窄通道：強化學習（目前）</a:t>
+                        <a:t>場景 2 長牆：強化學習（目前）</a:t>
                       </a:r>
                     </a:p>
                   </a:txBody>
@@ -5695,7 +5700,7 @@
                           <a:ea typeface="Microsoft JhengHei"/>
                           <a:cs typeface="Microsoft JhengHei"/>
                         </a:rPr>
-                        <a:t>密集柱子：強化學習（目前）</a:t>
+                        <a:t>場景 4 柱子：強化學習（目前）</a:t>
                       </a:r>
                     </a:p>
                   </a:txBody>
@@ -5822,7 +5827,7 @@
                           <a:ea typeface="Microsoft JhengHei"/>
                           <a:cs typeface="Microsoft JhengHei"/>
                         </a:rPr>
-                        <a:t>窄通道：Nav2 RPP</a:t>
+                        <a:t>場景 2 長牆：Nav2 RPP</a:t>
                       </a:r>
                     </a:p>
                   </a:txBody>
@@ -6062,7 +6067,7 @@
                 <a:ea typeface="Microsoft JhengHei"/>
                 <a:cs typeface="Microsoft JhengHei"/>
               </a:rPr>
-              <a:t>•  各為單次執行；用模擬器的真實位置評分</a:t>
+              <a:t>•  場景 3 論文：強化學習 4 / 5（通道較寬，走得到但繞路）；場景 1：Nav2 RPP 1 / 7。各為單次執行</a:t>
             </a:r>
           </a:p>
         </p:txBody>
@@ -14603,7 +14608,7 @@
                 <a:ea typeface="Microsoft JhengHei"/>
                 <a:cs typeface="Microsoft JhengHei"/>
               </a:rPr>
-              <a:t>測試場地：比投影片場景更難</a:t>
+              <a:t>測試場景：四個場景，圖為場景 2 長牆</a:t>
             </a:r>
           </a:p>
         </p:txBody>
@@ -14682,7 +14687,7 @@
                 <a:ea typeface="Microsoft JhengHei"/>
                 <a:cs typeface="Microsoft JhengHei"/>
               </a:rPr>
-              <a:t>預設場地：蛇行繞過兩道長牆、穿過 0.6 m 的門口、門後還有死巷；連續走 7 個目標點</a:t>
+              <a:t>場景 1 PPT 第一頁｜場景 2 長牆（預設）｜場景 3 論文地圖｜場景 4 柱子；每個場景連續走多個目標點</a:t>
             </a:r>
           </a:p>
         </p:txBody>
@@ -15181,7 +15186,7 @@
                 <a:ea typeface="Microsoft JhengHei"/>
                 <a:cs typeface="Microsoft JhengHei"/>
               </a:rPr>
-              <a:t>目前的強化學習策略到達的目標數</a:t>
+              <a:t>目前的強化學習策略在場景 2 到達的目標數</a:t>
             </a:r>
           </a:p>
         </p:txBody>
@@ -15225,7 +15230,7 @@
                 <a:ea typeface="Microsoft JhengHei"/>
                 <a:cs typeface="Microsoft JhengHei"/>
               </a:rPr>
-              <a:t>藍線：目前的策略（只訓練 10 萬步）走過的路徑，卡在 0.6 m 的門口前。另有密集柱子與論文地圖兩個場地</a:t>
+              <a:t>場景 2：蛇行繞過兩道長牆、穿過 0.6 m 的門口、門後有死巷。藍線是目前的策略走過的路徑，卡在門口前</a:t>
             </a:r>
           </a:p>
         </p:txBody>

--- a/docs/DOGZILLA_專案簡報.pptx
+++ b/docs/DOGZILLA_專案簡報.pptx
@@ -1304,37 +1304,32 @@
           <a:lstStyle/>
           <a:p>
             <a:r>
-              <a:t>測試場景一共四個。場景 1 是投影片第一頁的原始場景，最簡單；場景 2 是長牆，也是預設場景，就是這張圖；場景 3 是照一篇論文的地圖建的；場景 4 是密集的柱子。</a:t>
-            </a:r>
-          </a:p>
-          <a:p>
-            <a:r>
-              <a:t>先看圖上的場景 2，它比場景 1 難很多。</a:t>
-            </a:r>
-          </a:p>
-          <a:p>
-            <a:r>
-              <a:t>機器狗從左邊出發，要先往下繞過第一道牆、再往上繞過第二道牆（牆和圍牆之間的缺口寬 1.2 公尺），穿過只有 60 公分寬的門口，門後面還有一個死巷，第一個目標就在死巷的正後方。</a:t>
-            </a:r>
-          </a:p>
-          <a:p>
-            <a:r>
-              <a:t>圖上的數字是 7 個目標點的順序，走完一個接著走下一個，全部用模擬器的真實位置評分。</a:t>
-            </a:r>
-          </a:p>
-          <a:p>
-            <a:r>
-              <a:t>藍線是目前附的策略走的路：只訓練了 10 萬步，走得不穩，在第一個缺口前猶豫很久，之後一直卡在 60 公分的門口前過不去，7 個目標只到 3 個。</a:t>
-            </a:r>
-          </a:p>
-          <a:p>
-            <a:r>
-              <a:t>場景 3 是照一篇四足機器人路徑規劃論文的地圖建的，10 公尺見方，有 16 塊障礙物和論文裡提到的 L 形陷阱；場景 4 是 21 根柱子交錯排列的密集障礙物場地。</a:t>
-            </a:r>
-          </a:p>
-          <a:p>
-            <a:r>
-              <a:t>場地都定義在同一個檔案裡，要加新場地只要加一段定義、跑一個指令。</a:t>
+              <a:t>測試場景一共四個，每個場景都要連續走完圖上的目標點，數字是順序。</a:t>
+            </a:r>
+          </a:p>
+          <a:p>
+            <a:r>
+              <a:t>場景 1 是投影片第一頁的原始場景，障礙物零散、空間寬鬆，最簡單。</a:t>
+            </a:r>
+          </a:p>
+          <a:p>
+            <a:r>
+              <a:t>場景 2 是長牆，也是預設場景：要蛇行繞過兩道長牆，穿過只有 60 公分寬的門口，門後還有一個死巷，第一個目標就在死巷的正後方。</a:t>
+            </a:r>
+          </a:p>
+          <a:p>
+            <a:r>
+              <a:t>場景 3 是照一篇四足機器人路徑規劃論文的地圖建的，10 公尺見方，有 16 塊障礙物和論文裡提到的 L 形陷阱，路線最長。</a:t>
+            </a:r>
+          </a:p>
+          <a:p>
+            <a:r>
+              <a:t>場景 4 是 21 根柱子交錯排列，柱子之間的空隙大約 60 公分，沒有一條直線可以走。</a:t>
+            </a:r>
+          </a:p>
+          <a:p>
+            <a:r>
+              <a:t>場景 2 和場景 4 圖上的藍線，是目前附的強化學習策略走過的路徑：場景 2 卡在門口前，場景 4 卡在柱子之間。</a:t>
             </a:r>
           </a:p>
         </p:txBody>
@@ -14608,7 +14603,7 @@
                 <a:ea typeface="Microsoft JhengHei"/>
                 <a:cs typeface="Microsoft JhengHei"/>
               </a:rPr>
-              <a:t>測試場景：四個場景，圖為場景 2 長牆</a:t>
+              <a:t>測試場景：四個場景</a:t>
             </a:r>
           </a:p>
         </p:txBody>
@@ -14687,7 +14682,7 @@
                 <a:ea typeface="Microsoft JhengHei"/>
                 <a:cs typeface="Microsoft JhengHei"/>
               </a:rPr>
-              <a:t>場景 1 PPT 第一頁｜場景 2 長牆（預設）｜場景 3 論文地圖｜場景 4 柱子；每個場景連續走多個目標點</a:t>
+              <a:t>每個場景連續走多個目標點（紅星，數字是順序），用模擬器的真實位置評分</a:t>
             </a:r>
           </a:p>
         </p:txBody>
@@ -14782,7 +14777,7 @@
       </p:sp>
       <p:pic>
         <p:nvPicPr>
-          <p:cNvPr id="10" name="Picture 9" descr="trajectory.png"/>
+          <p:cNvPr id="10" name="Picture 9" descr="scene_project3.png"/>
           <p:cNvPicPr>
             <a:picLocks noChangeAspect="1"/>
           </p:cNvPicPr>
@@ -14796,8 +14791,8 @@
         </p:blipFill>
         <p:spPr>
           <a:xfrm>
-            <a:off x="548640" y="2148840"/>
-            <a:ext cx="6543040" cy="3998524"/>
+            <a:off x="548640" y="2212848"/>
+            <a:ext cx="3063240" cy="1871980"/>
           </a:xfrm>
           <a:prstGeom prst="rect">
             <a:avLst/>
@@ -14806,44 +14801,14 @@
       </p:pic>
       <p:sp>
         <p:nvSpPr>
-          <p:cNvPr id="11" name="Rectangle 10"/>
-          <p:cNvSpPr/>
-          <p:nvPr/>
-        </p:nvSpPr>
-        <p:spPr>
-          <a:xfrm>
-            <a:off x="7635240" y="2331720"/>
-            <a:ext cx="4005072" cy="1051560"/>
-          </a:xfrm>
-          <a:prstGeom prst="rect">
-            <a:avLst/>
-          </a:prstGeom>
-          <a:solidFill>
-            <a:srgbClr val="EEF3F9"/>
-          </a:solidFill>
-          <a:ln>
-            <a:noFill/>
-          </a:ln>
-          <a:effectLst/>
-        </p:spPr>
-        <p:txBody>
-          <a:bodyPr rtlCol="0" anchor="ctr"/>
-          <a:lstStyle/>
-          <a:p>
-            <a:pPr algn="ctr"/>
-          </a:p>
-        </p:txBody>
-      </p:sp>
-      <p:sp>
-        <p:nvSpPr>
-          <p:cNvPr id="12" name="TextBox 11"/>
+          <p:cNvPr id="11" name="TextBox 10"/>
           <p:cNvSpPr txBox="1"/>
           <p:nvPr/>
         </p:nvSpPr>
         <p:spPr>
           <a:xfrm>
-            <a:off x="7818119" y="2404872"/>
-            <a:ext cx="3657600" cy="640080"/>
+            <a:off x="3703320" y="2350008"/>
+            <a:ext cx="2377440" cy="1737360"/>
           </a:xfrm>
           <a:prstGeom prst="rect">
             <a:avLst/>
@@ -14851,21 +14816,18 @@
           <a:noFill/>
         </p:spPr>
         <p:txBody>
-          <a:bodyPr wrap="square" anchor="ctr" lIns="36576" rIns="36576" tIns="18288" bIns="18288">
+          <a:bodyPr wrap="square">
             <a:spAutoFit/>
           </a:bodyPr>
           <a:lstStyle/>
           <a:p>
-            <a:pPr algn="l">
-              <a:lnSpc>
-                <a:spcPct val="115000"/>
-              </a:lnSpc>
+            <a:pPr>
               <a:spcAft>
                 <a:spcPts val="400"/>
               </a:spcAft>
             </a:pPr>
             <a:r>
-              <a:rPr sz="3400" b="1">
+              <a:rPr sz="1600" b="1">
                 <a:solidFill>
                   <a:srgbClr val="00549D"/>
                 </a:solidFill>
@@ -14873,48 +14835,11 @@
                 <a:ea typeface="Microsoft JhengHei"/>
                 <a:cs typeface="Microsoft JhengHei"/>
               </a:rPr>
-              <a:t>0.6</a:t>
-            </a:r>
-            <a:r>
-              <a:rPr sz="1600" b="1">
-                <a:solidFill>
-                  <a:srgbClr val="00549D"/>
-                </a:solidFill>
-                <a:latin typeface="Calibri"/>
-                <a:ea typeface="Microsoft JhengHei"/>
-                <a:cs typeface="Microsoft JhengHei"/>
-              </a:rPr>
-              <a:t>  m</a:t>
-            </a:r>
-          </a:p>
-        </p:txBody>
-      </p:sp>
-      <p:sp>
-        <p:nvSpPr>
-          <p:cNvPr id="13" name="TextBox 12"/>
-          <p:cNvSpPr txBox="1"/>
-          <p:nvPr/>
-        </p:nvSpPr>
-        <p:spPr>
-          <a:xfrm>
-            <a:off x="7818119" y="2990087"/>
-            <a:ext cx="3657600" cy="320040"/>
-          </a:xfrm>
-          <a:prstGeom prst="rect">
-            <a:avLst/>
-          </a:prstGeom>
-          <a:noFill/>
-        </p:spPr>
-        <p:txBody>
-          <a:bodyPr wrap="square" anchor="t" lIns="36576" rIns="36576" tIns="18288" bIns="18288">
-            <a:spAutoFit/>
-          </a:bodyPr>
-          <a:lstStyle/>
-          <a:p>
-            <a:pPr algn="l">
-              <a:lnSpc>
-                <a:spcPct val="115000"/>
-              </a:lnSpc>
+              <a:t>場景 1：PPT 第一頁</a:t>
+            </a:r>
+          </a:p>
+          <a:p>
+            <a:pPr>
               <a:spcAft>
                 <a:spcPts val="400"/>
               </a:spcAft>
@@ -14922,128 +14847,35 @@
             <a:r>
               <a:rPr sz="1200" b="0">
                 <a:solidFill>
-                  <a:srgbClr val="403F3D"/>
+                  <a:srgbClr val="333333"/>
                 </a:solidFill>
                 <a:latin typeface="Calibri"/>
                 <a:ea typeface="Microsoft JhengHei"/>
                 <a:cs typeface="Microsoft JhengHei"/>
               </a:rPr>
-              <a:t>最窄的門口（長牆旁的缺口 1.2 m）</a:t>
-            </a:r>
-          </a:p>
-        </p:txBody>
-      </p:sp>
-      <p:sp>
-        <p:nvSpPr>
-          <p:cNvPr id="14" name="Rectangle 13"/>
-          <p:cNvSpPr/>
-          <p:nvPr/>
-        </p:nvSpPr>
-        <p:spPr>
-          <a:xfrm>
-            <a:off x="7635240" y="3538728"/>
-            <a:ext cx="4005072" cy="1051560"/>
-          </a:xfrm>
-          <a:prstGeom prst="rect">
-            <a:avLst/>
-          </a:prstGeom>
-          <a:solidFill>
-            <a:srgbClr val="EEF3F9"/>
-          </a:solidFill>
-          <a:ln>
-            <a:noFill/>
-          </a:ln>
-          <a:effectLst/>
-        </p:spPr>
-        <p:txBody>
-          <a:bodyPr rtlCol="0" anchor="ctr"/>
-          <a:lstStyle/>
-          <a:p>
-            <a:pPr algn="ctr"/>
-          </a:p>
-        </p:txBody>
-      </p:sp>
-      <p:sp>
-        <p:nvSpPr>
-          <p:cNvPr id="15" name="TextBox 14"/>
-          <p:cNvSpPr txBox="1"/>
-          <p:nvPr/>
-        </p:nvSpPr>
-        <p:spPr>
-          <a:xfrm>
-            <a:off x="7818119" y="3611880"/>
-            <a:ext cx="3657600" cy="640080"/>
-          </a:xfrm>
-          <a:prstGeom prst="rect">
-            <a:avLst/>
-          </a:prstGeom>
-          <a:noFill/>
-        </p:spPr>
-        <p:txBody>
-          <a:bodyPr wrap="square" anchor="ctr" lIns="36576" rIns="36576" tIns="18288" bIns="18288">
-            <a:spAutoFit/>
-          </a:bodyPr>
-          <a:lstStyle/>
-          <a:p>
-            <a:pPr algn="l">
-              <a:lnSpc>
-                <a:spcPct val="115000"/>
-              </a:lnSpc>
+              <a:t>7 m × 4 m，投影片的原始場景</a:t>
+            </a:r>
+          </a:p>
+          <a:p>
+            <a:pPr>
               <a:spcAft>
                 <a:spcPts val="400"/>
               </a:spcAft>
             </a:pPr>
             <a:r>
-              <a:rPr sz="3400" b="1">
-                <a:solidFill>
-                  <a:srgbClr val="00549D"/>
+              <a:rPr sz="1200" b="0">
+                <a:solidFill>
+                  <a:srgbClr val="333333"/>
                 </a:solidFill>
                 <a:latin typeface="Calibri"/>
                 <a:ea typeface="Microsoft JhengHei"/>
                 <a:cs typeface="Microsoft JhengHei"/>
               </a:rPr>
-              <a:t>11</a:t>
-            </a:r>
-            <a:r>
-              <a:rPr sz="1600" b="1">
-                <a:solidFill>
-                  <a:srgbClr val="00549D"/>
-                </a:solidFill>
-                <a:latin typeface="Calibri"/>
-                <a:ea typeface="Microsoft JhengHei"/>
-                <a:cs typeface="Microsoft JhengHei"/>
-              </a:rPr>
-              <a:t>  m</a:t>
-            </a:r>
-          </a:p>
-        </p:txBody>
-      </p:sp>
-      <p:sp>
-        <p:nvSpPr>
-          <p:cNvPr id="16" name="TextBox 15"/>
-          <p:cNvSpPr txBox="1"/>
-          <p:nvPr/>
-        </p:nvSpPr>
-        <p:spPr>
-          <a:xfrm>
-            <a:off x="7818119" y="4197096"/>
-            <a:ext cx="3657600" cy="320040"/>
-          </a:xfrm>
-          <a:prstGeom prst="rect">
-            <a:avLst/>
-          </a:prstGeom>
-          <a:noFill/>
-        </p:spPr>
-        <p:txBody>
-          <a:bodyPr wrap="square" anchor="t" lIns="36576" rIns="36576" tIns="18288" bIns="18288">
-            <a:spAutoFit/>
-          </a:bodyPr>
-          <a:lstStyle/>
-          <a:p>
-            <a:pPr algn="l">
-              <a:lnSpc>
-                <a:spcPct val="115000"/>
-              </a:lnSpc>
+              <a:t>方塊、隔牆、圓柱，空間寬鬆</a:t>
+            </a:r>
+          </a:p>
+          <a:p>
+            <a:pPr>
               <a:spcAft>
                 <a:spcPts val="400"/>
               </a:spcAft>
@@ -15051,57 +14883,51 @@
             <a:r>
               <a:rPr sz="1200" b="0">
                 <a:solidFill>
-                  <a:srgbClr val="403F3D"/>
+                  <a:srgbClr val="333333"/>
                 </a:solidFill>
                 <a:latin typeface="Calibri"/>
                 <a:ea typeface="Microsoft JhengHei"/>
                 <a:cs typeface="Microsoft JhengHei"/>
               </a:rPr>
-              <a:t>第 1 段要蛇行走的距離</a:t>
-            </a:r>
-          </a:p>
-        </p:txBody>
-      </p:sp>
-      <p:sp>
-        <p:nvSpPr>
-          <p:cNvPr id="17" name="Rectangle 16"/>
-          <p:cNvSpPr/>
-          <p:nvPr/>
-        </p:nvSpPr>
-        <p:spPr>
-          <a:xfrm>
-            <a:off x="7635240" y="4745736"/>
-            <a:ext cx="4005072" cy="1051560"/>
-          </a:xfrm>
-          <a:prstGeom prst="rect">
-            <a:avLst/>
-          </a:prstGeom>
-          <a:solidFill>
-            <a:srgbClr val="EEF3F9"/>
-          </a:solidFill>
-          <a:ln>
-            <a:noFill/>
-          </a:ln>
-          <a:effectLst/>
-        </p:spPr>
-        <p:txBody>
-          <a:bodyPr rtlCol="0" anchor="ctr"/>
-          <a:lstStyle/>
-          <a:p>
-            <a:pPr algn="ctr"/>
-          </a:p>
-        </p:txBody>
-      </p:sp>
-      <p:sp>
-        <p:nvSpPr>
-          <p:cNvPr id="18" name="TextBox 17"/>
+              <a:t>7 個目標點</a:t>
+            </a:r>
+          </a:p>
+        </p:txBody>
+      </p:sp>
+      <p:pic>
+        <p:nvPicPr>
+          <p:cNvPr id="12" name="Picture 11" descr="scene_corridor.png"/>
+          <p:cNvPicPr>
+            <a:picLocks noChangeAspect="1"/>
+          </p:cNvPicPr>
+          <p:nvPr/>
+        </p:nvPicPr>
+        <p:blipFill>
+          <a:blip r:embed="rId5"/>
+          <a:stretch>
+            <a:fillRect/>
+          </a:stretch>
+        </p:blipFill>
+        <p:spPr>
+          <a:xfrm>
+            <a:off x="6217920" y="2212848"/>
+            <a:ext cx="3063240" cy="1871980"/>
+          </a:xfrm>
+          <a:prstGeom prst="rect">
+            <a:avLst/>
+          </a:prstGeom>
+        </p:spPr>
+      </p:pic>
+      <p:sp>
+        <p:nvSpPr>
+          <p:cNvPr id="13" name="TextBox 12"/>
           <p:cNvSpPr txBox="1"/>
           <p:nvPr/>
         </p:nvSpPr>
         <p:spPr>
           <a:xfrm>
-            <a:off x="7818119" y="4818888"/>
-            <a:ext cx="3657600" cy="640080"/>
+            <a:off x="9372600" y="2350008"/>
+            <a:ext cx="2377440" cy="1737360"/>
           </a:xfrm>
           <a:prstGeom prst="rect">
             <a:avLst/>
@@ -15109,21 +14935,18 @@
           <a:noFill/>
         </p:spPr>
         <p:txBody>
-          <a:bodyPr wrap="square" anchor="ctr" lIns="36576" rIns="36576" tIns="18288" bIns="18288">
+          <a:bodyPr wrap="square">
             <a:spAutoFit/>
           </a:bodyPr>
           <a:lstStyle/>
           <a:p>
-            <a:pPr algn="l">
-              <a:lnSpc>
-                <a:spcPct val="115000"/>
-              </a:lnSpc>
+            <a:pPr>
               <a:spcAft>
                 <a:spcPts val="400"/>
               </a:spcAft>
             </a:pPr>
             <a:r>
-              <a:rPr sz="3400" b="1">
+              <a:rPr sz="1600" b="1">
                 <a:solidFill>
                   <a:srgbClr val="00549D"/>
                 </a:solidFill>
@@ -15131,48 +14954,11 @@
                 <a:ea typeface="Microsoft JhengHei"/>
                 <a:cs typeface="Microsoft JhengHei"/>
               </a:rPr>
-              <a:t>3</a:t>
-            </a:r>
-            <a:r>
-              <a:rPr sz="1600" b="1">
-                <a:solidFill>
-                  <a:srgbClr val="00549D"/>
-                </a:solidFill>
-                <a:latin typeface="Calibri"/>
-                <a:ea typeface="Microsoft JhengHei"/>
-                <a:cs typeface="Microsoft JhengHei"/>
-              </a:rPr>
-              <a:t>  / 7</a:t>
-            </a:r>
-          </a:p>
-        </p:txBody>
-      </p:sp>
-      <p:sp>
-        <p:nvSpPr>
-          <p:cNvPr id="19" name="TextBox 18"/>
-          <p:cNvSpPr txBox="1"/>
-          <p:nvPr/>
-        </p:nvSpPr>
-        <p:spPr>
-          <a:xfrm>
-            <a:off x="7818119" y="5404103"/>
-            <a:ext cx="3657600" cy="320040"/>
-          </a:xfrm>
-          <a:prstGeom prst="rect">
-            <a:avLst/>
-          </a:prstGeom>
-          <a:noFill/>
-        </p:spPr>
-        <p:txBody>
-          <a:bodyPr wrap="square" anchor="t" lIns="36576" rIns="36576" tIns="18288" bIns="18288">
-            <a:spAutoFit/>
-          </a:bodyPr>
-          <a:lstStyle/>
-          <a:p>
-            <a:pPr algn="l">
-              <a:lnSpc>
-                <a:spcPct val="115000"/>
-              </a:lnSpc>
+              <a:t>場景 2：長牆（預設）</a:t>
+            </a:r>
+          </a:p>
+          <a:p>
+            <a:pPr>
               <a:spcAft>
                 <a:spcPts val="400"/>
               </a:spcAft>
@@ -15180,57 +14966,287 @@
             <a:r>
               <a:rPr sz="1200" b="0">
                 <a:solidFill>
-                  <a:srgbClr val="403F3D"/>
+                  <a:srgbClr val="333333"/>
                 </a:solidFill>
                 <a:latin typeface="Calibri"/>
                 <a:ea typeface="Microsoft JhengHei"/>
                 <a:cs typeface="Microsoft JhengHei"/>
               </a:rPr>
-              <a:t>目前的強化學習策略在場景 2 到達的目標數</a:t>
-            </a:r>
-          </a:p>
-        </p:txBody>
-      </p:sp>
-      <p:sp>
-        <p:nvSpPr>
-          <p:cNvPr id="20" name="TextBox 19"/>
-          <p:cNvSpPr txBox="1"/>
-          <p:nvPr/>
-        </p:nvSpPr>
-        <p:spPr>
-          <a:xfrm>
-            <a:off x="7635240" y="5943600"/>
-            <a:ext cx="4005072" cy="411480"/>
-          </a:xfrm>
-          <a:prstGeom prst="rect">
-            <a:avLst/>
-          </a:prstGeom>
-          <a:noFill/>
-        </p:spPr>
-        <p:txBody>
-          <a:bodyPr wrap="square" anchor="t" lIns="36576" rIns="36576" tIns="18288" bIns="18288">
-            <a:spAutoFit/>
-          </a:bodyPr>
-          <a:lstStyle/>
-          <a:p>
-            <a:pPr algn="l">
-              <a:lnSpc>
-                <a:spcPct val="115000"/>
-              </a:lnSpc>
+              <a:t>7 m × 4 m，兩道交錯的長牆</a:t>
+            </a:r>
+          </a:p>
+          <a:p>
+            <a:pPr>
               <a:spcAft>
                 <a:spcPts val="400"/>
               </a:spcAft>
             </a:pPr>
             <a:r>
-              <a:rPr sz="1000" b="0">
-                <a:solidFill>
-                  <a:srgbClr val="7A7977"/>
+              <a:rPr sz="1200" b="0">
+                <a:solidFill>
+                  <a:srgbClr val="333333"/>
                 </a:solidFill>
                 <a:latin typeface="Calibri"/>
                 <a:ea typeface="Microsoft JhengHei"/>
                 <a:cs typeface="Microsoft JhengHei"/>
               </a:rPr>
-              <a:t>場景 2：蛇行繞過兩道長牆、穿過 0.6 m 的門口、門後有死巷。藍線是目前的策略走過的路徑，卡在門口前</a:t>
+              <a:t>0.6 m 的門口，門後有死巷</a:t>
+            </a:r>
+          </a:p>
+          <a:p>
+            <a:pPr>
+              <a:spcAft>
+                <a:spcPts val="400"/>
+              </a:spcAft>
+            </a:pPr>
+            <a:r>
+              <a:rPr sz="1200" b="0">
+                <a:solidFill>
+                  <a:srgbClr val="333333"/>
+                </a:solidFill>
+                <a:latin typeface="Calibri"/>
+                <a:ea typeface="Microsoft JhengHei"/>
+                <a:cs typeface="Microsoft JhengHei"/>
+              </a:rPr>
+              <a:t>7 個目標點</a:t>
+            </a:r>
+          </a:p>
+        </p:txBody>
+      </p:sp>
+      <p:pic>
+        <p:nvPicPr>
+          <p:cNvPr id="14" name="Picture 13" descr="scene_paper_fig4.png"/>
+          <p:cNvPicPr>
+            <a:picLocks noChangeAspect="1"/>
+          </p:cNvPicPr>
+          <p:nvPr/>
+        </p:nvPicPr>
+        <p:blipFill>
+          <a:blip r:embed="rId6"/>
+          <a:stretch>
+            <a:fillRect/>
+          </a:stretch>
+        </p:blipFill>
+        <p:spPr>
+          <a:xfrm>
+            <a:off x="1061426" y="4315968"/>
+            <a:ext cx="2037666" cy="1874520"/>
+          </a:xfrm>
+          <a:prstGeom prst="rect">
+            <a:avLst/>
+          </a:prstGeom>
+        </p:spPr>
+      </p:pic>
+      <p:sp>
+        <p:nvSpPr>
+          <p:cNvPr id="15" name="TextBox 14"/>
+          <p:cNvSpPr txBox="1"/>
+          <p:nvPr/>
+        </p:nvSpPr>
+        <p:spPr>
+          <a:xfrm>
+            <a:off x="3703320" y="4453128"/>
+            <a:ext cx="2377440" cy="1737360"/>
+          </a:xfrm>
+          <a:prstGeom prst="rect">
+            <a:avLst/>
+          </a:prstGeom>
+          <a:noFill/>
+        </p:spPr>
+        <p:txBody>
+          <a:bodyPr wrap="square">
+            <a:spAutoFit/>
+          </a:bodyPr>
+          <a:lstStyle/>
+          <a:p>
+            <a:pPr>
+              <a:spcAft>
+                <a:spcPts val="400"/>
+              </a:spcAft>
+            </a:pPr>
+            <a:r>
+              <a:rPr sz="1600" b="1">
+                <a:solidFill>
+                  <a:srgbClr val="00549D"/>
+                </a:solidFill>
+                <a:latin typeface="Calibri"/>
+                <a:ea typeface="Microsoft JhengHei"/>
+                <a:cs typeface="Microsoft JhengHei"/>
+              </a:rPr>
+              <a:t>場景 3：論文</a:t>
+            </a:r>
+          </a:p>
+          <a:p>
+            <a:pPr>
+              <a:spcAft>
+                <a:spcPts val="400"/>
+              </a:spcAft>
+            </a:pPr>
+            <a:r>
+              <a:rPr sz="1200" b="0">
+                <a:solidFill>
+                  <a:srgbClr val="333333"/>
+                </a:solidFill>
+                <a:latin typeface="Calibri"/>
+                <a:ea typeface="Microsoft JhengHei"/>
+                <a:cs typeface="Microsoft JhengHei"/>
+              </a:rPr>
+              <a:t>10 m × 10 m，論文 Fig. 4 地圖</a:t>
+            </a:r>
+          </a:p>
+          <a:p>
+            <a:pPr>
+              <a:spcAft>
+                <a:spcPts val="400"/>
+              </a:spcAft>
+            </a:pPr>
+            <a:r>
+              <a:rPr sz="1200" b="0">
+                <a:solidFill>
+                  <a:srgbClr val="333333"/>
+                </a:solidFill>
+                <a:latin typeface="Calibri"/>
+                <a:ea typeface="Microsoft JhengHei"/>
+                <a:cs typeface="Microsoft JhengHei"/>
+              </a:rPr>
+              <a:t>16 塊障礙物，含 L 形陷阱</a:t>
+            </a:r>
+          </a:p>
+          <a:p>
+            <a:pPr>
+              <a:spcAft>
+                <a:spcPts val="400"/>
+              </a:spcAft>
+            </a:pPr>
+            <a:r>
+              <a:rPr sz="1200" b="0">
+                <a:solidFill>
+                  <a:srgbClr val="333333"/>
+                </a:solidFill>
+                <a:latin typeface="Calibri"/>
+                <a:ea typeface="Microsoft JhengHei"/>
+                <a:cs typeface="Microsoft JhengHei"/>
+              </a:rPr>
+              <a:t>5 個目標點，最長一段約 15 m</a:t>
+            </a:r>
+          </a:p>
+        </p:txBody>
+      </p:sp>
+      <p:pic>
+        <p:nvPicPr>
+          <p:cNvPr id="16" name="Picture 15" descr="scene_clutter.png"/>
+          <p:cNvPicPr>
+            <a:picLocks noChangeAspect="1"/>
+          </p:cNvPicPr>
+          <p:nvPr/>
+        </p:nvPicPr>
+        <p:blipFill>
+          <a:blip r:embed="rId7"/>
+          <a:stretch>
+            <a:fillRect/>
+          </a:stretch>
+        </p:blipFill>
+        <p:spPr>
+          <a:xfrm>
+            <a:off x="6217920" y="4315968"/>
+            <a:ext cx="3063240" cy="1871980"/>
+          </a:xfrm>
+          <a:prstGeom prst="rect">
+            <a:avLst/>
+          </a:prstGeom>
+        </p:spPr>
+      </p:pic>
+      <p:sp>
+        <p:nvSpPr>
+          <p:cNvPr id="17" name="TextBox 16"/>
+          <p:cNvSpPr txBox="1"/>
+          <p:nvPr/>
+        </p:nvSpPr>
+        <p:spPr>
+          <a:xfrm>
+            <a:off x="9372600" y="4453128"/>
+            <a:ext cx="2377440" cy="1737360"/>
+          </a:xfrm>
+          <a:prstGeom prst="rect">
+            <a:avLst/>
+          </a:prstGeom>
+          <a:noFill/>
+        </p:spPr>
+        <p:txBody>
+          <a:bodyPr wrap="square">
+            <a:spAutoFit/>
+          </a:bodyPr>
+          <a:lstStyle/>
+          <a:p>
+            <a:pPr>
+              <a:spcAft>
+                <a:spcPts val="400"/>
+              </a:spcAft>
+            </a:pPr>
+            <a:r>
+              <a:rPr sz="1600" b="1">
+                <a:solidFill>
+                  <a:srgbClr val="00549D"/>
+                </a:solidFill>
+                <a:latin typeface="Calibri"/>
+                <a:ea typeface="Microsoft JhengHei"/>
+                <a:cs typeface="Microsoft JhengHei"/>
+              </a:rPr>
+              <a:t>場景 4：柱子</a:t>
+            </a:r>
+          </a:p>
+          <a:p>
+            <a:pPr>
+              <a:spcAft>
+                <a:spcPts val="400"/>
+              </a:spcAft>
+            </a:pPr>
+            <a:r>
+              <a:rPr sz="1200" b="0">
+                <a:solidFill>
+                  <a:srgbClr val="333333"/>
+                </a:solidFill>
+                <a:latin typeface="Calibri"/>
+                <a:ea typeface="Microsoft JhengHei"/>
+                <a:cs typeface="Microsoft JhengHei"/>
+              </a:rPr>
+              <a:t>7 m × 4 m，21 根交錯的柱子</a:t>
+            </a:r>
+          </a:p>
+          <a:p>
+            <a:pPr>
+              <a:spcAft>
+                <a:spcPts val="400"/>
+              </a:spcAft>
+            </a:pPr>
+            <a:r>
+              <a:rPr sz="1200" b="0">
+                <a:solidFill>
+                  <a:srgbClr val="333333"/>
+                </a:solidFill>
+                <a:latin typeface="Calibri"/>
+                <a:ea typeface="Microsoft JhengHei"/>
+                <a:cs typeface="Microsoft JhengHei"/>
+              </a:rPr>
+              <a:t>空隙約 0.6 m，沒有直線可走</a:t>
+            </a:r>
+          </a:p>
+          <a:p>
+            <a:pPr>
+              <a:spcAft>
+                <a:spcPts val="400"/>
+              </a:spcAft>
+            </a:pPr>
+            <a:r>
+              <a:rPr sz="1200" b="0">
+                <a:solidFill>
+                  <a:srgbClr val="333333"/>
+                </a:solidFill>
+                <a:latin typeface="Calibri"/>
+                <a:ea typeface="Microsoft JhengHei"/>
+                <a:cs typeface="Microsoft JhengHei"/>
+              </a:rPr>
+              <a:t>7 個目標點</a:t>
             </a:r>
           </a:p>
         </p:txBody>
